--- a/Presentation/Komparativna analiza ML metodologija.pptx
+++ b/Presentation/Komparativna analiza ML metodologija.pptx
@@ -6,10 +6,12 @@
   </p:sldMasterIdLst>
   <p:sldIdLst>
     <p:sldId id="256" r:id="rId2"/>
-    <p:sldId id="257" r:id="rId3"/>
-    <p:sldId id="258" r:id="rId4"/>
-    <p:sldId id="259" r:id="rId5"/>
-    <p:sldId id="260" r:id="rId6"/>
+    <p:sldId id="264" r:id="rId3"/>
+    <p:sldId id="262" r:id="rId4"/>
+    <p:sldId id="265" r:id="rId5"/>
+    <p:sldId id="258" r:id="rId6"/>
+    <p:sldId id="259" r:id="rId7"/>
+    <p:sldId id="260" r:id="rId8"/>
   </p:sldIdLst>
   <p:sldSz cx="12192000" cy="6858000"/>
   <p:notesSz cx="6858000" cy="9144000"/>
@@ -263,7 +265,7 @@
           <a:p>
             <a:fld id="{B966B63C-CDDC-45F1-A941-1E23D4E81951}" type="datetimeFigureOut">
               <a:rPr lang="en-US" smtClean="0"/>
-              <a:t>5/27/2026</a:t>
+              <a:t>8/17/2026</a:t>
             </a:fld>
             <a:endParaRPr lang="en-US"/>
           </a:p>
@@ -461,7 +463,7 @@
           <a:p>
             <a:fld id="{B966B63C-CDDC-45F1-A941-1E23D4E81951}" type="datetimeFigureOut">
               <a:rPr lang="en-US" smtClean="0"/>
-              <a:t>5/27/2026</a:t>
+              <a:t>8/17/2026</a:t>
             </a:fld>
             <a:endParaRPr lang="en-US"/>
           </a:p>
@@ -669,7 +671,7 @@
           <a:p>
             <a:fld id="{B966B63C-CDDC-45F1-A941-1E23D4E81951}" type="datetimeFigureOut">
               <a:rPr lang="en-US" smtClean="0"/>
-              <a:t>5/27/2026</a:t>
+              <a:t>8/17/2026</a:t>
             </a:fld>
             <a:endParaRPr lang="en-US"/>
           </a:p>
@@ -867,7 +869,7 @@
           <a:p>
             <a:fld id="{B966B63C-CDDC-45F1-A941-1E23D4E81951}" type="datetimeFigureOut">
               <a:rPr lang="en-US" smtClean="0"/>
-              <a:t>5/27/2026</a:t>
+              <a:t>8/17/2026</a:t>
             </a:fld>
             <a:endParaRPr lang="en-US"/>
           </a:p>
@@ -1142,7 +1144,7 @@
           <a:p>
             <a:fld id="{B966B63C-CDDC-45F1-A941-1E23D4E81951}" type="datetimeFigureOut">
               <a:rPr lang="en-US" smtClean="0"/>
-              <a:t>5/27/2026</a:t>
+              <a:t>8/17/2026</a:t>
             </a:fld>
             <a:endParaRPr lang="en-US"/>
           </a:p>
@@ -1407,7 +1409,7 @@
           <a:p>
             <a:fld id="{B966B63C-CDDC-45F1-A941-1E23D4E81951}" type="datetimeFigureOut">
               <a:rPr lang="en-US" smtClean="0"/>
-              <a:t>5/27/2026</a:t>
+              <a:t>8/17/2026</a:t>
             </a:fld>
             <a:endParaRPr lang="en-US"/>
           </a:p>
@@ -1819,7 +1821,7 @@
           <a:p>
             <a:fld id="{B966B63C-CDDC-45F1-A941-1E23D4E81951}" type="datetimeFigureOut">
               <a:rPr lang="en-US" smtClean="0"/>
-              <a:t>5/27/2026</a:t>
+              <a:t>8/17/2026</a:t>
             </a:fld>
             <a:endParaRPr lang="en-US"/>
           </a:p>
@@ -1960,7 +1962,7 @@
           <a:p>
             <a:fld id="{B966B63C-CDDC-45F1-A941-1E23D4E81951}" type="datetimeFigureOut">
               <a:rPr lang="en-US" smtClean="0"/>
-              <a:t>5/27/2026</a:t>
+              <a:t>8/17/2026</a:t>
             </a:fld>
             <a:endParaRPr lang="en-US"/>
           </a:p>
@@ -2073,7 +2075,7 @@
           <a:p>
             <a:fld id="{B966B63C-CDDC-45F1-A941-1E23D4E81951}" type="datetimeFigureOut">
               <a:rPr lang="en-US" smtClean="0"/>
-              <a:t>5/27/2026</a:t>
+              <a:t>8/17/2026</a:t>
             </a:fld>
             <a:endParaRPr lang="en-US"/>
           </a:p>
@@ -2384,7 +2386,7 @@
           <a:p>
             <a:fld id="{B966B63C-CDDC-45F1-A941-1E23D4E81951}" type="datetimeFigureOut">
               <a:rPr lang="en-US" smtClean="0"/>
-              <a:t>5/27/2026</a:t>
+              <a:t>8/17/2026</a:t>
             </a:fld>
             <a:endParaRPr lang="en-US"/>
           </a:p>
@@ -2672,7 +2674,7 @@
           <a:p>
             <a:fld id="{B966B63C-CDDC-45F1-A941-1E23D4E81951}" type="datetimeFigureOut">
               <a:rPr lang="en-US" smtClean="0"/>
-              <a:t>5/27/2026</a:t>
+              <a:t>8/17/2026</a:t>
             </a:fld>
             <a:endParaRPr lang="en-US"/>
           </a:p>
@@ -2913,7 +2915,7 @@
           <a:p>
             <a:fld id="{B966B63C-CDDC-45F1-A941-1E23D4E81951}" type="datetimeFigureOut">
               <a:rPr lang="en-US" smtClean="0"/>
-              <a:t>5/27/2026</a:t>
+              <a:t>8/17/2026</a:t>
             </a:fld>
             <a:endParaRPr lang="en-US"/>
           </a:p>
@@ -3356,30 +3358,42 @@
         </p:nvSpPr>
         <p:spPr/>
         <p:txBody>
-          <a:bodyPr/>
+          <a:bodyPr>
+            <a:noAutofit/>
+          </a:bodyPr>
           <a:lstStyle/>
           <a:p>
-            <a:r>
-              <a:rPr lang="en-US" dirty="0" err="1"/>
-              <a:t>Komparativna</a:t>
-            </a:r>
-            <a:r>
-              <a:rPr lang="en-US" dirty="0"/>
-              <a:t> </a:t>
-            </a:r>
-            <a:r>
-              <a:rPr lang="en-US" dirty="0" err="1"/>
-              <a:t>analiza</a:t>
-            </a:r>
-            <a:r>
-              <a:rPr lang="en-US" dirty="0"/>
-              <a:t> ML </a:t>
-            </a:r>
-            <a:r>
-              <a:rPr lang="en-US" dirty="0" err="1"/>
-              <a:t>metodologija</a:t>
-            </a:r>
-            <a:endParaRPr lang="en-US" dirty="0"/>
+            <a:pPr marL="0" marR="0" algn="ctr">
+              <a:spcBef>
+                <a:spcPts val="0"/>
+              </a:spcBef>
+              <a:spcAft>
+                <a:spcPts val="1000"/>
+              </a:spcAft>
+            </a:pPr>
+            <a:br>
+              <a:rPr lang="bs-Latn-BA" sz="4000" cap="small" dirty="0">
+                <a:effectLst/>
+                <a:latin typeface="Times New Roman" panose="02020603050405020304" pitchFamily="18" charset="0"/>
+                <a:ea typeface="Calibri" panose="020F0502020204030204" pitchFamily="34" charset="0"/>
+                <a:cs typeface="Times New Roman" panose="02020603050405020304" pitchFamily="18" charset="0"/>
+              </a:rPr>
+            </a:br>
+            <a:r>
+              <a:rPr lang="bs-Latn-BA" sz="4000" cap="small" dirty="0">
+                <a:effectLst/>
+                <a:latin typeface="Times New Roman" panose="02020603050405020304" pitchFamily="18" charset="0"/>
+                <a:ea typeface="Calibri" panose="020F0502020204030204" pitchFamily="34" charset="0"/>
+                <a:cs typeface="Times New Roman" panose="02020603050405020304" pitchFamily="18" charset="0"/>
+              </a:rPr>
+              <a:t>Uporedna analiza Python i .NET okruženja za treniranje modela dubokog učenja na primjeru detekcije raka pluća</a:t>
+            </a:r>
+            <a:endParaRPr lang="en-US" sz="4000" dirty="0">
+              <a:effectLst/>
+              <a:latin typeface="Times New Roman" panose="02020603050405020304" pitchFamily="18" charset="0"/>
+              <a:ea typeface="Calibri" panose="020F0502020204030204" pitchFamily="34" charset="0"/>
+              <a:cs typeface="Times New Roman" panose="02020603050405020304" pitchFamily="18" charset="0"/>
+            </a:endParaRPr>
           </a:p>
         </p:txBody>
       </p:sp>
@@ -3466,149 +3480,6 @@
               <a:buNone/>
               <a:tabLst/>
             </a:pPr>
-            <a:r>
-              <a:rPr kumimoji="0" lang="en-US" altLang="en-US" sz="1800" b="0" i="0" u="none" strike="noStrike" cap="none" normalizeH="0" baseline="0" dirty="0" err="1">
-                <a:ln>
-                  <a:noFill/>
-                </a:ln>
-                <a:solidFill>
-                  <a:schemeClr val="tx1"/>
-                </a:solidFill>
-                <a:effectLst/>
-                <a:latin typeface="Arial Unicode MS"/>
-              </a:rPr>
-              <a:t>Evaluacija</a:t>
-            </a:r>
-            <a:r>
-              <a:rPr kumimoji="0" lang="en-US" altLang="en-US" sz="1800" b="0" i="0" u="none" strike="noStrike" cap="none" normalizeH="0" baseline="0" dirty="0">
-                <a:ln>
-                  <a:noFill/>
-                </a:ln>
-                <a:solidFill>
-                  <a:schemeClr val="tx1"/>
-                </a:solidFill>
-                <a:effectLst/>
-                <a:latin typeface="Arial Unicode MS"/>
-              </a:rPr>
-              <a:t> C# u </a:t>
-            </a:r>
-            <a:r>
-              <a:rPr kumimoji="0" lang="en-US" altLang="en-US" sz="1800" b="0" i="0" u="none" strike="noStrike" cap="none" normalizeH="0" baseline="0" dirty="0" err="1">
-                <a:ln>
-                  <a:noFill/>
-                </a:ln>
-                <a:solidFill>
-                  <a:schemeClr val="tx1"/>
-                </a:solidFill>
-                <a:effectLst/>
-                <a:latin typeface="Arial Unicode MS"/>
-              </a:rPr>
-              <a:t>odnosu</a:t>
-            </a:r>
-            <a:r>
-              <a:rPr kumimoji="0" lang="en-US" altLang="en-US" sz="1800" b="0" i="0" u="none" strike="noStrike" cap="none" normalizeH="0" baseline="0" dirty="0">
-                <a:ln>
-                  <a:noFill/>
-                </a:ln>
-                <a:solidFill>
-                  <a:schemeClr val="tx1"/>
-                </a:solidFill>
-                <a:effectLst/>
-                <a:latin typeface="Arial Unicode MS"/>
-              </a:rPr>
-              <a:t> </a:t>
-            </a:r>
-            <a:r>
-              <a:rPr kumimoji="0" lang="en-US" altLang="en-US" sz="1800" b="0" i="0" u="none" strike="noStrike" cap="none" normalizeH="0" baseline="0" dirty="0" err="1">
-                <a:ln>
-                  <a:noFill/>
-                </a:ln>
-                <a:solidFill>
-                  <a:schemeClr val="tx1"/>
-                </a:solidFill>
-                <a:effectLst/>
-                <a:latin typeface="Arial Unicode MS"/>
-              </a:rPr>
-              <a:t>na</a:t>
-            </a:r>
-            <a:r>
-              <a:rPr kumimoji="0" lang="en-US" altLang="en-US" sz="1800" b="0" i="0" u="none" strike="noStrike" cap="none" normalizeH="0" baseline="0" dirty="0">
-                <a:ln>
-                  <a:noFill/>
-                </a:ln>
-                <a:solidFill>
-                  <a:schemeClr val="tx1"/>
-                </a:solidFill>
-                <a:effectLst/>
-                <a:latin typeface="Arial Unicode MS"/>
-              </a:rPr>
-              <a:t> Python za </a:t>
-            </a:r>
-            <a:r>
-              <a:rPr kumimoji="0" lang="en-US" altLang="en-US" sz="1800" b="0" i="0" u="none" strike="noStrike" cap="none" normalizeH="0" baseline="0" dirty="0" err="1">
-                <a:ln>
-                  <a:noFill/>
-                </a:ln>
-                <a:solidFill>
-                  <a:schemeClr val="tx1"/>
-                </a:solidFill>
-                <a:effectLst/>
-                <a:latin typeface="Arial Unicode MS"/>
-              </a:rPr>
-              <a:t>modeliranje</a:t>
-            </a:r>
-            <a:r>
-              <a:rPr kumimoji="0" lang="en-US" altLang="en-US" sz="1800" b="0" i="0" u="none" strike="noStrike" cap="none" normalizeH="0" baseline="0" dirty="0">
-                <a:ln>
-                  <a:noFill/>
-                </a:ln>
-                <a:solidFill>
-                  <a:schemeClr val="tx1"/>
-                </a:solidFill>
-                <a:effectLst/>
-                <a:latin typeface="Arial Unicode MS"/>
-              </a:rPr>
-              <a:t> </a:t>
-            </a:r>
-            <a:r>
-              <a:rPr kumimoji="0" lang="en-US" altLang="en-US" sz="1800" b="0" i="0" u="none" strike="noStrike" cap="none" normalizeH="0" baseline="0" dirty="0" err="1">
-                <a:ln>
-                  <a:noFill/>
-                </a:ln>
-                <a:solidFill>
-                  <a:schemeClr val="tx1"/>
-                </a:solidFill>
-                <a:effectLst/>
-                <a:latin typeface="Arial Unicode MS"/>
-              </a:rPr>
-              <a:t>raka</a:t>
-            </a:r>
-            <a:r>
-              <a:rPr kumimoji="0" lang="en-US" altLang="en-US" sz="1800" b="0" i="0" u="none" strike="noStrike" cap="none" normalizeH="0" baseline="0" dirty="0">
-                <a:ln>
-                  <a:noFill/>
-                </a:ln>
-                <a:solidFill>
-                  <a:schemeClr val="tx1"/>
-                </a:solidFill>
-                <a:effectLst/>
-                <a:latin typeface="Arial Unicode MS"/>
-              </a:rPr>
-              <a:t> </a:t>
-            </a:r>
-            <a:r>
-              <a:rPr kumimoji="0" lang="en-US" altLang="en-US" sz="1800" b="0" i="0" u="none" strike="noStrike" cap="none" normalizeH="0" baseline="0" dirty="0" err="1">
-                <a:ln>
-                  <a:noFill/>
-                </a:ln>
-                <a:solidFill>
-                  <a:schemeClr val="tx1"/>
-                </a:solidFill>
-                <a:effectLst/>
-                <a:latin typeface="Arial Unicode MS"/>
-              </a:rPr>
-              <a:t>pluća</a:t>
-            </a:r>
             <a:endParaRPr kumimoji="0" lang="en-US" altLang="en-US" sz="1800" b="0" i="0" u="none" strike="noStrike" cap="none" normalizeH="0" baseline="0" dirty="0">
               <a:ln>
                 <a:noFill/>
@@ -3657,7 +3528,7 @@
           <p:cNvPr id="2" name="Title 1">
             <a:extLst>
               <a:ext uri="{FF2B5EF4-FFF2-40B4-BE49-F238E27FC236}">
-                <a16:creationId xmlns:a16="http://schemas.microsoft.com/office/drawing/2014/main" id="{157D0674-6526-4A1C-915D-2FD7B7885BEB}"/>
+                <a16:creationId xmlns:a16="http://schemas.microsoft.com/office/drawing/2014/main" id="{642D972C-BCE3-4F5E-B614-12241183882C}"/>
               </a:ext>
             </a:extLst>
           </p:cNvPr>
@@ -3668,34 +3539,536 @@
             <p:ph type="title"/>
           </p:nvPr>
         </p:nvSpPr>
+        <p:spPr/>
+        <p:txBody>
+          <a:bodyPr/>
+          <a:lstStyle/>
+          <a:p>
+            <a:r>
+              <a:rPr lang="en-US" dirty="0" err="1"/>
+              <a:t>Cilj</a:t>
+            </a:r>
+            <a:r>
+              <a:rPr lang="en-US" dirty="0"/>
+              <a:t> </a:t>
+            </a:r>
+            <a:r>
+              <a:rPr lang="en-US" dirty="0" err="1"/>
+              <a:t>rada</a:t>
+            </a:r>
+            <a:endParaRPr lang="en-US" dirty="0"/>
+          </a:p>
+        </p:txBody>
+      </p:sp>
+      <p:pic>
+        <p:nvPicPr>
+          <p:cNvPr id="6" name="Picture Placeholder 5">
+            <a:extLst>
+              <a:ext uri="{FF2B5EF4-FFF2-40B4-BE49-F238E27FC236}">
+                <a16:creationId xmlns:a16="http://schemas.microsoft.com/office/drawing/2014/main" id="{67B3B748-2B19-45C0-91A4-47B1E8A450ED}"/>
+              </a:ext>
+            </a:extLst>
+          </p:cNvPr>
+          <p:cNvPicPr>
+            <a:picLocks noGrp="1" noChangeAspect="1"/>
+          </p:cNvPicPr>
+          <p:nvPr>
+            <p:ph type="pic" idx="1"/>
+          </p:nvPr>
+        </p:nvPicPr>
+        <p:blipFill>
+          <a:blip r:embed="rId2">
+            <a:extLst>
+              <a:ext uri="{28A0092B-C50C-407E-A947-70E740481C1C}">
+                <a14:useLocalDpi xmlns:a14="http://schemas.microsoft.com/office/drawing/2010/main" val="0"/>
+              </a:ext>
+            </a:extLst>
+          </a:blip>
+          <a:srcRect t="3391" b="3391"/>
+          <a:stretch>
+            <a:fillRect/>
+          </a:stretch>
+        </p:blipFill>
         <p:spPr>
           <a:xfrm>
-            <a:off x="839788" y="992186"/>
-            <a:ext cx="3932237" cy="651887"/>
+            <a:off x="5183188" y="987426"/>
+            <a:ext cx="6172200" cy="4387764"/>
           </a:xfrm>
+          <a:prstGeom prst="roundRect">
+            <a:avLst>
+              <a:gd name="adj" fmla="val 7115"/>
+            </a:avLst>
+          </a:prstGeom>
         </p:spPr>
+      </p:pic>
+      <p:sp>
+        <p:nvSpPr>
+          <p:cNvPr id="4" name="Text Placeholder 3">
+            <a:extLst>
+              <a:ext uri="{FF2B5EF4-FFF2-40B4-BE49-F238E27FC236}">
+                <a16:creationId xmlns:a16="http://schemas.microsoft.com/office/drawing/2014/main" id="{BB815A87-A581-4D1B-9581-F90ACA453F1C}"/>
+              </a:ext>
+            </a:extLst>
+          </p:cNvPr>
+          <p:cNvSpPr>
+            <a:spLocks noGrp="1"/>
+          </p:cNvSpPr>
+          <p:nvPr>
+            <p:ph type="body" sz="half" idx="2"/>
+          </p:nvPr>
+        </p:nvSpPr>
+        <p:spPr/>
         <p:txBody>
           <a:bodyPr/>
           <a:lstStyle/>
           <a:p>
             <a:r>
               <a:rPr lang="en-US" dirty="0" err="1"/>
-              <a:t>Cilj</a:t>
-            </a:r>
-            <a:r>
-              <a:rPr lang="bs-Latn-BA" dirty="0"/>
-              <a:t> rada</a:t>
-            </a:r>
+              <a:t>Dominacija</a:t>
+            </a:r>
+            <a:r>
+              <a:rPr lang="en-US" dirty="0"/>
+              <a:t> Python </a:t>
+            </a:r>
+            <a:r>
+              <a:rPr lang="en-US" dirty="0" err="1"/>
+              <a:t>programskog</a:t>
+            </a:r>
+            <a:r>
+              <a:rPr lang="en-US" dirty="0"/>
+              <a:t> </a:t>
+            </a:r>
+            <a:r>
+              <a:rPr lang="en-US" dirty="0" err="1"/>
+              <a:t>jezika</a:t>
+            </a:r>
+            <a:r>
+              <a:rPr lang="en-US" dirty="0"/>
+              <a:t> za </a:t>
+            </a:r>
+            <a:r>
+              <a:rPr lang="en-US" dirty="0" err="1"/>
+              <a:t>rješavanja</a:t>
+            </a:r>
+            <a:r>
+              <a:rPr lang="en-US" dirty="0"/>
+              <a:t> </a:t>
+            </a:r>
+            <a:r>
+              <a:rPr lang="en-US" dirty="0" err="1"/>
+              <a:t>problema</a:t>
+            </a:r>
+            <a:r>
+              <a:rPr lang="en-US" dirty="0"/>
+              <a:t> </a:t>
+            </a:r>
+            <a:r>
+              <a:rPr lang="en-US" dirty="0" err="1"/>
+              <a:t>uz</a:t>
+            </a:r>
+            <a:r>
+              <a:rPr lang="en-US" dirty="0"/>
+              <a:t> </a:t>
+            </a:r>
+            <a:r>
+              <a:rPr lang="en-US" dirty="0" err="1"/>
+              <a:t>pomoć</a:t>
+            </a:r>
+            <a:r>
+              <a:rPr lang="en-US" dirty="0"/>
+              <a:t> </a:t>
+            </a:r>
+            <a:r>
+              <a:rPr lang="en-US" dirty="0" err="1"/>
+              <a:t>mašinskog</a:t>
+            </a:r>
+            <a:r>
+              <a:rPr lang="en-US" dirty="0"/>
+              <a:t> </a:t>
+            </a:r>
+            <a:r>
+              <a:rPr lang="en-US" dirty="0" err="1"/>
+              <a:t>učenja</a:t>
+            </a:r>
+            <a:r>
+              <a:rPr lang="en-US" dirty="0"/>
+              <a:t> je </a:t>
+            </a:r>
+            <a:r>
+              <a:rPr lang="en-US" dirty="0" err="1"/>
+              <a:t>siguran</a:t>
+            </a:r>
+            <a:r>
+              <a:rPr lang="en-US" dirty="0"/>
+              <a:t>. </a:t>
+            </a:r>
+          </a:p>
+          <a:p>
+            <a:r>
+              <a:rPr lang="en-US" dirty="0" err="1"/>
+              <a:t>Međutim</a:t>
+            </a:r>
+            <a:r>
+              <a:rPr lang="en-US" dirty="0"/>
+              <a:t>, </a:t>
+            </a:r>
+            <a:r>
+              <a:rPr lang="en-US" dirty="0" err="1"/>
+              <a:t>veliki</a:t>
+            </a:r>
+            <a:r>
+              <a:rPr lang="en-US" dirty="0"/>
+              <a:t> </a:t>
+            </a:r>
+            <a:r>
+              <a:rPr lang="en-US" dirty="0" err="1"/>
+              <a:t>broj</a:t>
+            </a:r>
+            <a:r>
+              <a:rPr lang="en-US" dirty="0"/>
+              <a:t> </a:t>
+            </a:r>
+            <a:r>
+              <a:rPr lang="en-US" dirty="0" err="1"/>
+              <a:t>postojećih</a:t>
+            </a:r>
+            <a:r>
+              <a:rPr lang="en-US" dirty="0"/>
+              <a:t> </a:t>
+            </a:r>
+            <a:r>
+              <a:rPr lang="en-US" dirty="0" err="1"/>
+              <a:t>aplikacija</a:t>
+            </a:r>
+            <a:r>
+              <a:rPr lang="en-US" dirty="0"/>
+              <a:t> se </a:t>
+            </a:r>
+            <a:r>
+              <a:rPr lang="en-US" dirty="0" err="1"/>
+              <a:t>oslanja</a:t>
+            </a:r>
+            <a:r>
+              <a:rPr lang="en-US" dirty="0"/>
+              <a:t> </a:t>
+            </a:r>
+            <a:r>
+              <a:rPr lang="en-US" dirty="0" err="1"/>
+              <a:t>na</a:t>
+            </a:r>
+            <a:r>
+              <a:rPr lang="en-US" dirty="0"/>
+              <a:t> </a:t>
+            </a:r>
+            <a:r>
+              <a:rPr lang="en-US" dirty="0" err="1"/>
+              <a:t>raznolik</a:t>
+            </a:r>
+            <a:r>
+              <a:rPr lang="en-US" dirty="0"/>
+              <a:t> </a:t>
+            </a:r>
+            <a:r>
+              <a:rPr lang="en-US" dirty="0" err="1"/>
+              <a:t>skup</a:t>
+            </a:r>
+            <a:r>
+              <a:rPr lang="en-US" dirty="0"/>
+              <a:t> </a:t>
+            </a:r>
+            <a:r>
+              <a:rPr lang="en-US" dirty="0" err="1"/>
+              <a:t>tehnologija</a:t>
+            </a:r>
+            <a:r>
+              <a:rPr lang="en-US" dirty="0"/>
+              <a:t>. </a:t>
+            </a:r>
+            <a:r>
+              <a:rPr lang="en-US" dirty="0" err="1"/>
+              <a:t>Neki</a:t>
+            </a:r>
+            <a:r>
+              <a:rPr lang="en-US" dirty="0"/>
+              <a:t> od </a:t>
+            </a:r>
+            <a:r>
+              <a:rPr lang="en-US" dirty="0" err="1"/>
+              <a:t>najpopularnih</a:t>
+            </a:r>
+            <a:r>
+              <a:rPr lang="en-US" dirty="0"/>
+              <a:t> </a:t>
+            </a:r>
+            <a:r>
+              <a:rPr lang="en-US" dirty="0" err="1"/>
+              <a:t>programskih</a:t>
+            </a:r>
+            <a:r>
+              <a:rPr lang="en-US" dirty="0"/>
+              <a:t> </a:t>
+            </a:r>
+            <a:r>
+              <a:rPr lang="en-US" dirty="0" err="1"/>
+              <a:t>jezika</a:t>
+            </a:r>
+            <a:r>
+              <a:rPr lang="en-US" dirty="0"/>
+              <a:t> </a:t>
+            </a:r>
+            <a:r>
+              <a:rPr lang="en-US" dirty="0" err="1"/>
+              <a:t>su</a:t>
+            </a:r>
+            <a:r>
+              <a:rPr lang="en-US" dirty="0"/>
+              <a:t>: TypeScript, Java, C#, PHP, C++ I </a:t>
+            </a:r>
+            <a:r>
+              <a:rPr lang="en-US" dirty="0" err="1"/>
+              <a:t>drugi</a:t>
+            </a:r>
+            <a:r>
+              <a:rPr lang="en-US" dirty="0"/>
+              <a:t>. </a:t>
+            </a:r>
+          </a:p>
+          <a:p>
+            <a:r>
+              <a:rPr lang="en-US" dirty="0" err="1"/>
+              <a:t>Proces</a:t>
+            </a:r>
+            <a:r>
+              <a:rPr lang="en-US" dirty="0"/>
+              <a:t> </a:t>
+            </a:r>
+            <a:r>
+              <a:rPr lang="en-US" dirty="0" err="1"/>
+              <a:t>uvođenja</a:t>
+            </a:r>
+            <a:r>
+              <a:rPr lang="en-US" dirty="0"/>
+              <a:t> Python </a:t>
+            </a:r>
+            <a:r>
+              <a:rPr lang="en-US" dirty="0" err="1"/>
+              <a:t>rješenja</a:t>
+            </a:r>
+            <a:r>
+              <a:rPr lang="en-US" dirty="0"/>
+              <a:t> u </a:t>
+            </a:r>
+            <a:r>
+              <a:rPr lang="en-US" dirty="0" err="1"/>
+              <a:t>postojeće</a:t>
+            </a:r>
+            <a:r>
+              <a:rPr lang="en-US" dirty="0"/>
+              <a:t> </a:t>
+            </a:r>
+            <a:r>
+              <a:rPr lang="en-US" dirty="0" err="1"/>
+              <a:t>aplikacije</a:t>
+            </a:r>
+            <a:r>
+              <a:rPr lang="en-US" dirty="0"/>
+              <a:t> </a:t>
+            </a:r>
+            <a:r>
+              <a:rPr lang="en-US" dirty="0" err="1"/>
+              <a:t>uvodi</a:t>
+            </a:r>
+            <a:r>
+              <a:rPr lang="en-US" dirty="0"/>
+              <a:t> </a:t>
+            </a:r>
+            <a:r>
+              <a:rPr lang="en-US" dirty="0" err="1"/>
+              <a:t>dodatnu</a:t>
+            </a:r>
+            <a:r>
+              <a:rPr lang="en-US" dirty="0"/>
+              <a:t> </a:t>
+            </a:r>
+            <a:r>
+              <a:rPr lang="en-US" dirty="0" err="1"/>
+              <a:t>kompleksnost</a:t>
+            </a:r>
+            <a:r>
+              <a:rPr lang="en-US" dirty="0"/>
+              <a:t>. </a:t>
+            </a:r>
+            <a:br>
+              <a:rPr lang="en-US" dirty="0"/>
+            </a:br>
+            <a:r>
+              <a:rPr lang="en-US" dirty="0" err="1"/>
+              <a:t>Pitanje</a:t>
+            </a:r>
+            <a:r>
+              <a:rPr lang="en-US" dirty="0"/>
+              <a:t> </a:t>
+            </a:r>
+            <a:r>
+              <a:rPr lang="en-US" dirty="0" err="1"/>
+              <a:t>koje</a:t>
+            </a:r>
+            <a:r>
+              <a:rPr lang="en-US" dirty="0"/>
+              <a:t> </a:t>
+            </a:r>
+            <a:r>
+              <a:rPr lang="en-US" dirty="0" err="1"/>
+              <a:t>dati</a:t>
+            </a:r>
+            <a:r>
+              <a:rPr lang="en-US" dirty="0"/>
+              <a:t> rad </a:t>
+            </a:r>
+            <a:r>
+              <a:rPr lang="en-US" dirty="0" err="1"/>
+              <a:t>postavlja</a:t>
+            </a:r>
+            <a:r>
+              <a:rPr lang="en-US" dirty="0"/>
+              <a:t> </a:t>
+            </a:r>
+            <a:r>
+              <a:rPr lang="en-US" dirty="0" err="1"/>
+              <a:t>jeste</a:t>
+            </a:r>
+            <a:r>
+              <a:rPr lang="en-US" dirty="0"/>
+              <a:t> </a:t>
+            </a:r>
+            <a:r>
+              <a:rPr lang="en-US" dirty="0" err="1"/>
+              <a:t>koje</a:t>
+            </a:r>
+            <a:r>
+              <a:rPr lang="en-US" dirty="0"/>
+              <a:t> </a:t>
+            </a:r>
+            <a:r>
+              <a:rPr lang="en-US" dirty="0" err="1"/>
+              <a:t>su</a:t>
+            </a:r>
+            <a:r>
+              <a:rPr lang="en-US" dirty="0"/>
+              <a:t> </a:t>
+            </a:r>
+            <a:r>
+              <a:rPr lang="en-US" dirty="0" err="1"/>
+              <a:t>stvarne</a:t>
+            </a:r>
+            <a:r>
+              <a:rPr lang="en-US" dirty="0"/>
+              <a:t> </a:t>
+            </a:r>
+            <a:r>
+              <a:rPr lang="en-US" dirty="0" err="1"/>
+              <a:t>prednosti</a:t>
+            </a:r>
+            <a:r>
+              <a:rPr lang="en-US" dirty="0"/>
+              <a:t>, mane I </a:t>
+            </a:r>
+            <a:r>
+              <a:rPr lang="en-US" dirty="0" err="1"/>
+              <a:t>razlike</a:t>
+            </a:r>
+            <a:r>
+              <a:rPr lang="en-US" dirty="0"/>
+              <a:t> u </a:t>
+            </a:r>
+            <a:r>
+              <a:rPr lang="en-US" dirty="0" err="1"/>
+              <a:t>performansama</a:t>
+            </a:r>
+            <a:r>
+              <a:rPr lang="en-US" dirty="0"/>
+              <a:t> </a:t>
+            </a:r>
+            <a:r>
+              <a:rPr lang="en-US" dirty="0" err="1"/>
+              <a:t>prilikom</a:t>
+            </a:r>
+            <a:r>
+              <a:rPr lang="en-US" dirty="0"/>
+              <a:t> </a:t>
+            </a:r>
+            <a:r>
+              <a:rPr lang="en-US" dirty="0" err="1"/>
+              <a:t>rješavanja</a:t>
+            </a:r>
+            <a:r>
+              <a:rPr lang="en-US" dirty="0"/>
+              <a:t> </a:t>
+            </a:r>
+            <a:r>
+              <a:rPr lang="en-US" dirty="0" err="1"/>
+              <a:t>problema</a:t>
+            </a:r>
+            <a:r>
+              <a:rPr lang="en-US" dirty="0"/>
+              <a:t> </a:t>
+            </a:r>
+            <a:r>
+              <a:rPr lang="en-US" dirty="0" err="1"/>
+              <a:t>mašinskog</a:t>
+            </a:r>
+            <a:r>
+              <a:rPr lang="en-US" dirty="0"/>
+              <a:t> </a:t>
+            </a:r>
+            <a:r>
+              <a:rPr lang="en-US" dirty="0" err="1"/>
+              <a:t>učenja</a:t>
+            </a:r>
+            <a:r>
+              <a:rPr lang="en-US" dirty="0"/>
+              <a:t> u </a:t>
+            </a:r>
+            <a:r>
+              <a:rPr lang="en-US" dirty="0" err="1"/>
+              <a:t>alternativnom</a:t>
+            </a:r>
+            <a:r>
+              <a:rPr lang="en-US" dirty="0"/>
+              <a:t> </a:t>
+            </a:r>
+            <a:r>
+              <a:rPr lang="en-US" dirty="0" err="1"/>
+              <a:t>ekosistemu</a:t>
+            </a:r>
+            <a:r>
+              <a:rPr lang="en-US" dirty="0"/>
+              <a:t> od Python, </a:t>
+            </a:r>
+            <a:r>
+              <a:rPr lang="en-US" dirty="0" err="1"/>
+              <a:t>poput</a:t>
+            </a:r>
+            <a:r>
+              <a:rPr lang="en-US" dirty="0"/>
+              <a:t> .NET.</a:t>
+            </a:r>
+            <a:endParaRPr lang="bs-Latn-BA" dirty="0"/>
+          </a:p>
+          <a:p>
             <a:endParaRPr lang="en-US" dirty="0"/>
           </a:p>
-        </p:txBody>
-      </p:sp>
-      <p:sp>
-        <p:nvSpPr>
-          <p:cNvPr id="22" name="TextBox 21">
-            <a:extLst>
-              <a:ext uri="{FF2B5EF4-FFF2-40B4-BE49-F238E27FC236}">
-                <a16:creationId xmlns:a16="http://schemas.microsoft.com/office/drawing/2014/main" id="{A331A224-2A83-4CFB-A34A-F884690CC3D8}"/>
+          <a:p>
+            <a:endParaRPr lang="en-US" dirty="0"/>
+          </a:p>
+        </p:txBody>
+      </p:sp>
+      <p:sp>
+        <p:nvSpPr>
+          <p:cNvPr id="7" name="TextBox 6">
+            <a:extLst>
+              <a:ext uri="{FF2B5EF4-FFF2-40B4-BE49-F238E27FC236}">
+                <a16:creationId xmlns:a16="http://schemas.microsoft.com/office/drawing/2014/main" id="{FDD9F49E-587E-48EE-959B-59DC6829D5B4}"/>
               </a:ext>
             </a:extLst>
           </p:cNvPr>
@@ -3704,8 +4077,8 @@
         </p:nvSpPr>
         <p:spPr>
           <a:xfrm>
-            <a:off x="836612" y="1890117"/>
-            <a:ext cx="3731491" cy="3077766"/>
+            <a:off x="5180012" y="5424617"/>
+            <a:ext cx="6172200" cy="369332"/>
           </a:xfrm>
           <a:prstGeom prst="rect">
             <a:avLst/>
@@ -3718,243 +4091,110 @@
           </a:bodyPr>
           <a:lstStyle/>
           <a:p>
-            <a:r>
-              <a:rPr lang="en-US" sz="1400" dirty="0" err="1"/>
-              <a:t>Cilj</a:t>
-            </a:r>
-            <a:r>
-              <a:rPr lang="en-US" sz="1400" dirty="0"/>
-              <a:t> </a:t>
-            </a:r>
-            <a:r>
-              <a:rPr lang="en-US" sz="1400" dirty="0" err="1"/>
-              <a:t>ovog</a:t>
-            </a:r>
-            <a:r>
-              <a:rPr lang="en-US" sz="1400" dirty="0"/>
-              <a:t> </a:t>
-            </a:r>
-            <a:r>
-              <a:rPr lang="en-US" sz="1400" dirty="0" err="1"/>
-              <a:t>rada</a:t>
-            </a:r>
-            <a:r>
-              <a:rPr lang="en-US" sz="1400" dirty="0"/>
-              <a:t> </a:t>
-            </a:r>
-            <a:r>
-              <a:rPr lang="en-US" sz="1400" dirty="0" err="1"/>
-              <a:t>jeste</a:t>
-            </a:r>
-            <a:r>
-              <a:rPr lang="en-US" sz="1400" dirty="0"/>
-              <a:t> </a:t>
-            </a:r>
-            <a:r>
-              <a:rPr lang="en-US" sz="1400" dirty="0" err="1"/>
-              <a:t>uporedba</a:t>
-            </a:r>
-            <a:r>
-              <a:rPr lang="en-US" sz="1400" dirty="0"/>
-              <a:t> </a:t>
-            </a:r>
-            <a:r>
-              <a:rPr lang="en-US" sz="1400" dirty="0" err="1"/>
-              <a:t>metodologija</a:t>
-            </a:r>
-            <a:r>
-              <a:rPr lang="en-US" sz="1400" dirty="0"/>
-              <a:t> ma</a:t>
-            </a:r>
-            <a:r>
-              <a:rPr lang="bs-Latn-BA" sz="1400" dirty="0"/>
-              <a:t>šinskog učenja u C# i Python ekosistemima. Poređenje se gleda na osnovu brzine treniranja, tačnosti modela, kompleksnosti implementacije, aktivnosti ekosistema.</a:t>
-            </a:r>
-          </a:p>
-          <a:p>
-            <a:pPr marL="285750" indent="-285750">
-              <a:buFont typeface="Arial" panose="020B0604020202020204" pitchFamily="34" charset="0"/>
-              <a:buChar char="•"/>
-            </a:pPr>
-            <a:endParaRPr lang="bs-Latn-BA" dirty="0"/>
-          </a:p>
-          <a:p>
-            <a:pPr marL="285750" indent="-285750">
-              <a:buFont typeface="Arial" panose="020B0604020202020204" pitchFamily="34" charset="0"/>
-              <a:buChar char="•"/>
-            </a:pPr>
-            <a:r>
-              <a:rPr lang="bs-Latn-BA" sz="1400" dirty="0"/>
-              <a:t>Domena</a:t>
-            </a:r>
-            <a:r>
-              <a:rPr lang="en-US" sz="1400" dirty="0"/>
-              <a:t>: </a:t>
-            </a:r>
-            <a:r>
-              <a:rPr lang="en-US" sz="1400" dirty="0" err="1"/>
-              <a:t>Analiza</a:t>
-            </a:r>
-            <a:r>
-              <a:rPr lang="en-US" sz="1400" dirty="0"/>
-              <a:t> CT </a:t>
-            </a:r>
-            <a:r>
-              <a:rPr lang="en-US" sz="1400" dirty="0" err="1"/>
-              <a:t>slika</a:t>
-            </a:r>
-            <a:r>
-              <a:rPr lang="en-US" sz="1400" dirty="0"/>
-              <a:t> </a:t>
-            </a:r>
-            <a:r>
-              <a:rPr lang="en-US" sz="1400" dirty="0" err="1"/>
-              <a:t>raka</a:t>
-            </a:r>
-            <a:r>
-              <a:rPr lang="en-US" sz="1400" dirty="0"/>
-              <a:t> </a:t>
-            </a:r>
-            <a:r>
-              <a:rPr lang="en-US" sz="1400" dirty="0" err="1"/>
-              <a:t>plu</a:t>
-            </a:r>
-            <a:r>
-              <a:rPr lang="bs-Latn-BA" sz="1400" dirty="0"/>
-              <a:t>ća</a:t>
-            </a:r>
-          </a:p>
-          <a:p>
-            <a:pPr marL="285750" indent="-285750">
-              <a:buFont typeface="Arial" panose="020B0604020202020204" pitchFamily="34" charset="0"/>
-              <a:buChar char="•"/>
-            </a:pPr>
-            <a:r>
-              <a:rPr lang="bs-Latn-BA" sz="1400" dirty="0"/>
-              <a:t>C# Okruženje</a:t>
-            </a:r>
-            <a:r>
-              <a:rPr lang="en-US" sz="1400" dirty="0"/>
-              <a:t>: </a:t>
-            </a:r>
-            <a:r>
-              <a:rPr lang="bs-Latn-BA" sz="1400" dirty="0"/>
-              <a:t>Treniranje </a:t>
-            </a:r>
-            <a:r>
-              <a:rPr lang="en-US" sz="1400" dirty="0"/>
-              <a:t> </a:t>
-            </a:r>
-            <a:r>
-              <a:rPr lang="en-US" sz="1400" dirty="0" err="1"/>
-              <a:t>uz</a:t>
-            </a:r>
-            <a:r>
-              <a:rPr lang="en-US" sz="1400" dirty="0"/>
-              <a:t> </a:t>
-            </a:r>
-            <a:r>
-              <a:rPr lang="en-US" sz="1400" dirty="0" err="1"/>
-              <a:t>pomo</a:t>
-            </a:r>
-            <a:r>
-              <a:rPr lang="bs-Latn-BA" sz="1400" dirty="0"/>
-              <a:t>ć TorchSharp alata</a:t>
-            </a:r>
-          </a:p>
-          <a:p>
-            <a:pPr marL="285750" indent="-285750">
-              <a:buFont typeface="Arial" panose="020B0604020202020204" pitchFamily="34" charset="0"/>
-              <a:buChar char="•"/>
-            </a:pPr>
-            <a:r>
-              <a:rPr lang="bs-Latn-BA" sz="1400" dirty="0"/>
-              <a:t>Python okruženje</a:t>
-            </a:r>
-            <a:r>
-              <a:rPr lang="en-US" sz="1400" dirty="0"/>
-              <a:t>: </a:t>
-            </a:r>
-            <a:r>
-              <a:rPr lang="en-US" sz="1400" dirty="0" err="1"/>
-              <a:t>Treniranje</a:t>
-            </a:r>
-            <a:r>
-              <a:rPr lang="en-US" sz="1400" dirty="0"/>
-              <a:t> </a:t>
-            </a:r>
-            <a:r>
-              <a:rPr lang="en-US" sz="1400" dirty="0" err="1"/>
-              <a:t>uz</a:t>
-            </a:r>
-            <a:r>
-              <a:rPr lang="en-US" sz="1400" dirty="0"/>
-              <a:t> </a:t>
-            </a:r>
-            <a:r>
-              <a:rPr lang="en-US" sz="1400" dirty="0" err="1"/>
-              <a:t>pomo</a:t>
-            </a:r>
-            <a:r>
-              <a:rPr lang="bs-Latn-BA" sz="1400" dirty="0"/>
-              <a:t>ć keras alata</a:t>
-            </a:r>
-          </a:p>
-          <a:p>
-            <a:endParaRPr lang="bs-Latn-BA" dirty="0"/>
-          </a:p>
-          <a:p>
-            <a:r>
-              <a:rPr lang="bs-Latn-BA" dirty="0"/>
-              <a:t> </a:t>
-            </a:r>
-          </a:p>
-        </p:txBody>
-      </p:sp>
-      <p:pic>
-        <p:nvPicPr>
-          <p:cNvPr id="32" name="Picture Placeholder 31">
-            <a:extLst>
-              <a:ext uri="{FF2B5EF4-FFF2-40B4-BE49-F238E27FC236}">
-                <a16:creationId xmlns:a16="http://schemas.microsoft.com/office/drawing/2014/main" id="{970327FF-8C6E-4B62-B02E-F2CB02578430}"/>
-              </a:ext>
-            </a:extLst>
-          </p:cNvPr>
-          <p:cNvPicPr>
-            <a:picLocks noGrp="1" noChangeAspect="1"/>
-          </p:cNvPicPr>
-          <p:nvPr>
-            <p:ph type="pic" idx="1"/>
-          </p:nvPr>
-        </p:nvPicPr>
-        <p:blipFill>
-          <a:blip r:embed="rId2">
-            <a:extLst>
-              <a:ext uri="{28A0092B-C50C-407E-A947-70E740481C1C}">
-                <a14:useLocalDpi xmlns:a14="http://schemas.microsoft.com/office/drawing/2010/main" val="0"/>
-              </a:ext>
-            </a:extLst>
-          </a:blip>
-          <a:srcRect l="853" r="853"/>
-          <a:stretch>
-            <a:fillRect/>
-          </a:stretch>
-        </p:blipFill>
-        <p:spPr>
-          <a:prstGeom prst="roundRect">
-            <a:avLst>
-              <a:gd name="adj" fmla="val 5865"/>
-            </a:avLst>
-          </a:prstGeom>
-          <a:effectLst>
-            <a:softEdge rad="0"/>
-          </a:effectLst>
-        </p:spPr>
-      </p:pic>
+            <a:pPr algn="ctr"/>
+            <a:r>
+              <a:rPr kumimoji="0" lang="en-US" altLang="en-US" sz="1800" b="0" i="0" u="none" strike="noStrike" cap="none" normalizeH="0" baseline="0" dirty="0" err="1">
+                <a:ln>
+                  <a:noFill/>
+                </a:ln>
+                <a:solidFill>
+                  <a:schemeClr val="tx1"/>
+                </a:solidFill>
+                <a:effectLst/>
+              </a:rPr>
+              <a:t>Najčešće</a:t>
+            </a:r>
+            <a:r>
+              <a:rPr kumimoji="0" lang="en-US" altLang="en-US" sz="1800" b="0" i="0" u="none" strike="noStrike" cap="none" normalizeH="0" baseline="0" dirty="0">
+                <a:ln>
+                  <a:noFill/>
+                </a:ln>
+                <a:solidFill>
+                  <a:schemeClr val="tx1"/>
+                </a:solidFill>
+                <a:effectLst/>
+              </a:rPr>
+              <a:t> </a:t>
+            </a:r>
+            <a:r>
+              <a:rPr kumimoji="0" lang="en-US" altLang="en-US" sz="1800" b="0" i="0" u="none" strike="noStrike" cap="none" normalizeH="0" baseline="0" dirty="0" err="1">
+                <a:ln>
+                  <a:noFill/>
+                </a:ln>
+                <a:solidFill>
+                  <a:schemeClr val="tx1"/>
+                </a:solidFill>
+                <a:effectLst/>
+              </a:rPr>
+              <a:t>korištena</a:t>
+            </a:r>
+            <a:r>
+              <a:rPr kumimoji="0" lang="en-US" altLang="en-US" sz="1800" b="0" i="0" u="none" strike="noStrike" cap="none" normalizeH="0" baseline="0" dirty="0">
+                <a:ln>
+                  <a:noFill/>
+                </a:ln>
+                <a:solidFill>
+                  <a:schemeClr val="tx1"/>
+                </a:solidFill>
+                <a:effectLst/>
+              </a:rPr>
+              <a:t> </a:t>
+            </a:r>
+            <a:r>
+              <a:rPr kumimoji="0" lang="en-US" altLang="en-US" sz="1800" b="0" i="0" u="none" strike="noStrike" cap="none" normalizeH="0" baseline="0" dirty="0" err="1">
+                <a:ln>
+                  <a:noFill/>
+                </a:ln>
+                <a:solidFill>
+                  <a:schemeClr val="tx1"/>
+                </a:solidFill>
+                <a:effectLst/>
+              </a:rPr>
+              <a:t>okruženja</a:t>
+            </a:r>
+            <a:r>
+              <a:rPr kumimoji="0" lang="en-US" altLang="en-US" sz="1800" b="0" i="0" u="none" strike="noStrike" cap="none" normalizeH="0" baseline="0" dirty="0">
+                <a:ln>
+                  <a:noFill/>
+                </a:ln>
+                <a:solidFill>
+                  <a:schemeClr val="tx1"/>
+                </a:solidFill>
+                <a:effectLst/>
+              </a:rPr>
+              <a:t> za AI </a:t>
+            </a:r>
+            <a:r>
+              <a:rPr kumimoji="0" lang="en-US" altLang="en-US" sz="1800" b="0" i="0" u="none" strike="noStrike" cap="none" normalizeH="0" baseline="0" dirty="0" err="1">
+                <a:ln>
+                  <a:noFill/>
+                </a:ln>
+                <a:solidFill>
+                  <a:schemeClr val="tx1"/>
+                </a:solidFill>
+                <a:effectLst/>
+              </a:rPr>
+              <a:t>projekte</a:t>
+            </a:r>
+            <a:r>
+              <a:rPr kumimoji="0" lang="en-US" altLang="en-US" sz="1800" b="0" i="0" u="none" strike="noStrike" cap="none" normalizeH="0" baseline="0" dirty="0">
+                <a:ln>
+                  <a:noFill/>
+                </a:ln>
+                <a:solidFill>
+                  <a:schemeClr val="tx1"/>
+                </a:solidFill>
+                <a:effectLst/>
+              </a:rPr>
+              <a:t> (GitHub 2025) </a:t>
+            </a:r>
+          </a:p>
+        </p:txBody>
+      </p:sp>
     </p:spTree>
     <p:extLst>
       <p:ext uri="{BB962C8B-B14F-4D97-AF65-F5344CB8AC3E}">
-        <p14:creationId xmlns:p14="http://schemas.microsoft.com/office/powerpoint/2010/main" val="2995174232"/>
+        <p14:creationId xmlns:p14="http://schemas.microsoft.com/office/powerpoint/2010/main" val="4084039826"/>
       </p:ext>
     </p:extLst>
   </p:cSld>
@@ -3965,6 +4205,1078 @@
 </file>
 
 <file path=ppt/slides/slide3.xml><?xml version="1.0" encoding="utf-8"?>
+<p:sld xmlns:a="http://schemas.openxmlformats.org/drawingml/2006/main" xmlns:r="http://schemas.openxmlformats.org/officeDocument/2006/relationships" xmlns:p="http://schemas.openxmlformats.org/presentationml/2006/main">
+  <p:cSld>
+    <p:spTree>
+      <p:nvGrpSpPr>
+        <p:cNvPr id="1" name=""/>
+        <p:cNvGrpSpPr/>
+        <p:nvPr/>
+      </p:nvGrpSpPr>
+      <p:grpSpPr>
+        <a:xfrm>
+          <a:off x="0" y="0"/>
+          <a:ext cx="0" cy="0"/>
+          <a:chOff x="0" y="0"/>
+          <a:chExt cx="0" cy="0"/>
+        </a:xfrm>
+      </p:grpSpPr>
+      <p:sp>
+        <p:nvSpPr>
+          <p:cNvPr id="2" name="Title 1">
+            <a:extLst>
+              <a:ext uri="{FF2B5EF4-FFF2-40B4-BE49-F238E27FC236}">
+                <a16:creationId xmlns:a16="http://schemas.microsoft.com/office/drawing/2014/main" id="{387CF110-AACF-4E04-B21A-4E746508795E}"/>
+              </a:ext>
+            </a:extLst>
+          </p:cNvPr>
+          <p:cNvSpPr>
+            <a:spLocks noGrp="1"/>
+          </p:cNvSpPr>
+          <p:nvPr>
+            <p:ph type="title"/>
+          </p:nvPr>
+        </p:nvSpPr>
+        <p:spPr/>
+        <p:txBody>
+          <a:bodyPr/>
+          <a:lstStyle/>
+          <a:p>
+            <a:r>
+              <a:rPr lang="en-US" dirty="0" err="1"/>
+              <a:t>Opis</a:t>
+            </a:r>
+            <a:r>
+              <a:rPr lang="en-US" dirty="0"/>
+              <a:t> </a:t>
+            </a:r>
+            <a:r>
+              <a:rPr lang="en-US" dirty="0" err="1"/>
+              <a:t>problema</a:t>
+            </a:r>
+            <a:endParaRPr lang="en-US" dirty="0"/>
+          </a:p>
+        </p:txBody>
+      </p:sp>
+      <p:sp>
+        <p:nvSpPr>
+          <p:cNvPr id="4" name="Text Placeholder 3">
+            <a:extLst>
+              <a:ext uri="{FF2B5EF4-FFF2-40B4-BE49-F238E27FC236}">
+                <a16:creationId xmlns:a16="http://schemas.microsoft.com/office/drawing/2014/main" id="{07A5AAF4-CF89-4D12-B712-B5D660BF337B}"/>
+              </a:ext>
+            </a:extLst>
+          </p:cNvPr>
+          <p:cNvSpPr>
+            <a:spLocks noGrp="1"/>
+          </p:cNvSpPr>
+          <p:nvPr>
+            <p:ph type="body" sz="half" idx="2"/>
+          </p:nvPr>
+        </p:nvSpPr>
+        <p:spPr/>
+        <p:txBody>
+          <a:bodyPr/>
+          <a:lstStyle/>
+          <a:p>
+            <a:r>
+              <a:rPr lang="en-US" dirty="0"/>
+              <a:t>Za </a:t>
+            </a:r>
+            <a:r>
+              <a:rPr lang="en-US" dirty="0" err="1"/>
+              <a:t>analizu</a:t>
+            </a:r>
+            <a:r>
+              <a:rPr lang="en-US" dirty="0"/>
+              <a:t> </a:t>
+            </a:r>
+            <a:r>
+              <a:rPr lang="en-US" dirty="0" err="1"/>
+              <a:t>okruženja</a:t>
+            </a:r>
+            <a:r>
+              <a:rPr lang="en-US" dirty="0"/>
+              <a:t>, </a:t>
+            </a:r>
+            <a:r>
+              <a:rPr lang="en-US" dirty="0" err="1"/>
+              <a:t>odabran</a:t>
+            </a:r>
+            <a:r>
+              <a:rPr lang="en-US" dirty="0"/>
+              <a:t> je problem </a:t>
+            </a:r>
+            <a:r>
+              <a:rPr lang="en-US" dirty="0" err="1"/>
+              <a:t>detekcija</a:t>
+            </a:r>
+            <a:r>
+              <a:rPr lang="en-US" dirty="0"/>
+              <a:t> </a:t>
+            </a:r>
+            <a:r>
+              <a:rPr lang="en-US" dirty="0" err="1"/>
+              <a:t>raka</a:t>
+            </a:r>
+            <a:r>
+              <a:rPr lang="en-US" dirty="0"/>
+              <a:t> </a:t>
+            </a:r>
+            <a:r>
+              <a:rPr lang="en-US" dirty="0" err="1"/>
+              <a:t>pluća</a:t>
+            </a:r>
+            <a:r>
+              <a:rPr lang="en-US" dirty="0"/>
+              <a:t> </a:t>
+            </a:r>
+            <a:r>
+              <a:rPr lang="en-US" dirty="0" err="1"/>
+              <a:t>primjenom</a:t>
+            </a:r>
+            <a:r>
+              <a:rPr lang="en-US" dirty="0"/>
+              <a:t> </a:t>
+            </a:r>
+            <a:r>
+              <a:rPr lang="en-US" dirty="0" err="1"/>
+              <a:t>konvolucionih</a:t>
+            </a:r>
+            <a:r>
+              <a:rPr lang="en-US" dirty="0"/>
+              <a:t> </a:t>
+            </a:r>
+            <a:r>
+              <a:rPr lang="en-US" dirty="0" err="1"/>
+              <a:t>neuronskih</a:t>
+            </a:r>
+            <a:r>
+              <a:rPr lang="en-US" dirty="0"/>
+              <a:t> </a:t>
+            </a:r>
+            <a:r>
+              <a:rPr lang="en-US" dirty="0" err="1"/>
+              <a:t>mreža</a:t>
+            </a:r>
+            <a:r>
+              <a:rPr lang="en-US" dirty="0"/>
+              <a:t> </a:t>
+            </a:r>
+            <a:r>
+              <a:rPr lang="en-US" dirty="0" err="1"/>
+              <a:t>nad</a:t>
+            </a:r>
+            <a:r>
+              <a:rPr lang="en-US" dirty="0"/>
+              <a:t> </a:t>
+            </a:r>
+            <a:r>
+              <a:rPr lang="en-US" dirty="0" err="1"/>
+              <a:t>javno</a:t>
+            </a:r>
+            <a:r>
+              <a:rPr lang="en-US" dirty="0"/>
+              <a:t> </a:t>
+            </a:r>
+            <a:r>
+              <a:rPr lang="en-US" dirty="0" err="1"/>
+              <a:t>dostupnim</a:t>
+            </a:r>
+            <a:r>
+              <a:rPr lang="en-US" dirty="0"/>
+              <a:t> </a:t>
+            </a:r>
+            <a:r>
+              <a:rPr lang="en-US" dirty="0" err="1"/>
+              <a:t>medicinskim</a:t>
+            </a:r>
+            <a:r>
+              <a:rPr lang="en-US" dirty="0"/>
+              <a:t> </a:t>
+            </a:r>
+            <a:r>
+              <a:rPr lang="en-US" dirty="0" err="1"/>
+              <a:t>podacima</a:t>
+            </a:r>
+            <a:r>
+              <a:rPr lang="en-US" dirty="0"/>
+              <a:t>. </a:t>
+            </a:r>
+          </a:p>
+          <a:p>
+            <a:r>
+              <a:rPr lang="en-US" dirty="0" err="1"/>
+              <a:t>Metodologija</a:t>
+            </a:r>
+            <a:r>
+              <a:rPr lang="en-US" dirty="0"/>
+              <a:t> </a:t>
+            </a:r>
+            <a:r>
+              <a:rPr lang="en-US" dirty="0" err="1"/>
+              <a:t>treniranja</a:t>
+            </a:r>
+            <a:r>
+              <a:rPr lang="en-US" dirty="0"/>
+              <a:t> </a:t>
+            </a:r>
+            <a:r>
+              <a:rPr lang="en-US" dirty="0" err="1"/>
+              <a:t>obuhvata</a:t>
+            </a:r>
+            <a:r>
+              <a:rPr lang="en-US" dirty="0"/>
+              <a:t> </a:t>
+            </a:r>
+            <a:r>
+              <a:rPr lang="en-US" dirty="0" err="1"/>
+              <a:t>implementaciju</a:t>
+            </a:r>
+            <a:r>
+              <a:rPr lang="en-US" dirty="0"/>
+              <a:t> </a:t>
+            </a:r>
+            <a:r>
+              <a:rPr lang="en-US" dirty="0" err="1"/>
+              <a:t>identične</a:t>
+            </a:r>
+            <a:r>
+              <a:rPr lang="en-US" dirty="0"/>
+              <a:t> </a:t>
+            </a:r>
+            <a:r>
+              <a:rPr lang="en-US" dirty="0" err="1"/>
+              <a:t>arhitekture</a:t>
+            </a:r>
+            <a:r>
+              <a:rPr lang="en-US" dirty="0"/>
+              <a:t> </a:t>
+            </a:r>
+            <a:r>
+              <a:rPr lang="en-US" dirty="0" err="1"/>
+              <a:t>neuronske</a:t>
+            </a:r>
+            <a:r>
+              <a:rPr lang="en-US" dirty="0"/>
+              <a:t> </a:t>
+            </a:r>
+            <a:r>
+              <a:rPr lang="en-US" dirty="0" err="1"/>
+              <a:t>mreže</a:t>
+            </a:r>
+            <a:r>
+              <a:rPr lang="en-US" dirty="0"/>
+              <a:t> u </a:t>
+            </a:r>
+            <a:r>
+              <a:rPr lang="en-US" dirty="0" err="1"/>
+              <a:t>oba</a:t>
+            </a:r>
+            <a:r>
+              <a:rPr lang="en-US" dirty="0"/>
+              <a:t> </a:t>
+            </a:r>
+            <a:r>
+              <a:rPr lang="en-US" dirty="0" err="1"/>
+              <a:t>okruženja</a:t>
+            </a:r>
+            <a:r>
+              <a:rPr lang="en-US" dirty="0"/>
+              <a:t>, </a:t>
+            </a:r>
+            <a:r>
+              <a:rPr lang="en-US" dirty="0" err="1"/>
+              <a:t>te</a:t>
+            </a:r>
+            <a:r>
+              <a:rPr lang="en-US" dirty="0"/>
+              <a:t> </a:t>
+            </a:r>
+            <a:r>
+              <a:rPr lang="en-US" dirty="0" err="1"/>
+              <a:t>treniranje</a:t>
+            </a:r>
+            <a:r>
+              <a:rPr lang="en-US" dirty="0"/>
+              <a:t> </a:t>
+            </a:r>
+            <a:r>
+              <a:rPr lang="en-US" dirty="0" err="1"/>
+              <a:t>mreže</a:t>
+            </a:r>
+            <a:r>
+              <a:rPr lang="en-US" dirty="0"/>
+              <a:t> </a:t>
+            </a:r>
+            <a:r>
+              <a:rPr lang="en-US" dirty="0" err="1"/>
+              <a:t>nad</a:t>
+            </a:r>
+            <a:r>
+              <a:rPr lang="en-US" dirty="0"/>
+              <a:t> </a:t>
+            </a:r>
+            <a:r>
+              <a:rPr lang="en-US" dirty="0" err="1"/>
+              <a:t>istim</a:t>
+            </a:r>
+            <a:r>
+              <a:rPr lang="en-US" dirty="0"/>
+              <a:t> </a:t>
+            </a:r>
+            <a:r>
+              <a:rPr lang="en-US" dirty="0" err="1"/>
+              <a:t>skupom</a:t>
+            </a:r>
+            <a:r>
+              <a:rPr lang="en-US" dirty="0"/>
+              <a:t> </a:t>
+            </a:r>
+            <a:r>
+              <a:rPr lang="en-US" dirty="0" err="1"/>
+              <a:t>podataka</a:t>
+            </a:r>
+            <a:r>
+              <a:rPr lang="en-US" dirty="0"/>
+              <a:t>. </a:t>
+            </a:r>
+          </a:p>
+          <a:p>
+            <a:r>
+              <a:rPr lang="en-US" dirty="0" err="1"/>
+              <a:t>Evaluacija</a:t>
+            </a:r>
+            <a:r>
+              <a:rPr lang="en-US" dirty="0"/>
+              <a:t> </a:t>
+            </a:r>
+            <a:r>
+              <a:rPr lang="en-US" dirty="0" err="1"/>
+              <a:t>okruženja</a:t>
+            </a:r>
+            <a:r>
+              <a:rPr lang="en-US" dirty="0"/>
+              <a:t> se </a:t>
+            </a:r>
+            <a:r>
+              <a:rPr lang="en-US" dirty="0" err="1"/>
+              <a:t>radi</a:t>
+            </a:r>
+            <a:r>
+              <a:rPr lang="en-US" dirty="0"/>
+              <a:t> </a:t>
+            </a:r>
+            <a:r>
+              <a:rPr lang="en-US" dirty="0" err="1"/>
+              <a:t>pomoću</a:t>
+            </a:r>
+            <a:r>
+              <a:rPr lang="en-US" dirty="0"/>
+              <a:t> </a:t>
+            </a:r>
+            <a:r>
+              <a:rPr lang="en-US" dirty="0" err="1"/>
+              <a:t>standardnih</a:t>
+            </a:r>
+            <a:r>
+              <a:rPr lang="en-US" dirty="0"/>
+              <a:t> </a:t>
+            </a:r>
+            <a:r>
+              <a:rPr lang="en-US" dirty="0" err="1"/>
+              <a:t>klasifikacijskih</a:t>
+            </a:r>
+            <a:r>
+              <a:rPr lang="en-US" dirty="0"/>
+              <a:t> </a:t>
+            </a:r>
+            <a:r>
+              <a:rPr lang="en-US" dirty="0" err="1"/>
+              <a:t>metrika</a:t>
+            </a:r>
+            <a:r>
+              <a:rPr lang="en-US" dirty="0"/>
+              <a:t> </a:t>
+            </a:r>
+            <a:r>
+              <a:rPr lang="en-US" dirty="0" err="1"/>
+              <a:t>poput</a:t>
+            </a:r>
+            <a:r>
+              <a:rPr lang="en-US" dirty="0"/>
+              <a:t> </a:t>
+            </a:r>
+            <a:r>
+              <a:rPr lang="en-US" dirty="0" err="1"/>
+              <a:t>tačnosti</a:t>
+            </a:r>
+            <a:r>
+              <a:rPr lang="en-US" dirty="0"/>
+              <a:t>, </a:t>
+            </a:r>
+            <a:r>
+              <a:rPr lang="en-US" dirty="0" err="1"/>
+              <a:t>odziva</a:t>
+            </a:r>
+            <a:r>
+              <a:rPr lang="en-US" dirty="0"/>
+              <a:t>, </a:t>
+            </a:r>
+            <a:r>
+              <a:rPr lang="en-US" dirty="0" err="1"/>
+              <a:t>preciznosti</a:t>
+            </a:r>
+            <a:r>
+              <a:rPr lang="en-US" dirty="0"/>
+              <a:t>, F1 </a:t>
+            </a:r>
+            <a:r>
+              <a:rPr lang="en-US" dirty="0" err="1"/>
+              <a:t>skora</a:t>
+            </a:r>
+            <a:r>
+              <a:rPr lang="en-US" dirty="0"/>
+              <a:t>, </a:t>
+            </a:r>
+            <a:r>
+              <a:rPr lang="en-US" dirty="0" err="1"/>
+              <a:t>vremena</a:t>
+            </a:r>
+            <a:r>
+              <a:rPr lang="en-US" dirty="0"/>
+              <a:t> </a:t>
+            </a:r>
+            <a:r>
+              <a:rPr lang="en-US" dirty="0" err="1"/>
+              <a:t>treniranja</a:t>
+            </a:r>
+            <a:r>
+              <a:rPr lang="en-US" dirty="0"/>
+              <a:t> </a:t>
+            </a:r>
+            <a:r>
+              <a:rPr lang="en-US" dirty="0" err="1"/>
+              <a:t>kao</a:t>
+            </a:r>
+            <a:r>
+              <a:rPr lang="en-US" dirty="0"/>
+              <a:t> I </a:t>
+            </a:r>
+            <a:r>
+              <a:rPr lang="en-US" dirty="0" err="1"/>
+              <a:t>efkikasnosti</a:t>
+            </a:r>
+            <a:r>
+              <a:rPr lang="en-US" dirty="0"/>
+              <a:t> </a:t>
+            </a:r>
+            <a:r>
+              <a:rPr lang="en-US" dirty="0" err="1"/>
+              <a:t>razvoja</a:t>
+            </a:r>
+            <a:r>
+              <a:rPr lang="en-US" dirty="0"/>
+              <a:t> I </a:t>
+            </a:r>
+            <a:r>
+              <a:rPr lang="en-US" dirty="0" err="1"/>
+              <a:t>podrške</a:t>
+            </a:r>
+            <a:r>
+              <a:rPr lang="en-US" dirty="0"/>
+              <a:t> za </a:t>
+            </a:r>
+            <a:r>
+              <a:rPr lang="en-US" dirty="0" err="1"/>
+              <a:t>mašinsko</a:t>
+            </a:r>
+            <a:r>
+              <a:rPr lang="en-US" dirty="0"/>
+              <a:t> </a:t>
+            </a:r>
+            <a:r>
+              <a:rPr lang="en-US" dirty="0" err="1"/>
+              <a:t>učenje</a:t>
+            </a:r>
+            <a:r>
+              <a:rPr lang="en-US" dirty="0"/>
+              <a:t> u </a:t>
+            </a:r>
+            <a:r>
+              <a:rPr lang="en-US" dirty="0" err="1"/>
+              <a:t>oba</a:t>
+            </a:r>
+            <a:r>
+              <a:rPr lang="en-US" dirty="0"/>
+              <a:t> </a:t>
+            </a:r>
+            <a:r>
+              <a:rPr lang="en-US" dirty="0" err="1"/>
+              <a:t>okruženja</a:t>
+            </a:r>
+            <a:r>
+              <a:rPr lang="en-US" dirty="0"/>
+              <a:t>.</a:t>
+            </a:r>
+          </a:p>
+        </p:txBody>
+      </p:sp>
+      <p:pic>
+        <p:nvPicPr>
+          <p:cNvPr id="14" name="Picture Placeholder 13">
+            <a:extLst>
+              <a:ext uri="{FF2B5EF4-FFF2-40B4-BE49-F238E27FC236}">
+                <a16:creationId xmlns:a16="http://schemas.microsoft.com/office/drawing/2014/main" id="{9D400194-B4B8-4E2B-B32F-6755728B20E7}"/>
+              </a:ext>
+            </a:extLst>
+          </p:cNvPr>
+          <p:cNvPicPr>
+            <a:picLocks noGrp="1" noChangeAspect="1"/>
+          </p:cNvPicPr>
+          <p:nvPr>
+            <p:ph type="pic" idx="1"/>
+          </p:nvPr>
+        </p:nvPicPr>
+        <p:blipFill>
+          <a:blip r:embed="rId2">
+            <a:extLst>
+              <a:ext uri="{28A0092B-C50C-407E-A947-70E740481C1C}">
+                <a14:useLocalDpi xmlns:a14="http://schemas.microsoft.com/office/drawing/2010/main" val="0"/>
+              </a:ext>
+            </a:extLst>
+          </a:blip>
+          <a:srcRect t="2861" b="2861"/>
+          <a:stretch>
+            <a:fillRect/>
+          </a:stretch>
+        </p:blipFill>
+        <p:spPr>
+          <a:prstGeom prst="roundRect">
+            <a:avLst>
+              <a:gd name="adj" fmla="val 7156"/>
+            </a:avLst>
+          </a:prstGeom>
+        </p:spPr>
+      </p:pic>
+    </p:spTree>
+    <p:extLst>
+      <p:ext uri="{BB962C8B-B14F-4D97-AF65-F5344CB8AC3E}">
+        <p14:creationId xmlns:p14="http://schemas.microsoft.com/office/powerpoint/2010/main" val="3312300945"/>
+      </p:ext>
+    </p:extLst>
+  </p:cSld>
+  <p:clrMapOvr>
+    <a:masterClrMapping/>
+  </p:clrMapOvr>
+</p:sld>
+</file>
+
+<file path=ppt/slides/slide4.xml><?xml version="1.0" encoding="utf-8"?>
+<p:sld xmlns:a="http://schemas.openxmlformats.org/drawingml/2006/main" xmlns:r="http://schemas.openxmlformats.org/officeDocument/2006/relationships" xmlns:p="http://schemas.openxmlformats.org/presentationml/2006/main">
+  <p:cSld>
+    <p:spTree>
+      <p:nvGrpSpPr>
+        <p:cNvPr id="1" name=""/>
+        <p:cNvGrpSpPr/>
+        <p:nvPr/>
+      </p:nvGrpSpPr>
+      <p:grpSpPr>
+        <a:xfrm>
+          <a:off x="0" y="0"/>
+          <a:ext cx="0" cy="0"/>
+          <a:chOff x="0" y="0"/>
+          <a:chExt cx="0" cy="0"/>
+        </a:xfrm>
+      </p:grpSpPr>
+      <p:sp>
+        <p:nvSpPr>
+          <p:cNvPr id="2" name="Title 1">
+            <a:extLst>
+              <a:ext uri="{FF2B5EF4-FFF2-40B4-BE49-F238E27FC236}">
+                <a16:creationId xmlns:a16="http://schemas.microsoft.com/office/drawing/2014/main" id="{88385F22-80A3-4B4A-8821-FCD74188F0C0}"/>
+              </a:ext>
+            </a:extLst>
+          </p:cNvPr>
+          <p:cNvSpPr>
+            <a:spLocks noGrp="1"/>
+          </p:cNvSpPr>
+          <p:nvPr>
+            <p:ph type="title"/>
+          </p:nvPr>
+        </p:nvSpPr>
+        <p:spPr/>
+        <p:txBody>
+          <a:bodyPr/>
+          <a:lstStyle/>
+          <a:p>
+            <a:r>
+              <a:rPr lang="en-US" dirty="0" err="1"/>
+              <a:t>Implementacija</a:t>
+            </a:r>
+            <a:r>
+              <a:rPr lang="en-US" dirty="0"/>
+              <a:t>	</a:t>
+            </a:r>
+          </a:p>
+        </p:txBody>
+      </p:sp>
+      <p:sp>
+        <p:nvSpPr>
+          <p:cNvPr id="3" name="Picture Placeholder 2">
+            <a:extLst>
+              <a:ext uri="{FF2B5EF4-FFF2-40B4-BE49-F238E27FC236}">
+                <a16:creationId xmlns:a16="http://schemas.microsoft.com/office/drawing/2014/main" id="{113F1A3E-ADF7-4E5D-AD5B-B6CA8A17BA6D}"/>
+              </a:ext>
+            </a:extLst>
+          </p:cNvPr>
+          <p:cNvSpPr>
+            <a:spLocks noGrp="1"/>
+          </p:cNvSpPr>
+          <p:nvPr>
+            <p:ph type="pic" idx="1"/>
+          </p:nvPr>
+        </p:nvSpPr>
+        <p:spPr/>
+      </p:sp>
+      <p:sp>
+        <p:nvSpPr>
+          <p:cNvPr id="4" name="Text Placeholder 3">
+            <a:extLst>
+              <a:ext uri="{FF2B5EF4-FFF2-40B4-BE49-F238E27FC236}">
+                <a16:creationId xmlns:a16="http://schemas.microsoft.com/office/drawing/2014/main" id="{9E7C2E54-8542-4003-9633-9A2E1A93E3EC}"/>
+              </a:ext>
+            </a:extLst>
+          </p:cNvPr>
+          <p:cNvSpPr>
+            <a:spLocks noGrp="1"/>
+          </p:cNvSpPr>
+          <p:nvPr>
+            <p:ph type="body" sz="half" idx="2"/>
+          </p:nvPr>
+        </p:nvSpPr>
+        <p:spPr/>
+        <p:txBody>
+          <a:bodyPr/>
+          <a:lstStyle/>
+          <a:p>
+            <a:r>
+              <a:rPr lang="en-US" dirty="0"/>
+              <a:t>Za </a:t>
+            </a:r>
+            <a:r>
+              <a:rPr lang="en-US" dirty="0" err="1"/>
+              <a:t>implementacija</a:t>
+            </a:r>
+            <a:r>
+              <a:rPr lang="en-US" dirty="0"/>
+              <a:t> </a:t>
+            </a:r>
+            <a:r>
+              <a:rPr lang="en-US" dirty="0" err="1"/>
+              <a:t>konvolucione</a:t>
+            </a:r>
+            <a:r>
+              <a:rPr lang="en-US" dirty="0"/>
+              <a:t> </a:t>
+            </a:r>
+            <a:r>
+              <a:rPr lang="en-US" dirty="0" err="1"/>
+              <a:t>neuronske</a:t>
+            </a:r>
+            <a:r>
+              <a:rPr lang="en-US" dirty="0"/>
+              <a:t> </a:t>
+            </a:r>
+            <a:r>
+              <a:rPr lang="en-US" dirty="0" err="1"/>
+              <a:t>mreže</a:t>
+            </a:r>
+            <a:r>
+              <a:rPr lang="en-US" dirty="0"/>
+              <a:t> </a:t>
+            </a:r>
+            <a:r>
+              <a:rPr lang="en-US" dirty="0" err="1"/>
+              <a:t>korištene</a:t>
+            </a:r>
+            <a:r>
+              <a:rPr lang="en-US" dirty="0"/>
+              <a:t> </a:t>
+            </a:r>
+            <a:r>
+              <a:rPr lang="en-US" dirty="0" err="1"/>
+              <a:t>su</a:t>
+            </a:r>
+            <a:r>
+              <a:rPr lang="en-US" dirty="0"/>
+              <a:t> </a:t>
+            </a:r>
+            <a:r>
+              <a:rPr lang="en-US" dirty="0" err="1"/>
+              <a:t>popularne</a:t>
+            </a:r>
+            <a:r>
+              <a:rPr lang="en-US" dirty="0"/>
+              <a:t> </a:t>
+            </a:r>
+            <a:r>
+              <a:rPr lang="en-US" dirty="0" err="1"/>
+              <a:t>biblioteke</a:t>
+            </a:r>
+            <a:r>
+              <a:rPr lang="en-US" dirty="0"/>
+              <a:t> </a:t>
+            </a:r>
+            <a:r>
+              <a:rPr lang="en-US" dirty="0" err="1"/>
+              <a:t>otvorenog</a:t>
+            </a:r>
+            <a:r>
+              <a:rPr lang="en-US" dirty="0"/>
+              <a:t> </a:t>
+            </a:r>
+            <a:r>
+              <a:rPr lang="en-US" dirty="0" err="1"/>
+              <a:t>koda</a:t>
+            </a:r>
+            <a:r>
+              <a:rPr lang="en-US" dirty="0"/>
+              <a:t>, </a:t>
+            </a:r>
+            <a:r>
+              <a:rPr lang="en-US" dirty="0" err="1"/>
+              <a:t>PyTorch</a:t>
+            </a:r>
+            <a:r>
+              <a:rPr lang="en-US" dirty="0"/>
+              <a:t> I </a:t>
+            </a:r>
+            <a:r>
+              <a:rPr lang="en-US" dirty="0" err="1"/>
+              <a:t>TorchSharp</a:t>
+            </a:r>
+            <a:r>
+              <a:rPr lang="en-US" dirty="0"/>
+              <a:t> za Python I .NET </a:t>
+            </a:r>
+            <a:r>
+              <a:rPr lang="en-US" dirty="0" err="1"/>
+              <a:t>okruženje</a:t>
+            </a:r>
+            <a:r>
+              <a:rPr lang="en-US" dirty="0"/>
+              <a:t> </a:t>
+            </a:r>
+            <a:r>
+              <a:rPr lang="en-US" dirty="0" err="1"/>
+              <a:t>respektivno</a:t>
+            </a:r>
+            <a:r>
+              <a:rPr lang="en-US" dirty="0"/>
+              <a:t>.</a:t>
+            </a:r>
+          </a:p>
+          <a:p>
+            <a:r>
+              <a:rPr lang="en-US" dirty="0" err="1"/>
+              <a:t>Obje</a:t>
+            </a:r>
+            <a:r>
+              <a:rPr lang="en-US" dirty="0"/>
+              <a:t> </a:t>
+            </a:r>
+            <a:r>
+              <a:rPr lang="en-US" dirty="0" err="1"/>
+              <a:t>navedene</a:t>
+            </a:r>
+            <a:r>
+              <a:rPr lang="en-US" dirty="0"/>
+              <a:t> </a:t>
+            </a:r>
+            <a:r>
+              <a:rPr lang="en-US" dirty="0" err="1"/>
+              <a:t>biblioteke</a:t>
+            </a:r>
+            <a:r>
+              <a:rPr lang="en-US" dirty="0"/>
+              <a:t> </a:t>
+            </a:r>
+            <a:r>
+              <a:rPr lang="en-US" dirty="0" err="1"/>
+              <a:t>su</a:t>
+            </a:r>
+            <a:r>
+              <a:rPr lang="en-US" dirty="0"/>
+              <a:t> </a:t>
+            </a:r>
+            <a:r>
+              <a:rPr lang="en-US" dirty="0" err="1"/>
+              <a:t>takozvani</a:t>
+            </a:r>
+            <a:r>
+              <a:rPr lang="en-US" dirty="0"/>
+              <a:t> </a:t>
+            </a:r>
+            <a:r>
+              <a:rPr lang="en-US" dirty="0" err="1"/>
+              <a:t>wrapperi</a:t>
+            </a:r>
+            <a:r>
+              <a:rPr lang="en-US" dirty="0"/>
+              <a:t> koji </a:t>
+            </a:r>
+            <a:r>
+              <a:rPr lang="en-US" dirty="0" err="1"/>
+              <a:t>pozivaju</a:t>
+            </a:r>
+            <a:r>
+              <a:rPr lang="en-US" dirty="0"/>
+              <a:t> </a:t>
+            </a:r>
+            <a:r>
+              <a:rPr lang="en-US" dirty="0" err="1"/>
+              <a:t>internu</a:t>
+            </a:r>
+            <a:r>
+              <a:rPr lang="en-US" dirty="0"/>
+              <a:t> </a:t>
+            </a:r>
+            <a:r>
+              <a:rPr lang="en-US" dirty="0" err="1"/>
+              <a:t>logiku</a:t>
+            </a:r>
+            <a:r>
+              <a:rPr lang="en-US" dirty="0"/>
+              <a:t> </a:t>
+            </a:r>
+            <a:r>
+              <a:rPr lang="en-US" dirty="0" err="1"/>
+              <a:t>biblioteke</a:t>
+            </a:r>
+            <a:r>
+              <a:rPr lang="en-US" dirty="0"/>
+              <a:t> </a:t>
+            </a:r>
+            <a:r>
+              <a:rPr lang="en-US" dirty="0" err="1"/>
+              <a:t>LibTorch</a:t>
+            </a:r>
+            <a:r>
+              <a:rPr lang="en-US" dirty="0"/>
+              <a:t>. </a:t>
+            </a:r>
+            <a:r>
+              <a:rPr lang="en-US" dirty="0" err="1"/>
+              <a:t>LibTorch</a:t>
+            </a:r>
+            <a:r>
+              <a:rPr lang="en-US" dirty="0"/>
+              <a:t> je </a:t>
+            </a:r>
+            <a:r>
+              <a:rPr lang="en-US" dirty="0" err="1"/>
+              <a:t>napisana</a:t>
+            </a:r>
+            <a:r>
+              <a:rPr lang="en-US" dirty="0"/>
+              <a:t> u C++ u </a:t>
+            </a:r>
+            <a:r>
+              <a:rPr lang="en-US" dirty="0" err="1"/>
+              <a:t>kojoj</a:t>
+            </a:r>
+            <a:r>
+              <a:rPr lang="en-US" dirty="0"/>
+              <a:t> se </a:t>
+            </a:r>
+            <a:r>
+              <a:rPr lang="en-US" dirty="0" err="1"/>
+              <a:t>izvršava</a:t>
+            </a:r>
+            <a:r>
+              <a:rPr lang="en-US" dirty="0"/>
+              <a:t> </a:t>
+            </a:r>
+            <a:r>
+              <a:rPr lang="en-US" dirty="0" err="1"/>
+              <a:t>logika</a:t>
+            </a:r>
+            <a:r>
+              <a:rPr lang="en-US" dirty="0"/>
+              <a:t> </a:t>
+            </a:r>
+            <a:r>
+              <a:rPr lang="en-US" dirty="0" err="1"/>
+              <a:t>prilikom</a:t>
+            </a:r>
+            <a:r>
+              <a:rPr lang="en-US" dirty="0"/>
+              <a:t> </a:t>
+            </a:r>
+            <a:r>
+              <a:rPr lang="en-US" dirty="0" err="1"/>
+              <a:t>treniranja</a:t>
+            </a:r>
+            <a:r>
+              <a:rPr lang="en-US" dirty="0"/>
+              <a:t>.</a:t>
+            </a:r>
+          </a:p>
+          <a:p>
+            <a:r>
+              <a:rPr lang="en-US" dirty="0" err="1"/>
+              <a:t>Kako</a:t>
+            </a:r>
+            <a:r>
+              <a:rPr lang="en-US" dirty="0"/>
+              <a:t> </a:t>
+            </a:r>
+            <a:r>
+              <a:rPr lang="en-US" dirty="0" err="1"/>
+              <a:t>obje</a:t>
+            </a:r>
+            <a:r>
+              <a:rPr lang="en-US" dirty="0"/>
+              <a:t> date </a:t>
+            </a:r>
+            <a:r>
+              <a:rPr lang="en-US" dirty="0" err="1"/>
+              <a:t>biblioteke</a:t>
+            </a:r>
+            <a:r>
+              <a:rPr lang="en-US" dirty="0"/>
+              <a:t> </a:t>
+            </a:r>
+            <a:r>
+              <a:rPr lang="en-US" dirty="0" err="1"/>
+              <a:t>koriste</a:t>
+            </a:r>
+            <a:r>
+              <a:rPr lang="en-US" dirty="0"/>
+              <a:t> </a:t>
+            </a:r>
+            <a:r>
+              <a:rPr lang="en-US" dirty="0" err="1"/>
+              <a:t>istu</a:t>
+            </a:r>
+            <a:r>
+              <a:rPr lang="en-US" dirty="0"/>
+              <a:t> </a:t>
+            </a:r>
+            <a:r>
+              <a:rPr lang="en-US" dirty="0" err="1"/>
+              <a:t>pozadinsku</a:t>
+            </a:r>
+            <a:r>
+              <a:rPr lang="en-US" dirty="0"/>
+              <a:t> </a:t>
+            </a:r>
+            <a:r>
+              <a:rPr lang="en-US" dirty="0" err="1"/>
+              <a:t>logiku</a:t>
+            </a:r>
+            <a:r>
+              <a:rPr lang="en-US" dirty="0"/>
+              <a:t>, </a:t>
+            </a:r>
+            <a:r>
+              <a:rPr lang="en-US" dirty="0" err="1"/>
+              <a:t>odabir</a:t>
+            </a:r>
+            <a:r>
+              <a:rPr lang="en-US" dirty="0"/>
+              <a:t> Python I .NET </a:t>
+            </a:r>
+            <a:r>
+              <a:rPr lang="en-US" dirty="0" err="1"/>
+              <a:t>ekosistema</a:t>
+            </a:r>
+            <a:r>
+              <a:rPr lang="en-US" dirty="0"/>
+              <a:t> za </a:t>
+            </a:r>
+            <a:r>
+              <a:rPr lang="en-US" dirty="0" err="1"/>
+              <a:t>rješavanja</a:t>
+            </a:r>
+            <a:r>
+              <a:rPr lang="en-US" dirty="0"/>
+              <a:t> </a:t>
+            </a:r>
+            <a:r>
+              <a:rPr lang="en-US" dirty="0" err="1"/>
+              <a:t>datog</a:t>
+            </a:r>
+            <a:r>
+              <a:rPr lang="en-US" dirty="0"/>
+              <a:t> </a:t>
+            </a:r>
+            <a:r>
+              <a:rPr lang="en-US" dirty="0" err="1"/>
+              <a:t>problema</a:t>
+            </a:r>
+            <a:r>
+              <a:rPr lang="en-US" dirty="0"/>
+              <a:t> bi </a:t>
+            </a:r>
+            <a:r>
+              <a:rPr lang="en-US" dirty="0" err="1"/>
+              <a:t>teoretski</a:t>
+            </a:r>
+            <a:r>
+              <a:rPr lang="en-US" dirty="0"/>
+              <a:t> </a:t>
+            </a:r>
+            <a:r>
+              <a:rPr lang="en-US" dirty="0" err="1"/>
+              <a:t>trebalo</a:t>
+            </a:r>
+            <a:r>
+              <a:rPr lang="en-US" dirty="0"/>
+              <a:t> </a:t>
+            </a:r>
+            <a:r>
+              <a:rPr lang="en-US" dirty="0" err="1"/>
+              <a:t>biti</a:t>
+            </a:r>
+            <a:r>
+              <a:rPr lang="en-US" dirty="0"/>
+              <a:t> </a:t>
+            </a:r>
+            <a:r>
+              <a:rPr lang="en-US" dirty="0" err="1"/>
+              <a:t>veoma</a:t>
+            </a:r>
+            <a:r>
+              <a:rPr lang="en-US" dirty="0"/>
+              <a:t> </a:t>
+            </a:r>
+            <a:r>
+              <a:rPr lang="en-US" dirty="0" err="1"/>
+              <a:t>slično</a:t>
+            </a:r>
+            <a:r>
+              <a:rPr lang="en-US" dirty="0"/>
+              <a:t>.</a:t>
+            </a:r>
+          </a:p>
+        </p:txBody>
+      </p:sp>
+    </p:spTree>
+    <p:extLst>
+      <p:ext uri="{BB962C8B-B14F-4D97-AF65-F5344CB8AC3E}">
+        <p14:creationId xmlns:p14="http://schemas.microsoft.com/office/powerpoint/2010/main" val="3650117464"/>
+      </p:ext>
+    </p:extLst>
+  </p:cSld>
+  <p:clrMapOvr>
+    <a:masterClrMapping/>
+  </p:clrMapOvr>
+</p:sld>
+</file>
+
+<file path=ppt/slides/slide5.xml><?xml version="1.0" encoding="utf-8"?>
 <p:sld xmlns:a="http://schemas.openxmlformats.org/drawingml/2006/main" xmlns:r="http://schemas.openxmlformats.org/officeDocument/2006/relationships" xmlns:p="http://schemas.openxmlformats.org/presentationml/2006/main">
   <p:cSld>
     <p:bg>
@@ -4228,7 +5540,7 @@
 </p:sld>
 </file>
 
-<file path=ppt/slides/slide4.xml><?xml version="1.0" encoding="utf-8"?>
+<file path=ppt/slides/slide6.xml><?xml version="1.0" encoding="utf-8"?>
 <p:sld xmlns:a="http://schemas.openxmlformats.org/drawingml/2006/main" xmlns:r="http://schemas.openxmlformats.org/officeDocument/2006/relationships" xmlns:p="http://schemas.openxmlformats.org/presentationml/2006/main">
   <p:cSld>
     <p:spTree>
@@ -4325,8 +5637,8 @@
           </a:p>
         </p:txBody>
       </p:sp>
-      <mc:AlternateContent xmlns:mc="http://schemas.openxmlformats.org/markup-compatibility/2006">
-        <mc:Choice xmlns:a14="http://schemas.microsoft.com/office/drawing/2010/main" Requires="a14">
+      <mc:AlternateContent xmlns:mc="http://schemas.openxmlformats.org/markup-compatibility/2006" xmlns:a14="http://schemas.microsoft.com/office/drawing/2010/main">
+        <mc:Choice Requires="a14">
           <p:sp>
             <p:nvSpPr>
               <p:cNvPr id="4" name="Text Placeholder 3">
@@ -4584,7 +5896,7 @@
             </p:txBody>
           </p:sp>
         </mc:Choice>
-        <mc:Fallback>
+        <mc:Fallback xmlns="">
           <p:sp>
             <p:nvSpPr>
               <p:cNvPr id="4" name="Text Placeholder 3">
@@ -4641,7 +5953,7 @@
 </p:sld>
 </file>
 
-<file path=ppt/slides/slide5.xml><?xml version="1.0" encoding="utf-8"?>
+<file path=ppt/slides/slide7.xml><?xml version="1.0" encoding="utf-8"?>
 <p:sld xmlns:a="http://schemas.openxmlformats.org/drawingml/2006/main" xmlns:r="http://schemas.openxmlformats.org/officeDocument/2006/relationships" xmlns:p="http://schemas.openxmlformats.org/presentationml/2006/main">
   <p:cSld>
     <p:spTree>

--- a/Presentation/Komparativna analiza ML metodologija.pptx
+++ b/Presentation/Komparativna analiza ML metodologija.pptx
@@ -4,14 +4,16 @@
   <p:sldMasterIdLst>
     <p:sldMasterId id="2147483648" r:id="rId1"/>
   </p:sldMasterIdLst>
+  <p:notesMasterIdLst>
+    <p:notesMasterId r:id="rId8"/>
+  </p:notesMasterIdLst>
   <p:sldIdLst>
     <p:sldId id="256" r:id="rId2"/>
-    <p:sldId id="264" r:id="rId3"/>
+    <p:sldId id="270" r:id="rId3"/>
     <p:sldId id="262" r:id="rId4"/>
-    <p:sldId id="265" r:id="rId5"/>
-    <p:sldId id="258" r:id="rId6"/>
-    <p:sldId id="259" r:id="rId7"/>
-    <p:sldId id="260" r:id="rId8"/>
+    <p:sldId id="266" r:id="rId5"/>
+    <p:sldId id="267" r:id="rId6"/>
+    <p:sldId id="268" r:id="rId7"/>
   </p:sldIdLst>
   <p:sldSz cx="12192000" cy="6858000"/>
   <p:notesSz cx="6858000" cy="9144000"/>
@@ -118,6 +120,1893 @@
 </p:presentation>
 </file>
 
+<file path=ppt/notesMasters/notesMaster1.xml><?xml version="1.0" encoding="utf-8"?>
+<p:notesMaster xmlns:a="http://schemas.openxmlformats.org/drawingml/2006/main" xmlns:r="http://schemas.openxmlformats.org/officeDocument/2006/relationships" xmlns:p="http://schemas.openxmlformats.org/presentationml/2006/main">
+  <p:cSld>
+    <p:bg>
+      <p:bgRef idx="1001">
+        <a:schemeClr val="bg1"/>
+      </p:bgRef>
+    </p:bg>
+    <p:spTree>
+      <p:nvGrpSpPr>
+        <p:cNvPr id="1" name=""/>
+        <p:cNvGrpSpPr/>
+        <p:nvPr/>
+      </p:nvGrpSpPr>
+      <p:grpSpPr>
+        <a:xfrm>
+          <a:off x="0" y="0"/>
+          <a:ext cx="0" cy="0"/>
+          <a:chOff x="0" y="0"/>
+          <a:chExt cx="0" cy="0"/>
+        </a:xfrm>
+      </p:grpSpPr>
+      <p:sp>
+        <p:nvSpPr>
+          <p:cNvPr id="2" name="Header Placeholder 1"/>
+          <p:cNvSpPr>
+            <a:spLocks noGrp="1"/>
+          </p:cNvSpPr>
+          <p:nvPr>
+            <p:ph type="hdr" sz="quarter"/>
+          </p:nvPr>
+        </p:nvSpPr>
+        <p:spPr>
+          <a:xfrm>
+            <a:off x="0" y="0"/>
+            <a:ext cx="2971800" cy="458788"/>
+          </a:xfrm>
+          <a:prstGeom prst="rect">
+            <a:avLst/>
+          </a:prstGeom>
+        </p:spPr>
+        <p:txBody>
+          <a:bodyPr vert="horz" lIns="91440" tIns="45720" rIns="91440" bIns="45720" rtlCol="0"/>
+          <a:lstStyle>
+            <a:lvl1pPr algn="l">
+              <a:defRPr sz="1200"/>
+            </a:lvl1pPr>
+          </a:lstStyle>
+          <a:p>
+            <a:endParaRPr lang="en-US"/>
+          </a:p>
+        </p:txBody>
+      </p:sp>
+      <p:sp>
+        <p:nvSpPr>
+          <p:cNvPr id="3" name="Date Placeholder 2"/>
+          <p:cNvSpPr>
+            <a:spLocks noGrp="1"/>
+          </p:cNvSpPr>
+          <p:nvPr>
+            <p:ph type="dt" idx="1"/>
+          </p:nvPr>
+        </p:nvSpPr>
+        <p:spPr>
+          <a:xfrm>
+            <a:off x="3884613" y="0"/>
+            <a:ext cx="2971800" cy="458788"/>
+          </a:xfrm>
+          <a:prstGeom prst="rect">
+            <a:avLst/>
+          </a:prstGeom>
+        </p:spPr>
+        <p:txBody>
+          <a:bodyPr vert="horz" lIns="91440" tIns="45720" rIns="91440" bIns="45720" rtlCol="0"/>
+          <a:lstStyle>
+            <a:lvl1pPr algn="r">
+              <a:defRPr sz="1200"/>
+            </a:lvl1pPr>
+          </a:lstStyle>
+          <a:p>
+            <a:fld id="{CA5A90D3-49B2-4DF6-BAF7-8B743C4BA0C6}" type="datetimeFigureOut">
+              <a:rPr lang="en-US" smtClean="0"/>
+              <a:t>8/17/2026</a:t>
+            </a:fld>
+            <a:endParaRPr lang="en-US"/>
+          </a:p>
+        </p:txBody>
+      </p:sp>
+      <p:sp>
+        <p:nvSpPr>
+          <p:cNvPr id="4" name="Slide Image Placeholder 3"/>
+          <p:cNvSpPr>
+            <a:spLocks noGrp="1" noRot="1" noChangeAspect="1"/>
+          </p:cNvSpPr>
+          <p:nvPr>
+            <p:ph type="sldImg" idx="2"/>
+          </p:nvPr>
+        </p:nvSpPr>
+        <p:spPr>
+          <a:xfrm>
+            <a:off x="685800" y="1143000"/>
+            <a:ext cx="5486400" cy="3086100"/>
+          </a:xfrm>
+          <a:prstGeom prst="rect">
+            <a:avLst/>
+          </a:prstGeom>
+          <a:noFill/>
+          <a:ln w="12700">
+            <a:solidFill>
+              <a:prstClr val="black"/>
+            </a:solidFill>
+          </a:ln>
+        </p:spPr>
+        <p:txBody>
+          <a:bodyPr vert="horz" lIns="91440" tIns="45720" rIns="91440" bIns="45720" rtlCol="0" anchor="ctr"/>
+          <a:lstStyle/>
+          <a:p>
+            <a:endParaRPr lang="en-US"/>
+          </a:p>
+        </p:txBody>
+      </p:sp>
+      <p:sp>
+        <p:nvSpPr>
+          <p:cNvPr id="5" name="Notes Placeholder 4"/>
+          <p:cNvSpPr>
+            <a:spLocks noGrp="1"/>
+          </p:cNvSpPr>
+          <p:nvPr>
+            <p:ph type="body" sz="quarter" idx="3"/>
+          </p:nvPr>
+        </p:nvSpPr>
+        <p:spPr>
+          <a:xfrm>
+            <a:off x="685800" y="4400550"/>
+            <a:ext cx="5486400" cy="3600450"/>
+          </a:xfrm>
+          <a:prstGeom prst="rect">
+            <a:avLst/>
+          </a:prstGeom>
+        </p:spPr>
+        <p:txBody>
+          <a:bodyPr vert="horz" lIns="91440" tIns="45720" rIns="91440" bIns="45720" rtlCol="0"/>
+          <a:lstStyle/>
+          <a:p>
+            <a:pPr lvl="0"/>
+            <a:r>
+              <a:rPr lang="en-US"/>
+              <a:t>Click to edit Master text styles</a:t>
+            </a:r>
+          </a:p>
+          <a:p>
+            <a:pPr lvl="1"/>
+            <a:r>
+              <a:rPr lang="en-US"/>
+              <a:t>Second level</a:t>
+            </a:r>
+          </a:p>
+          <a:p>
+            <a:pPr lvl="2"/>
+            <a:r>
+              <a:rPr lang="en-US"/>
+              <a:t>Third level</a:t>
+            </a:r>
+          </a:p>
+          <a:p>
+            <a:pPr lvl="3"/>
+            <a:r>
+              <a:rPr lang="en-US"/>
+              <a:t>Fourth level</a:t>
+            </a:r>
+          </a:p>
+          <a:p>
+            <a:pPr lvl="4"/>
+            <a:r>
+              <a:rPr lang="en-US"/>
+              <a:t>Fifth level</a:t>
+            </a:r>
+          </a:p>
+        </p:txBody>
+      </p:sp>
+      <p:sp>
+        <p:nvSpPr>
+          <p:cNvPr id="6" name="Footer Placeholder 5"/>
+          <p:cNvSpPr>
+            <a:spLocks noGrp="1"/>
+          </p:cNvSpPr>
+          <p:nvPr>
+            <p:ph type="ftr" sz="quarter" idx="4"/>
+          </p:nvPr>
+        </p:nvSpPr>
+        <p:spPr>
+          <a:xfrm>
+            <a:off x="0" y="8685213"/>
+            <a:ext cx="2971800" cy="458787"/>
+          </a:xfrm>
+          <a:prstGeom prst="rect">
+            <a:avLst/>
+          </a:prstGeom>
+        </p:spPr>
+        <p:txBody>
+          <a:bodyPr vert="horz" lIns="91440" tIns="45720" rIns="91440" bIns="45720" rtlCol="0" anchor="b"/>
+          <a:lstStyle>
+            <a:lvl1pPr algn="l">
+              <a:defRPr sz="1200"/>
+            </a:lvl1pPr>
+          </a:lstStyle>
+          <a:p>
+            <a:endParaRPr lang="en-US"/>
+          </a:p>
+        </p:txBody>
+      </p:sp>
+      <p:sp>
+        <p:nvSpPr>
+          <p:cNvPr id="7" name="Slide Number Placeholder 6"/>
+          <p:cNvSpPr>
+            <a:spLocks noGrp="1"/>
+          </p:cNvSpPr>
+          <p:nvPr>
+            <p:ph type="sldNum" sz="quarter" idx="5"/>
+          </p:nvPr>
+        </p:nvSpPr>
+        <p:spPr>
+          <a:xfrm>
+            <a:off x="3884613" y="8685213"/>
+            <a:ext cx="2971800" cy="458787"/>
+          </a:xfrm>
+          <a:prstGeom prst="rect">
+            <a:avLst/>
+          </a:prstGeom>
+        </p:spPr>
+        <p:txBody>
+          <a:bodyPr vert="horz" lIns="91440" tIns="45720" rIns="91440" bIns="45720" rtlCol="0" anchor="b"/>
+          <a:lstStyle>
+            <a:lvl1pPr algn="r">
+              <a:defRPr sz="1200"/>
+            </a:lvl1pPr>
+          </a:lstStyle>
+          <a:p>
+            <a:fld id="{9200A785-91A4-4858-91F9-18C65D64E1E0}" type="slidenum">
+              <a:rPr lang="en-US" smtClean="0"/>
+              <a:t>‹#›</a:t>
+            </a:fld>
+            <a:endParaRPr lang="en-US"/>
+          </a:p>
+        </p:txBody>
+      </p:sp>
+    </p:spTree>
+    <p:extLst>
+      <p:ext uri="{BB962C8B-B14F-4D97-AF65-F5344CB8AC3E}">
+        <p14:creationId xmlns:p14="http://schemas.microsoft.com/office/powerpoint/2010/main" val="3597647562"/>
+      </p:ext>
+    </p:extLst>
+  </p:cSld>
+  <p:clrMap bg1="lt1" tx1="dk1" bg2="lt2" tx2="dk2" accent1="accent1" accent2="accent2" accent3="accent3" accent4="accent4" accent5="accent5" accent6="accent6" hlink="hlink" folHlink="folHlink"/>
+  <p:notesStyle>
+    <a:lvl1pPr marL="0" algn="l" defTabSz="914400" rtl="0" eaLnBrk="1" latinLnBrk="0" hangingPunct="1">
+      <a:defRPr sz="1200" kern="1200">
+        <a:solidFill>
+          <a:schemeClr val="tx1"/>
+        </a:solidFill>
+        <a:latin typeface="+mn-lt"/>
+        <a:ea typeface="+mn-ea"/>
+        <a:cs typeface="+mn-cs"/>
+      </a:defRPr>
+    </a:lvl1pPr>
+    <a:lvl2pPr marL="457200" algn="l" defTabSz="914400" rtl="0" eaLnBrk="1" latinLnBrk="0" hangingPunct="1">
+      <a:defRPr sz="1200" kern="1200">
+        <a:solidFill>
+          <a:schemeClr val="tx1"/>
+        </a:solidFill>
+        <a:latin typeface="+mn-lt"/>
+        <a:ea typeface="+mn-ea"/>
+        <a:cs typeface="+mn-cs"/>
+      </a:defRPr>
+    </a:lvl2pPr>
+    <a:lvl3pPr marL="914400" algn="l" defTabSz="914400" rtl="0" eaLnBrk="1" latinLnBrk="0" hangingPunct="1">
+      <a:defRPr sz="1200" kern="1200">
+        <a:solidFill>
+          <a:schemeClr val="tx1"/>
+        </a:solidFill>
+        <a:latin typeface="+mn-lt"/>
+        <a:ea typeface="+mn-ea"/>
+        <a:cs typeface="+mn-cs"/>
+      </a:defRPr>
+    </a:lvl3pPr>
+    <a:lvl4pPr marL="1371600" algn="l" defTabSz="914400" rtl="0" eaLnBrk="1" latinLnBrk="0" hangingPunct="1">
+      <a:defRPr sz="1200" kern="1200">
+        <a:solidFill>
+          <a:schemeClr val="tx1"/>
+        </a:solidFill>
+        <a:latin typeface="+mn-lt"/>
+        <a:ea typeface="+mn-ea"/>
+        <a:cs typeface="+mn-cs"/>
+      </a:defRPr>
+    </a:lvl4pPr>
+    <a:lvl5pPr marL="1828800" algn="l" defTabSz="914400" rtl="0" eaLnBrk="1" latinLnBrk="0" hangingPunct="1">
+      <a:defRPr sz="1200" kern="1200">
+        <a:solidFill>
+          <a:schemeClr val="tx1"/>
+        </a:solidFill>
+        <a:latin typeface="+mn-lt"/>
+        <a:ea typeface="+mn-ea"/>
+        <a:cs typeface="+mn-cs"/>
+      </a:defRPr>
+    </a:lvl5pPr>
+    <a:lvl6pPr marL="2286000" algn="l" defTabSz="914400" rtl="0" eaLnBrk="1" latinLnBrk="0" hangingPunct="1">
+      <a:defRPr sz="1200" kern="1200">
+        <a:solidFill>
+          <a:schemeClr val="tx1"/>
+        </a:solidFill>
+        <a:latin typeface="+mn-lt"/>
+        <a:ea typeface="+mn-ea"/>
+        <a:cs typeface="+mn-cs"/>
+      </a:defRPr>
+    </a:lvl6pPr>
+    <a:lvl7pPr marL="2743200" algn="l" defTabSz="914400" rtl="0" eaLnBrk="1" latinLnBrk="0" hangingPunct="1">
+      <a:defRPr sz="1200" kern="1200">
+        <a:solidFill>
+          <a:schemeClr val="tx1"/>
+        </a:solidFill>
+        <a:latin typeface="+mn-lt"/>
+        <a:ea typeface="+mn-ea"/>
+        <a:cs typeface="+mn-cs"/>
+      </a:defRPr>
+    </a:lvl7pPr>
+    <a:lvl8pPr marL="3200400" algn="l" defTabSz="914400" rtl="0" eaLnBrk="1" latinLnBrk="0" hangingPunct="1">
+      <a:defRPr sz="1200" kern="1200">
+        <a:solidFill>
+          <a:schemeClr val="tx1"/>
+        </a:solidFill>
+        <a:latin typeface="+mn-lt"/>
+        <a:ea typeface="+mn-ea"/>
+        <a:cs typeface="+mn-cs"/>
+      </a:defRPr>
+    </a:lvl8pPr>
+    <a:lvl9pPr marL="3657600" algn="l" defTabSz="914400" rtl="0" eaLnBrk="1" latinLnBrk="0" hangingPunct="1">
+      <a:defRPr sz="1200" kern="1200">
+        <a:solidFill>
+          <a:schemeClr val="tx1"/>
+        </a:solidFill>
+        <a:latin typeface="+mn-lt"/>
+        <a:ea typeface="+mn-ea"/>
+        <a:cs typeface="+mn-cs"/>
+      </a:defRPr>
+    </a:lvl9pPr>
+  </p:notesStyle>
+</p:notesMaster>
+</file>
+
+<file path=ppt/notesSlides/notesSlide1.xml><?xml version="1.0" encoding="utf-8"?>
+<p:notes xmlns:a="http://schemas.openxmlformats.org/drawingml/2006/main" xmlns:r="http://schemas.openxmlformats.org/officeDocument/2006/relationships" xmlns:p="http://schemas.openxmlformats.org/presentationml/2006/main">
+  <p:cSld>
+    <p:spTree>
+      <p:nvGrpSpPr>
+        <p:cNvPr id="1" name=""/>
+        <p:cNvGrpSpPr/>
+        <p:nvPr/>
+      </p:nvGrpSpPr>
+      <p:grpSpPr>
+        <a:xfrm>
+          <a:off x="0" y="0"/>
+          <a:ext cx="0" cy="0"/>
+          <a:chOff x="0" y="0"/>
+          <a:chExt cx="0" cy="0"/>
+        </a:xfrm>
+      </p:grpSpPr>
+      <p:sp>
+        <p:nvSpPr>
+          <p:cNvPr id="2" name="Slide Image Placeholder 1"/>
+          <p:cNvSpPr>
+            <a:spLocks noGrp="1" noRot="1" noChangeAspect="1"/>
+          </p:cNvSpPr>
+          <p:nvPr>
+            <p:ph type="sldImg"/>
+          </p:nvPr>
+        </p:nvSpPr>
+        <p:spPr/>
+      </p:sp>
+      <p:sp>
+        <p:nvSpPr>
+          <p:cNvPr id="3" name="Notes Placeholder 2"/>
+          <p:cNvSpPr>
+            <a:spLocks noGrp="1"/>
+          </p:cNvSpPr>
+          <p:nvPr>
+            <p:ph type="body" idx="1"/>
+          </p:nvPr>
+        </p:nvSpPr>
+        <p:spPr/>
+        <p:txBody>
+          <a:bodyPr/>
+          <a:lstStyle/>
+          <a:p>
+            <a:pPr rtl="0"/>
+            <a:r>
+              <a:rPr lang="en-US" dirty="0"/>
+              <a:t>Graf </a:t>
+            </a:r>
+            <a:r>
+              <a:rPr lang="en-US" dirty="0" err="1"/>
+              <a:t>prikazuje</a:t>
+            </a:r>
+            <a:r>
+              <a:rPr lang="en-US" dirty="0"/>
+              <a:t> </a:t>
+            </a:r>
+            <a:r>
+              <a:rPr lang="en-US" dirty="0" err="1"/>
+              <a:t>koliko</a:t>
+            </a:r>
+            <a:r>
+              <a:rPr lang="en-US" dirty="0"/>
+              <a:t> Python </a:t>
+            </a:r>
+            <a:r>
+              <a:rPr lang="en-US" dirty="0" err="1"/>
+              <a:t>dominira</a:t>
+            </a:r>
+            <a:r>
+              <a:rPr lang="en-US" dirty="0"/>
+              <a:t> u </a:t>
+            </a:r>
+            <a:r>
+              <a:rPr lang="en-US" dirty="0" err="1"/>
+              <a:t>području</a:t>
+            </a:r>
+            <a:r>
+              <a:rPr lang="en-US" dirty="0"/>
+              <a:t> </a:t>
+            </a:r>
+            <a:r>
+              <a:rPr lang="en-US" dirty="0" err="1"/>
+              <a:t>mašinskog</a:t>
+            </a:r>
+            <a:r>
+              <a:rPr lang="en-US" dirty="0"/>
+              <a:t> </a:t>
+            </a:r>
+            <a:r>
+              <a:rPr lang="en-US" dirty="0" err="1"/>
+              <a:t>učenja</a:t>
+            </a:r>
+            <a:r>
+              <a:rPr lang="en-US" dirty="0"/>
+              <a:t>.</a:t>
+            </a:r>
+          </a:p>
+          <a:p>
+            <a:pPr rtl="0"/>
+            <a:r>
+              <a:rPr lang="en-US" dirty="0" err="1"/>
+              <a:t>Dodatna</a:t>
+            </a:r>
+            <a:r>
+              <a:rPr lang="en-US" dirty="0"/>
+              <a:t> </a:t>
+            </a:r>
+            <a:r>
+              <a:rPr lang="en-US" dirty="0" err="1"/>
+              <a:t>kompleksnost</a:t>
+            </a:r>
+            <a:r>
+              <a:rPr lang="en-US" dirty="0"/>
+              <a:t> </a:t>
+            </a:r>
+            <a:r>
+              <a:rPr lang="en-US" dirty="0" err="1"/>
+              <a:t>odnosi</a:t>
+            </a:r>
+            <a:r>
+              <a:rPr lang="en-US" dirty="0"/>
+              <a:t> se </a:t>
+            </a:r>
+            <a:r>
+              <a:rPr lang="en-US" dirty="0" err="1"/>
+              <a:t>na</a:t>
+            </a:r>
+            <a:r>
+              <a:rPr lang="en-US" dirty="0"/>
+              <a:t> </a:t>
+            </a:r>
+            <a:r>
+              <a:rPr lang="en-US" dirty="0" err="1"/>
+              <a:t>uvođenje</a:t>
+            </a:r>
+            <a:r>
+              <a:rPr lang="en-US" dirty="0"/>
+              <a:t> </a:t>
+            </a:r>
+            <a:r>
+              <a:rPr lang="en-US" dirty="0" err="1"/>
+              <a:t>još</a:t>
+            </a:r>
+            <a:r>
+              <a:rPr lang="en-US" dirty="0"/>
+              <a:t> </a:t>
+            </a:r>
+            <a:r>
+              <a:rPr lang="en-US" dirty="0" err="1"/>
+              <a:t>jednog</a:t>
+            </a:r>
+            <a:r>
+              <a:rPr lang="en-US" dirty="0"/>
+              <a:t> </a:t>
+            </a:r>
+            <a:r>
+              <a:rPr lang="en-US" dirty="0" err="1"/>
+              <a:t>programskog</a:t>
+            </a:r>
+            <a:r>
+              <a:rPr lang="en-US" dirty="0"/>
+              <a:t> </a:t>
+            </a:r>
+            <a:r>
+              <a:rPr lang="en-US" dirty="0" err="1"/>
+              <a:t>jezika</a:t>
+            </a:r>
+            <a:r>
+              <a:rPr lang="en-US" dirty="0"/>
+              <a:t> u </a:t>
+            </a:r>
+            <a:r>
+              <a:rPr lang="en-US" dirty="0" err="1"/>
+              <a:t>postojeći</a:t>
+            </a:r>
+            <a:r>
+              <a:rPr lang="en-US" dirty="0"/>
+              <a:t> </a:t>
+            </a:r>
+            <a:r>
+              <a:rPr lang="en-US" dirty="0" err="1"/>
+              <a:t>ekosistem</a:t>
+            </a:r>
+            <a:r>
+              <a:rPr lang="en-US" dirty="0"/>
+              <a:t>. To </a:t>
+            </a:r>
+            <a:r>
+              <a:rPr lang="en-US" dirty="0" err="1"/>
+              <a:t>znači</a:t>
+            </a:r>
+            <a:r>
+              <a:rPr lang="en-US" dirty="0"/>
+              <a:t> </a:t>
+            </a:r>
+            <a:r>
+              <a:rPr lang="en-US" dirty="0" err="1"/>
+              <a:t>komunikacijski</a:t>
+            </a:r>
+            <a:r>
+              <a:rPr lang="en-US" dirty="0"/>
+              <a:t> </a:t>
+            </a:r>
+            <a:r>
+              <a:rPr lang="en-US" dirty="0" err="1"/>
+              <a:t>sloj</a:t>
+            </a:r>
+            <a:r>
+              <a:rPr lang="en-US" dirty="0"/>
+              <a:t> </a:t>
+            </a:r>
+            <a:r>
+              <a:rPr lang="en-US" dirty="0" err="1"/>
+              <a:t>između</a:t>
+            </a:r>
+            <a:r>
+              <a:rPr lang="en-US" dirty="0"/>
+              <a:t> </a:t>
+            </a:r>
+            <a:r>
+              <a:rPr lang="en-US" dirty="0" err="1"/>
+              <a:t>postojećeg</a:t>
+            </a:r>
+            <a:r>
+              <a:rPr lang="en-US" dirty="0"/>
+              <a:t> </a:t>
+            </a:r>
+            <a:r>
+              <a:rPr lang="en-US" dirty="0" err="1"/>
+              <a:t>i</a:t>
+            </a:r>
+            <a:r>
+              <a:rPr lang="en-US" dirty="0"/>
+              <a:t> </a:t>
+            </a:r>
+            <a:r>
+              <a:rPr lang="en-US" dirty="0" err="1"/>
+              <a:t>novog</a:t>
+            </a:r>
+            <a:r>
+              <a:rPr lang="en-US" dirty="0"/>
+              <a:t> </a:t>
+            </a:r>
+            <a:r>
+              <a:rPr lang="en-US" dirty="0" err="1"/>
+              <a:t>sistema</a:t>
+            </a:r>
+            <a:r>
+              <a:rPr lang="en-US" dirty="0"/>
+              <a:t> (REST, </a:t>
+            </a:r>
+            <a:r>
+              <a:rPr lang="en-US" dirty="0" err="1"/>
+              <a:t>gRPC</a:t>
+            </a:r>
+            <a:r>
+              <a:rPr lang="en-US" dirty="0"/>
+              <a:t> </a:t>
+            </a:r>
+            <a:r>
+              <a:rPr lang="en-US" dirty="0" err="1"/>
+              <a:t>ili</a:t>
+            </a:r>
+            <a:r>
+              <a:rPr lang="en-US" dirty="0"/>
+              <a:t> IPC) </a:t>
+            </a:r>
+            <a:r>
+              <a:rPr lang="en-US" dirty="0" err="1"/>
+              <a:t>umjesto</a:t>
+            </a:r>
+            <a:r>
+              <a:rPr lang="en-US" dirty="0"/>
+              <a:t> </a:t>
+            </a:r>
+            <a:r>
+              <a:rPr lang="en-US" dirty="0" err="1"/>
+              <a:t>direktnog</a:t>
+            </a:r>
+            <a:r>
+              <a:rPr lang="en-US" dirty="0"/>
+              <a:t> </a:t>
+            </a:r>
+            <a:r>
+              <a:rPr lang="en-US" dirty="0" err="1"/>
+              <a:t>poziva</a:t>
+            </a:r>
+            <a:r>
+              <a:rPr lang="en-US" dirty="0"/>
+              <a:t> u </a:t>
+            </a:r>
+            <a:r>
+              <a:rPr lang="en-US" dirty="0" err="1"/>
+              <a:t>istom</a:t>
+            </a:r>
+            <a:r>
+              <a:rPr lang="en-US" dirty="0"/>
+              <a:t> </a:t>
+            </a:r>
+            <a:r>
+              <a:rPr lang="en-US" dirty="0" err="1"/>
+              <a:t>procesu</a:t>
+            </a:r>
+            <a:r>
+              <a:rPr lang="en-US" dirty="0"/>
+              <a:t>. </a:t>
+            </a:r>
+            <a:r>
+              <a:rPr lang="en-US" dirty="0" err="1"/>
+              <a:t>Znači</a:t>
+            </a:r>
+            <a:r>
+              <a:rPr lang="en-US" dirty="0"/>
+              <a:t> </a:t>
+            </a:r>
+            <a:r>
+              <a:rPr lang="en-US" dirty="0" err="1"/>
+              <a:t>i</a:t>
+            </a:r>
+            <a:r>
+              <a:rPr lang="en-US" dirty="0"/>
+              <a:t> </a:t>
+            </a:r>
+            <a:r>
+              <a:rPr lang="en-US" dirty="0" err="1"/>
+              <a:t>drugi</a:t>
+            </a:r>
+            <a:r>
+              <a:rPr lang="en-US" dirty="0"/>
+              <a:t> runtime </a:t>
+            </a:r>
+            <a:r>
+              <a:rPr lang="en-US" dirty="0" err="1"/>
+              <a:t>i</a:t>
+            </a:r>
+            <a:r>
+              <a:rPr lang="en-US" dirty="0"/>
+              <a:t> </a:t>
+            </a:r>
+            <a:r>
+              <a:rPr lang="en-US" dirty="0" err="1"/>
+              <a:t>drugi</a:t>
+            </a:r>
+            <a:r>
+              <a:rPr lang="en-US" dirty="0"/>
+              <a:t> </a:t>
+            </a:r>
+            <a:r>
+              <a:rPr lang="en-US" dirty="0" err="1"/>
+              <a:t>lanac</a:t>
+            </a:r>
+            <a:r>
+              <a:rPr lang="en-US" dirty="0"/>
+              <a:t> </a:t>
+            </a:r>
+            <a:r>
+              <a:rPr lang="en-US" dirty="0" err="1"/>
+              <a:t>zavisnosti</a:t>
+            </a:r>
+            <a:r>
+              <a:rPr lang="en-US" dirty="0"/>
+              <a:t> — pip </a:t>
+            </a:r>
+            <a:r>
+              <a:rPr lang="en-US" dirty="0" err="1"/>
+              <a:t>i</a:t>
+            </a:r>
+            <a:r>
+              <a:rPr lang="en-US" dirty="0"/>
+              <a:t> </a:t>
+            </a:r>
+            <a:r>
+              <a:rPr lang="en-US" dirty="0" err="1"/>
+              <a:t>venv</a:t>
+            </a:r>
+            <a:r>
+              <a:rPr lang="en-US" dirty="0"/>
+              <a:t> pored NuGet-a — </a:t>
+            </a:r>
+            <a:r>
+              <a:rPr lang="en-US" dirty="0" err="1"/>
+              <a:t>te</a:t>
+            </a:r>
+            <a:r>
+              <a:rPr lang="en-US" dirty="0"/>
+              <a:t> </a:t>
+            </a:r>
+            <a:r>
+              <a:rPr lang="en-US" dirty="0" err="1"/>
+              <a:t>odvojen</a:t>
+            </a:r>
+            <a:r>
+              <a:rPr lang="en-US" dirty="0"/>
+              <a:t> deployment </a:t>
+            </a:r>
+            <a:r>
+              <a:rPr lang="en-US" dirty="0" err="1"/>
+              <a:t>i</a:t>
+            </a:r>
+            <a:r>
+              <a:rPr lang="en-US" dirty="0"/>
+              <a:t> CI. Na </a:t>
+            </a:r>
+            <a:r>
+              <a:rPr lang="en-US" dirty="0" err="1"/>
+              <a:t>kraju</a:t>
+            </a:r>
+            <a:r>
+              <a:rPr lang="en-US" dirty="0"/>
+              <a:t>, </a:t>
+            </a:r>
+            <a:r>
+              <a:rPr lang="en-US" dirty="0" err="1"/>
+              <a:t>znači</a:t>
+            </a:r>
+            <a:r>
+              <a:rPr lang="en-US" dirty="0"/>
+              <a:t> </a:t>
+            </a:r>
+            <a:r>
+              <a:rPr lang="en-US" dirty="0" err="1"/>
+              <a:t>i</a:t>
+            </a:r>
+            <a:r>
+              <a:rPr lang="en-US" dirty="0"/>
+              <a:t> </a:t>
+            </a:r>
+            <a:r>
+              <a:rPr lang="en-US" dirty="0" err="1"/>
+              <a:t>vrijeme</a:t>
+            </a:r>
+            <a:r>
+              <a:rPr lang="en-US" dirty="0"/>
+              <a:t> da </a:t>
+            </a:r>
+            <a:r>
+              <a:rPr lang="en-US" dirty="0" err="1"/>
+              <a:t>postojeći</a:t>
+            </a:r>
+            <a:r>
+              <a:rPr lang="en-US" dirty="0"/>
+              <a:t> </a:t>
+            </a:r>
+            <a:r>
+              <a:rPr lang="en-US" dirty="0" err="1"/>
+              <a:t>developeri</a:t>
+            </a:r>
+            <a:r>
+              <a:rPr lang="en-US" dirty="0"/>
+              <a:t> </a:t>
+            </a:r>
+            <a:r>
+              <a:rPr lang="en-US" dirty="0" err="1"/>
+              <a:t>nauče</a:t>
+            </a:r>
+            <a:r>
+              <a:rPr lang="en-US" dirty="0"/>
+              <a:t> Python </a:t>
+            </a:r>
+            <a:r>
+              <a:rPr lang="en-US" dirty="0" err="1"/>
+              <a:t>ili</a:t>
+            </a:r>
+            <a:r>
+              <a:rPr lang="en-US" dirty="0"/>
+              <a:t> </a:t>
+            </a:r>
+            <a:r>
+              <a:rPr lang="en-US" dirty="0" err="1"/>
+              <a:t>zapošljavanje</a:t>
+            </a:r>
+            <a:r>
+              <a:rPr lang="en-US" dirty="0"/>
+              <a:t> </a:t>
+            </a:r>
+            <a:r>
+              <a:rPr lang="en-US" dirty="0" err="1"/>
+              <a:t>novih</a:t>
+            </a:r>
+            <a:r>
+              <a:rPr lang="en-US" dirty="0"/>
+              <a:t>. </a:t>
+            </a:r>
+            <a:r>
+              <a:rPr lang="en-US" dirty="0" err="1"/>
+              <a:t>Čitava</a:t>
+            </a:r>
+            <a:r>
+              <a:rPr lang="en-US" dirty="0"/>
+              <a:t> ta </a:t>
+            </a:r>
+            <a:r>
+              <a:rPr lang="en-US" dirty="0" err="1"/>
+              <a:t>integracija</a:t>
+            </a:r>
+            <a:r>
+              <a:rPr lang="en-US" dirty="0"/>
+              <a:t> </a:t>
+            </a:r>
+            <a:r>
+              <a:rPr lang="en-US" dirty="0" err="1"/>
+              <a:t>košta</a:t>
+            </a:r>
+            <a:r>
+              <a:rPr lang="en-US" dirty="0"/>
+              <a:t>. </a:t>
+            </a:r>
+            <a:r>
+              <a:rPr lang="en-US" dirty="0" err="1"/>
+              <a:t>Ako</a:t>
+            </a:r>
+            <a:r>
+              <a:rPr lang="en-US" dirty="0"/>
+              <a:t> se </a:t>
+            </a:r>
+            <a:r>
+              <a:rPr lang="en-US" dirty="0" err="1"/>
+              <a:t>sve</a:t>
+            </a:r>
+            <a:r>
+              <a:rPr lang="en-US" dirty="0"/>
+              <a:t> </a:t>
+            </a:r>
+            <a:r>
+              <a:rPr lang="en-US" dirty="0" err="1"/>
+              <a:t>može</a:t>
+            </a:r>
+            <a:r>
+              <a:rPr lang="en-US" dirty="0"/>
+              <a:t> </a:t>
+            </a:r>
+            <a:r>
+              <a:rPr lang="en-US" dirty="0" err="1"/>
+              <a:t>zadržati</a:t>
+            </a:r>
+            <a:r>
+              <a:rPr lang="en-US" dirty="0"/>
+              <a:t> u </a:t>
+            </a:r>
+            <a:r>
+              <a:rPr lang="en-US" dirty="0" err="1"/>
+              <a:t>istom</a:t>
+            </a:r>
+            <a:r>
+              <a:rPr lang="en-US" dirty="0"/>
+              <a:t> </a:t>
+            </a:r>
+            <a:r>
+              <a:rPr lang="en-US" dirty="0" err="1"/>
+              <a:t>ekosistemu</a:t>
+            </a:r>
+            <a:r>
+              <a:rPr lang="en-US" dirty="0"/>
+              <a:t>, </a:t>
+            </a:r>
+            <a:r>
+              <a:rPr lang="en-US" dirty="0" err="1"/>
+              <a:t>tih</a:t>
+            </a:r>
+            <a:r>
+              <a:rPr lang="en-US" dirty="0"/>
+              <a:t> </a:t>
+            </a:r>
+            <a:r>
+              <a:rPr lang="en-US" dirty="0" err="1"/>
+              <a:t>troškova</a:t>
+            </a:r>
+            <a:r>
+              <a:rPr lang="en-US" dirty="0"/>
+              <a:t> </a:t>
+            </a:r>
+            <a:r>
+              <a:rPr lang="en-US" dirty="0" err="1"/>
+              <a:t>nema</a:t>
+            </a:r>
+            <a:r>
+              <a:rPr lang="en-US" dirty="0"/>
+              <a:t>.</a:t>
+            </a:r>
+          </a:p>
+        </p:txBody>
+      </p:sp>
+      <p:sp>
+        <p:nvSpPr>
+          <p:cNvPr id="4" name="Slide Number Placeholder 3"/>
+          <p:cNvSpPr>
+            <a:spLocks noGrp="1"/>
+          </p:cNvSpPr>
+          <p:nvPr>
+            <p:ph type="sldNum" sz="quarter" idx="5"/>
+          </p:nvPr>
+        </p:nvSpPr>
+        <p:spPr/>
+        <p:txBody>
+          <a:bodyPr/>
+          <a:lstStyle/>
+          <a:p>
+            <a:fld id="{9200A785-91A4-4858-91F9-18C65D64E1E0}" type="slidenum">
+              <a:rPr lang="en-US" smtClean="0"/>
+              <a:t>2</a:t>
+            </a:fld>
+            <a:endParaRPr lang="en-US"/>
+          </a:p>
+        </p:txBody>
+      </p:sp>
+    </p:spTree>
+    <p:extLst>
+      <p:ext uri="{BB962C8B-B14F-4D97-AF65-F5344CB8AC3E}">
+        <p14:creationId xmlns:p14="http://schemas.microsoft.com/office/powerpoint/2010/main" val="1038155978"/>
+      </p:ext>
+    </p:extLst>
+  </p:cSld>
+  <p:clrMapOvr>
+    <a:masterClrMapping/>
+  </p:clrMapOvr>
+</p:notes>
+</file>
+
+<file path=ppt/notesSlides/notesSlide2.xml><?xml version="1.0" encoding="utf-8"?>
+<p:notes xmlns:a="http://schemas.openxmlformats.org/drawingml/2006/main" xmlns:r="http://schemas.openxmlformats.org/officeDocument/2006/relationships" xmlns:p="http://schemas.openxmlformats.org/presentationml/2006/main">
+  <p:cSld>
+    <p:spTree>
+      <p:nvGrpSpPr>
+        <p:cNvPr id="1" name=""/>
+        <p:cNvGrpSpPr/>
+        <p:nvPr/>
+      </p:nvGrpSpPr>
+      <p:grpSpPr>
+        <a:xfrm>
+          <a:off x="0" y="0"/>
+          <a:ext cx="0" cy="0"/>
+          <a:chOff x="0" y="0"/>
+          <a:chExt cx="0" cy="0"/>
+        </a:xfrm>
+      </p:grpSpPr>
+      <p:sp>
+        <p:nvSpPr>
+          <p:cNvPr id="2" name="Slide Image Placeholder 1"/>
+          <p:cNvSpPr>
+            <a:spLocks noGrp="1" noRot="1" noChangeAspect="1"/>
+          </p:cNvSpPr>
+          <p:nvPr>
+            <p:ph type="sldImg"/>
+          </p:nvPr>
+        </p:nvSpPr>
+        <p:spPr/>
+      </p:sp>
+      <p:sp>
+        <p:nvSpPr>
+          <p:cNvPr id="3" name="Notes Placeholder 2"/>
+          <p:cNvSpPr>
+            <a:spLocks noGrp="1"/>
+          </p:cNvSpPr>
+          <p:nvPr>
+            <p:ph type="body" idx="1"/>
+          </p:nvPr>
+        </p:nvSpPr>
+        <p:spPr/>
+        <p:txBody>
+          <a:bodyPr/>
+          <a:lstStyle/>
+          <a:p>
+            <a:pPr marL="228600" indent="-228600">
+              <a:buAutoNum type="arabicPeriod"/>
+            </a:pPr>
+            <a:r>
+              <a:rPr lang="en-US" dirty="0" err="1"/>
+              <a:t>Jednostavnost</a:t>
+            </a:r>
+            <a:r>
+              <a:rPr lang="en-US" dirty="0"/>
+              <a:t> </a:t>
+            </a:r>
+            <a:r>
+              <a:rPr lang="en-US" dirty="0" err="1"/>
+              <a:t>implementacije</a:t>
+            </a:r>
+            <a:endParaRPr lang="en-US" dirty="0"/>
+          </a:p>
+          <a:p>
+            <a:pPr marL="0" indent="0">
+              <a:buNone/>
+            </a:pPr>
+            <a:r>
+              <a:rPr lang="en-US" dirty="0" err="1"/>
+              <a:t>Nije</a:t>
+            </a:r>
+            <a:r>
+              <a:rPr lang="en-US" dirty="0"/>
+              <a:t> </a:t>
+            </a:r>
+            <a:r>
+              <a:rPr lang="en-US" dirty="0" err="1"/>
+              <a:t>mjereno</a:t>
+            </a:r>
+            <a:r>
+              <a:rPr lang="en-US" dirty="0"/>
+              <a:t> </a:t>
+            </a:r>
+            <a:r>
+              <a:rPr lang="en-US" dirty="0" err="1"/>
+              <a:t>brojčano</a:t>
+            </a:r>
+            <a:r>
+              <a:rPr lang="en-US" dirty="0"/>
+              <a:t>, </a:t>
+            </a:r>
+            <a:r>
+              <a:rPr lang="en-US" dirty="0" err="1"/>
+              <a:t>nego</a:t>
+            </a:r>
+            <a:r>
+              <a:rPr lang="en-US" dirty="0"/>
+              <a:t> </a:t>
+            </a:r>
+            <a:r>
+              <a:rPr lang="en-US" dirty="0" err="1"/>
+              <a:t>kvalitativno</a:t>
+            </a:r>
+            <a:r>
+              <a:rPr lang="en-US" dirty="0"/>
+              <a:t>, </a:t>
+            </a:r>
+            <a:r>
+              <a:rPr lang="en-US" dirty="0" err="1"/>
+              <a:t>kroz</a:t>
+            </a:r>
+            <a:r>
+              <a:rPr lang="en-US" dirty="0"/>
+              <a:t> </a:t>
+            </a:r>
+            <a:r>
+              <a:rPr lang="en-US" dirty="0" err="1"/>
+              <a:t>razvojno</a:t>
+            </a:r>
+            <a:r>
+              <a:rPr lang="en-US" dirty="0"/>
+              <a:t> </a:t>
+            </a:r>
+            <a:r>
+              <a:rPr lang="en-US" dirty="0" err="1"/>
+              <a:t>iskustvo</a:t>
+            </a:r>
+            <a:r>
+              <a:rPr lang="en-US" dirty="0"/>
+              <a:t>: za </a:t>
+            </a:r>
+            <a:r>
+              <a:rPr lang="en-US" dirty="0" err="1"/>
+              <a:t>PyTorch</a:t>
+            </a:r>
+            <a:r>
+              <a:rPr lang="en-US" dirty="0"/>
+              <a:t> je </a:t>
+            </a:r>
+            <a:r>
+              <a:rPr lang="en-US" dirty="0" err="1"/>
+              <a:t>referentna</a:t>
+            </a:r>
+            <a:r>
+              <a:rPr lang="en-US" dirty="0"/>
+              <a:t> </a:t>
+            </a:r>
+            <a:r>
+              <a:rPr lang="en-US" dirty="0" err="1"/>
+              <a:t>implementacija</a:t>
+            </a:r>
+            <a:r>
+              <a:rPr lang="en-US" dirty="0"/>
+              <a:t> </a:t>
+            </a:r>
+            <a:r>
+              <a:rPr lang="en-US" dirty="0" err="1"/>
+              <a:t>postojala</a:t>
+            </a:r>
+            <a:r>
+              <a:rPr lang="en-US" dirty="0"/>
+              <a:t> u </a:t>
+            </a:r>
+            <a:r>
+              <a:rPr lang="en-US" dirty="0" err="1"/>
+              <a:t>zvaničnoj</a:t>
+            </a:r>
+            <a:r>
+              <a:rPr lang="en-US" dirty="0"/>
+              <a:t> </a:t>
+            </a:r>
+            <a:r>
+              <a:rPr lang="en-US" dirty="0" err="1"/>
+              <a:t>dokumentaciji</a:t>
+            </a:r>
+            <a:r>
+              <a:rPr lang="en-US" dirty="0"/>
+              <a:t> </a:t>
+            </a:r>
+            <a:r>
+              <a:rPr lang="en-US" dirty="0" err="1"/>
+              <a:t>i</a:t>
+            </a:r>
+            <a:r>
+              <a:rPr lang="en-US" dirty="0"/>
+              <a:t> </a:t>
+            </a:r>
+            <a:r>
+              <a:rPr lang="en-US" dirty="0" err="1"/>
+              <a:t>tutorijalima</a:t>
+            </a:r>
+            <a:r>
+              <a:rPr lang="en-US" dirty="0"/>
+              <a:t>. Za </a:t>
+            </a:r>
+            <a:r>
+              <a:rPr lang="en-US" dirty="0" err="1"/>
+              <a:t>TorchSharp</a:t>
+            </a:r>
+            <a:r>
+              <a:rPr lang="en-US" dirty="0"/>
+              <a:t> za [</a:t>
+            </a:r>
+            <a:r>
+              <a:rPr lang="en-US" dirty="0" err="1"/>
+              <a:t>konkretno</a:t>
+            </a:r>
+            <a:r>
+              <a:rPr lang="en-US" dirty="0"/>
+              <a:t> X] </a:t>
+            </a:r>
+            <a:r>
+              <a:rPr lang="en-US" dirty="0" err="1"/>
+              <a:t>nije</a:t>
+            </a:r>
+            <a:r>
+              <a:rPr lang="en-US" dirty="0"/>
+              <a:t> </a:t>
+            </a:r>
+            <a:r>
+              <a:rPr lang="en-US" dirty="0" err="1"/>
+              <a:t>bilo</a:t>
+            </a:r>
+            <a:r>
+              <a:rPr lang="en-US" dirty="0"/>
+              <a:t> </a:t>
+            </a:r>
+            <a:r>
+              <a:rPr lang="en-US" dirty="0" err="1"/>
+              <a:t>primjera</a:t>
+            </a:r>
+            <a:r>
+              <a:rPr lang="en-US" dirty="0"/>
+              <a:t> </a:t>
+            </a:r>
+            <a:r>
+              <a:rPr lang="en-US" dirty="0" err="1"/>
+              <a:t>ni</a:t>
+            </a:r>
+            <a:r>
+              <a:rPr lang="en-US" dirty="0"/>
+              <a:t> u </a:t>
+            </a:r>
+            <a:r>
+              <a:rPr lang="en-US" dirty="0" err="1"/>
+              <a:t>zvaničnom</a:t>
+            </a:r>
+            <a:r>
+              <a:rPr lang="en-US" dirty="0"/>
+              <a:t> </a:t>
+            </a:r>
+            <a:r>
+              <a:rPr lang="en-US" dirty="0" err="1"/>
+              <a:t>repozitoriju</a:t>
+            </a:r>
+            <a:r>
+              <a:rPr lang="en-US" dirty="0"/>
+              <a:t> </a:t>
+            </a:r>
+            <a:r>
+              <a:rPr lang="en-US" dirty="0" err="1"/>
+              <a:t>ni</a:t>
+            </a:r>
+            <a:r>
+              <a:rPr lang="en-US" dirty="0"/>
+              <a:t> u </a:t>
+            </a:r>
+            <a:r>
+              <a:rPr lang="en-US" dirty="0" err="1"/>
+              <a:t>dokumentaciji</a:t>
+            </a:r>
+            <a:r>
+              <a:rPr lang="en-US" dirty="0"/>
+              <a:t>, pa </a:t>
+            </a:r>
+            <a:r>
+              <a:rPr lang="en-US" dirty="0" err="1"/>
+              <a:t>sam</a:t>
+            </a:r>
+            <a:r>
+              <a:rPr lang="en-US" dirty="0"/>
+              <a:t> </a:t>
+            </a:r>
+            <a:r>
+              <a:rPr lang="en-US" dirty="0" err="1"/>
+              <a:t>rješenje</a:t>
+            </a:r>
+            <a:r>
+              <a:rPr lang="en-US" dirty="0"/>
+              <a:t> </a:t>
+            </a:r>
+            <a:r>
+              <a:rPr lang="en-US" dirty="0" err="1"/>
+              <a:t>rekonstruisao</a:t>
+            </a:r>
+            <a:r>
+              <a:rPr lang="en-US" dirty="0"/>
+              <a:t> </a:t>
+            </a:r>
+            <a:r>
+              <a:rPr lang="en-US" dirty="0" err="1"/>
+              <a:t>iz</a:t>
+            </a:r>
+            <a:r>
+              <a:rPr lang="en-US" dirty="0"/>
+              <a:t> </a:t>
+            </a:r>
+            <a:r>
+              <a:rPr lang="en-US" dirty="0" err="1"/>
+              <a:t>izvora</a:t>
+            </a:r>
+            <a:r>
+              <a:rPr lang="en-US" dirty="0"/>
+              <a:t> </a:t>
+            </a:r>
+            <a:r>
+              <a:rPr lang="en-US" dirty="0" err="1"/>
+              <a:t>na</a:t>
+            </a:r>
+            <a:r>
+              <a:rPr lang="en-US" dirty="0"/>
+              <a:t> </a:t>
+            </a:r>
+            <a:r>
+              <a:rPr lang="en-US" dirty="0" err="1"/>
+              <a:t>stranom</a:t>
+            </a:r>
+            <a:r>
+              <a:rPr lang="en-US" dirty="0"/>
+              <a:t> </a:t>
+            </a:r>
+            <a:r>
+              <a:rPr lang="en-US" dirty="0" err="1"/>
+              <a:t>jeziku</a:t>
+            </a:r>
+            <a:r>
+              <a:rPr lang="en-US" dirty="0"/>
+              <a:t>. </a:t>
+            </a:r>
+            <a:r>
+              <a:rPr lang="en-US" dirty="0" err="1"/>
+              <a:t>Razlika</a:t>
+            </a:r>
+            <a:r>
+              <a:rPr lang="en-US" dirty="0"/>
+              <a:t> </a:t>
+            </a:r>
+            <a:r>
+              <a:rPr lang="en-US" dirty="0" err="1"/>
+              <a:t>nije</a:t>
+            </a:r>
+            <a:r>
+              <a:rPr lang="en-US" dirty="0"/>
+              <a:t> u </a:t>
+            </a:r>
+            <a:r>
+              <a:rPr lang="en-US" dirty="0" err="1"/>
+              <a:t>jeziku</a:t>
+            </a:r>
+            <a:r>
+              <a:rPr lang="en-US" dirty="0"/>
+              <a:t>, </a:t>
+            </a:r>
+            <a:r>
+              <a:rPr lang="en-US" dirty="0" err="1"/>
+              <a:t>nego</a:t>
+            </a:r>
+            <a:r>
+              <a:rPr lang="en-US" dirty="0"/>
+              <a:t> u </a:t>
+            </a:r>
+            <a:r>
+              <a:rPr lang="en-US" dirty="0" err="1"/>
+              <a:t>dostupnosti</a:t>
+            </a:r>
+            <a:r>
+              <a:rPr lang="en-US" dirty="0"/>
+              <a:t> </a:t>
+            </a:r>
+            <a:r>
+              <a:rPr lang="en-US" dirty="0" err="1"/>
+              <a:t>materijala</a:t>
+            </a:r>
+            <a:r>
+              <a:rPr lang="en-US" dirty="0"/>
+              <a:t>.</a:t>
+            </a:r>
+          </a:p>
+          <a:p>
+            <a:pPr marL="0" indent="0">
+              <a:buNone/>
+            </a:pPr>
+            <a:endParaRPr lang="en-US" dirty="0"/>
+          </a:p>
+          <a:p>
+            <a:pPr marL="0" indent="0">
+              <a:buNone/>
+            </a:pPr>
+            <a:endParaRPr lang="en-US" dirty="0"/>
+          </a:p>
+          <a:p>
+            <a:pPr marL="0" indent="0">
+              <a:buNone/>
+            </a:pPr>
+            <a:r>
+              <a:rPr lang="en-US" dirty="0"/>
+              <a:t>2. </a:t>
+            </a:r>
+            <a:r>
+              <a:rPr lang="en-US" dirty="0" err="1"/>
+              <a:t>Zašto</a:t>
+            </a:r>
+            <a:r>
+              <a:rPr lang="en-US" dirty="0"/>
+              <a:t> </a:t>
+            </a:r>
+            <a:r>
+              <a:rPr lang="en-US" dirty="0" err="1"/>
+              <a:t>rak</a:t>
+            </a:r>
+            <a:r>
+              <a:rPr lang="en-US" dirty="0"/>
+              <a:t> </a:t>
+            </a:r>
+            <a:r>
+              <a:rPr lang="en-US" dirty="0" err="1"/>
+              <a:t>pluća</a:t>
+            </a:r>
+            <a:endParaRPr lang="en-US" dirty="0"/>
+          </a:p>
+          <a:p>
+            <a:pPr marL="0" indent="0">
+              <a:buNone/>
+            </a:pPr>
+            <a:r>
+              <a:rPr lang="en-US" dirty="0"/>
+              <a:t>Dataset je </a:t>
+            </a:r>
+            <a:r>
+              <a:rPr lang="en-US" dirty="0" err="1"/>
+              <a:t>javno</a:t>
+            </a:r>
+            <a:r>
+              <a:rPr lang="en-US" dirty="0"/>
+              <a:t> </a:t>
+            </a:r>
+            <a:r>
+              <a:rPr lang="en-US" dirty="0" err="1"/>
+              <a:t>dostupan</a:t>
+            </a:r>
+            <a:r>
+              <a:rPr lang="en-US" dirty="0"/>
+              <a:t> </a:t>
+            </a:r>
+            <a:r>
+              <a:rPr lang="en-US" dirty="0" err="1"/>
+              <a:t>i</a:t>
+            </a:r>
+            <a:r>
+              <a:rPr lang="en-US" dirty="0"/>
+              <a:t> </a:t>
+            </a:r>
+            <a:r>
+              <a:rPr lang="en-US" dirty="0" err="1"/>
+              <a:t>označen</a:t>
+            </a:r>
+            <a:r>
+              <a:rPr lang="en-US" dirty="0"/>
+              <a:t> — </a:t>
+            </a:r>
+            <a:r>
+              <a:rPr lang="en-US" dirty="0" err="1"/>
+              <a:t>što</a:t>
+            </a:r>
+            <a:r>
+              <a:rPr lang="en-US" dirty="0"/>
+              <a:t> je </a:t>
+            </a:r>
+            <a:r>
+              <a:rPr lang="en-US" dirty="0" err="1"/>
+              <a:t>uslov</a:t>
+            </a:r>
+            <a:r>
+              <a:rPr lang="en-US" dirty="0"/>
+              <a:t> za </a:t>
+            </a:r>
+            <a:r>
+              <a:rPr lang="en-US" dirty="0" err="1"/>
+              <a:t>reproducibilnost</a:t>
+            </a:r>
+            <a:r>
+              <a:rPr lang="en-US" dirty="0"/>
+              <a:t>. </a:t>
+            </a:r>
+            <a:r>
+              <a:rPr lang="en-US" dirty="0" err="1"/>
+              <a:t>Zadatak</a:t>
+            </a:r>
+            <a:r>
+              <a:rPr lang="en-US" dirty="0"/>
+              <a:t> je </a:t>
+            </a:r>
+            <a:r>
+              <a:rPr lang="en-US" dirty="0" err="1"/>
+              <a:t>klasifikacija</a:t>
+            </a:r>
+            <a:r>
+              <a:rPr lang="en-US" dirty="0"/>
+              <a:t> </a:t>
+            </a:r>
+            <a:r>
+              <a:rPr lang="en-US" dirty="0" err="1"/>
+              <a:t>slika</a:t>
+            </a:r>
+            <a:r>
+              <a:rPr lang="en-US" dirty="0"/>
+              <a:t> u tri </a:t>
+            </a:r>
+            <a:r>
+              <a:rPr lang="en-US" dirty="0" err="1"/>
+              <a:t>klase</a:t>
+            </a:r>
+            <a:r>
+              <a:rPr lang="en-US" dirty="0"/>
+              <a:t>, </a:t>
+            </a:r>
+            <a:r>
+              <a:rPr lang="en-US" dirty="0" err="1"/>
+              <a:t>dakle</a:t>
+            </a:r>
+            <a:r>
+              <a:rPr lang="en-US" dirty="0"/>
+              <a:t> CNN je </a:t>
+            </a:r>
+            <a:r>
+              <a:rPr lang="en-US" dirty="0" err="1"/>
+              <a:t>prirodan</a:t>
+            </a:r>
+            <a:r>
+              <a:rPr lang="en-US" dirty="0"/>
+              <a:t> </a:t>
+            </a:r>
+            <a:r>
+              <a:rPr lang="en-US" dirty="0" err="1"/>
+              <a:t>izbor</a:t>
+            </a:r>
+            <a:r>
+              <a:rPr lang="en-US" dirty="0"/>
+              <a:t> </a:t>
+            </a:r>
+            <a:r>
+              <a:rPr lang="en-US" dirty="0" err="1"/>
+              <a:t>i</a:t>
+            </a:r>
+            <a:r>
+              <a:rPr lang="en-US" dirty="0"/>
+              <a:t> </a:t>
+            </a:r>
+            <a:r>
+              <a:rPr lang="en-US" dirty="0" err="1"/>
+              <a:t>dobijaju</a:t>
+            </a:r>
+            <a:r>
+              <a:rPr lang="en-US" dirty="0"/>
+              <a:t> se </a:t>
+            </a:r>
+            <a:r>
+              <a:rPr lang="en-US" dirty="0" err="1"/>
+              <a:t>bogatije</a:t>
+            </a:r>
+            <a:r>
+              <a:rPr lang="en-US" dirty="0"/>
+              <a:t> </a:t>
+            </a:r>
+            <a:r>
+              <a:rPr lang="en-US" dirty="0" err="1"/>
+              <a:t>metrike</a:t>
+            </a:r>
+            <a:r>
+              <a:rPr lang="en-US" dirty="0"/>
+              <a:t> </a:t>
+            </a:r>
+            <a:r>
+              <a:rPr lang="en-US" dirty="0" err="1"/>
+              <a:t>nego</a:t>
+            </a:r>
+            <a:r>
+              <a:rPr lang="en-US" dirty="0"/>
+              <a:t> </a:t>
+            </a:r>
+            <a:r>
+              <a:rPr lang="en-US" dirty="0" err="1"/>
+              <a:t>kod</a:t>
+            </a:r>
+            <a:r>
+              <a:rPr lang="en-US" dirty="0"/>
+              <a:t> </a:t>
+            </a:r>
+            <a:r>
+              <a:rPr lang="en-US" dirty="0" err="1"/>
+              <a:t>binarnog</a:t>
+            </a:r>
+            <a:r>
+              <a:rPr lang="en-US" dirty="0"/>
+              <a:t> </a:t>
+            </a:r>
+            <a:r>
+              <a:rPr lang="en-US" dirty="0" err="1"/>
+              <a:t>problema</a:t>
+            </a:r>
+            <a:r>
+              <a:rPr lang="en-US" dirty="0"/>
+              <a:t>. </a:t>
+            </a:r>
+            <a:r>
+              <a:rPr lang="en-US" dirty="0" err="1"/>
+              <a:t>Veličina</a:t>
+            </a:r>
+            <a:r>
+              <a:rPr lang="en-US" dirty="0"/>
+              <a:t> je </a:t>
+            </a:r>
+            <a:r>
+              <a:rPr lang="en-US" dirty="0" err="1"/>
+              <a:t>takva</a:t>
+            </a:r>
+            <a:r>
+              <a:rPr lang="en-US" dirty="0"/>
+              <a:t> da se </a:t>
+            </a:r>
+            <a:r>
+              <a:rPr lang="en-US" dirty="0" err="1"/>
+              <a:t>trening</a:t>
+            </a:r>
+            <a:r>
+              <a:rPr lang="en-US" dirty="0"/>
+              <a:t> </a:t>
+            </a:r>
+            <a:r>
+              <a:rPr lang="en-US" dirty="0" err="1"/>
+              <a:t>može</a:t>
+            </a:r>
+            <a:r>
+              <a:rPr lang="en-US" dirty="0"/>
+              <a:t> </a:t>
+            </a:r>
+            <a:r>
+              <a:rPr lang="en-US" dirty="0" err="1"/>
+              <a:t>ponoviti</a:t>
+            </a:r>
+            <a:r>
+              <a:rPr lang="en-US" dirty="0"/>
+              <a:t> </a:t>
+            </a:r>
+            <a:r>
+              <a:rPr lang="en-US" dirty="0" err="1"/>
+              <a:t>šest</a:t>
+            </a:r>
+            <a:r>
+              <a:rPr lang="en-US" dirty="0"/>
+              <a:t> puta </a:t>
+            </a:r>
+            <a:r>
+              <a:rPr lang="en-US" dirty="0" err="1"/>
+              <a:t>na</a:t>
+            </a:r>
+            <a:r>
+              <a:rPr lang="en-US" dirty="0"/>
+              <a:t> </a:t>
+            </a:r>
+            <a:r>
+              <a:rPr lang="en-US" dirty="0" err="1"/>
+              <a:t>dostupnom</a:t>
+            </a:r>
+            <a:r>
+              <a:rPr lang="en-US" dirty="0"/>
+              <a:t> </a:t>
+            </a:r>
+            <a:r>
+              <a:rPr lang="en-US" dirty="0" err="1"/>
+              <a:t>hardveru</a:t>
+            </a:r>
+            <a:r>
+              <a:rPr lang="en-US" dirty="0"/>
+              <a:t>. I </a:t>
+            </a:r>
+            <a:r>
+              <a:rPr lang="en-US" dirty="0" err="1"/>
+              <a:t>postoji</a:t>
+            </a:r>
+            <a:r>
+              <a:rPr lang="en-US" dirty="0"/>
+              <a:t> </a:t>
+            </a:r>
+            <a:r>
+              <a:rPr lang="en-US" dirty="0" err="1"/>
+              <a:t>veliki</a:t>
+            </a:r>
+            <a:r>
+              <a:rPr lang="en-US" dirty="0"/>
+              <a:t> </a:t>
+            </a:r>
+            <a:r>
+              <a:rPr lang="en-US" dirty="0" err="1"/>
+              <a:t>broj</a:t>
+            </a:r>
+            <a:r>
+              <a:rPr lang="en-US" dirty="0"/>
+              <a:t> </a:t>
+            </a:r>
+            <a:r>
+              <a:rPr lang="en-US" dirty="0" err="1"/>
+              <a:t>objavljenih</a:t>
+            </a:r>
+            <a:r>
+              <a:rPr lang="en-US" dirty="0"/>
+              <a:t> </a:t>
+            </a:r>
+            <a:r>
+              <a:rPr lang="en-US" dirty="0" err="1"/>
+              <a:t>implementacija</a:t>
+            </a:r>
+            <a:r>
+              <a:rPr lang="en-US" dirty="0"/>
+              <a:t>, pa </a:t>
+            </a:r>
+            <a:r>
+              <a:rPr lang="en-US" dirty="0" err="1"/>
+              <a:t>sam</a:t>
+            </a:r>
+            <a:r>
+              <a:rPr lang="en-US" dirty="0"/>
+              <a:t> </a:t>
+            </a:r>
+            <a:r>
+              <a:rPr lang="en-US" dirty="0" err="1"/>
+              <a:t>mogao</a:t>
+            </a:r>
+            <a:r>
+              <a:rPr lang="en-US" dirty="0"/>
+              <a:t> </a:t>
+            </a:r>
+            <a:r>
+              <a:rPr lang="en-US" dirty="0" err="1"/>
+              <a:t>provjeriti</a:t>
+            </a:r>
+            <a:r>
+              <a:rPr lang="en-US" dirty="0"/>
+              <a:t> da </a:t>
+            </a:r>
+            <a:r>
+              <a:rPr lang="en-US" dirty="0" err="1"/>
+              <a:t>su</a:t>
+            </a:r>
+            <a:r>
+              <a:rPr lang="en-US" dirty="0"/>
+              <a:t> </a:t>
+            </a:r>
+            <a:r>
+              <a:rPr lang="en-US" dirty="0" err="1"/>
+              <a:t>moji</a:t>
+            </a:r>
+            <a:r>
+              <a:rPr lang="en-US" dirty="0"/>
+              <a:t> </a:t>
+            </a:r>
+            <a:r>
+              <a:rPr lang="en-US" dirty="0" err="1"/>
+              <a:t>rezultati</a:t>
+            </a:r>
+            <a:r>
+              <a:rPr lang="en-US" dirty="0"/>
+              <a:t> u </a:t>
+            </a:r>
+            <a:r>
+              <a:rPr lang="en-US" dirty="0" err="1"/>
+              <a:t>očekivanom</a:t>
+            </a:r>
+            <a:r>
+              <a:rPr lang="en-US" dirty="0"/>
+              <a:t> </a:t>
+            </a:r>
+            <a:r>
+              <a:rPr lang="en-US" dirty="0" err="1"/>
+              <a:t>rasponu</a:t>
+            </a:r>
+            <a:r>
+              <a:rPr lang="en-US" dirty="0"/>
+              <a:t> — </a:t>
+            </a:r>
+            <a:r>
+              <a:rPr lang="en-US" dirty="0" err="1"/>
+              <a:t>što</a:t>
+            </a:r>
+            <a:r>
+              <a:rPr lang="en-US" dirty="0"/>
+              <a:t> </a:t>
+            </a:r>
+            <a:r>
+              <a:rPr lang="en-US" dirty="0" err="1"/>
+              <a:t>znači</a:t>
+            </a:r>
+            <a:r>
+              <a:rPr lang="en-US" dirty="0"/>
+              <a:t> da </a:t>
+            </a:r>
+            <a:r>
+              <a:rPr lang="en-US" dirty="0" err="1"/>
+              <a:t>eventualne</a:t>
+            </a:r>
+            <a:r>
+              <a:rPr lang="en-US" dirty="0"/>
+              <a:t> </a:t>
+            </a:r>
+            <a:r>
+              <a:rPr lang="en-US" dirty="0" err="1"/>
+              <a:t>razlike</a:t>
+            </a:r>
+            <a:r>
+              <a:rPr lang="en-US" dirty="0"/>
+              <a:t> </a:t>
+            </a:r>
+            <a:r>
+              <a:rPr lang="en-US" dirty="0" err="1"/>
+              <a:t>dolaze</a:t>
+            </a:r>
+            <a:r>
+              <a:rPr lang="en-US" dirty="0"/>
+              <a:t> od </a:t>
+            </a:r>
+            <a:r>
+              <a:rPr lang="en-US" dirty="0" err="1"/>
+              <a:t>okruženja</a:t>
+            </a:r>
+            <a:r>
+              <a:rPr lang="en-US" dirty="0"/>
+              <a:t>, a ne od </a:t>
+            </a:r>
+            <a:r>
+              <a:rPr lang="en-US" dirty="0" err="1"/>
+              <a:t>pogrešno</a:t>
+            </a:r>
+            <a:r>
+              <a:rPr lang="en-US" dirty="0"/>
+              <a:t> </a:t>
+            </a:r>
+            <a:r>
+              <a:rPr lang="en-US" dirty="0" err="1"/>
+              <a:t>postavljenog</a:t>
+            </a:r>
+            <a:r>
+              <a:rPr lang="en-US" dirty="0"/>
+              <a:t> </a:t>
+            </a:r>
+            <a:r>
+              <a:rPr lang="en-US" dirty="0" err="1"/>
+              <a:t>modela</a:t>
+            </a:r>
+            <a:r>
+              <a:rPr lang="en-US" dirty="0"/>
+              <a:t>.</a:t>
+            </a:r>
+          </a:p>
+          <a:p>
+            <a:pPr marL="0" indent="0">
+              <a:buNone/>
+            </a:pPr>
+            <a:endParaRPr lang="en-US" dirty="0"/>
+          </a:p>
+          <a:p>
+            <a:pPr marL="0" indent="0">
+              <a:buNone/>
+            </a:pPr>
+            <a:r>
+              <a:rPr lang="en-US" dirty="0"/>
+              <a:t>3. </a:t>
+            </a:r>
+            <a:r>
+              <a:rPr lang="en-US"/>
+              <a:t>Transfer learning </a:t>
+            </a:r>
+            <a:endParaRPr lang="en-US" dirty="0"/>
+          </a:p>
+        </p:txBody>
+      </p:sp>
+      <p:sp>
+        <p:nvSpPr>
+          <p:cNvPr id="4" name="Slide Number Placeholder 3"/>
+          <p:cNvSpPr>
+            <a:spLocks noGrp="1"/>
+          </p:cNvSpPr>
+          <p:nvPr>
+            <p:ph type="sldNum" sz="quarter" idx="5"/>
+          </p:nvPr>
+        </p:nvSpPr>
+        <p:spPr/>
+        <p:txBody>
+          <a:bodyPr/>
+          <a:lstStyle/>
+          <a:p>
+            <a:fld id="{9200A785-91A4-4858-91F9-18C65D64E1E0}" type="slidenum">
+              <a:rPr lang="en-US" smtClean="0"/>
+              <a:t>3</a:t>
+            </a:fld>
+            <a:endParaRPr lang="en-US"/>
+          </a:p>
+        </p:txBody>
+      </p:sp>
+    </p:spTree>
+    <p:extLst>
+      <p:ext uri="{BB962C8B-B14F-4D97-AF65-F5344CB8AC3E}">
+        <p14:creationId xmlns:p14="http://schemas.microsoft.com/office/powerpoint/2010/main" val="136647693"/>
+      </p:ext>
+    </p:extLst>
+  </p:cSld>
+  <p:clrMapOvr>
+    <a:masterClrMapping/>
+  </p:clrMapOvr>
+</p:notes>
+</file>
+
 <file path=ppt/slideLayouts/slideLayout1.xml><?xml version="1.0" encoding="utf-8"?>
 <p:sldLayout xmlns:a="http://schemas.openxmlformats.org/drawingml/2006/main" xmlns:r="http://schemas.openxmlformats.org/officeDocument/2006/relationships" xmlns:p="http://schemas.openxmlformats.org/presentationml/2006/main" type="title" preserve="1">
   <p:cSld name="Title Slide">
@@ -2191,12 +4080,15 @@
           <a:bodyPr anchor="b"/>
           <a:lstStyle>
             <a:lvl1pPr>
-              <a:defRPr sz="3200"/>
+              <a:defRPr sz="3200">
+                <a:latin typeface="Times New Roman" panose="02020603050405020304" pitchFamily="18" charset="0"/>
+                <a:cs typeface="Times New Roman" panose="02020603050405020304" pitchFamily="18" charset="0"/>
+              </a:defRPr>
             </a:lvl1pPr>
           </a:lstStyle>
           <a:p>
             <a:r>
-              <a:rPr lang="en-US"/>
+              <a:rPr lang="en-US" dirty="0"/>
               <a:t>Click to edit Master title style</a:t>
             </a:r>
           </a:p>
@@ -2315,11 +4207,16 @@
           </a:xfrm>
         </p:spPr>
         <p:txBody>
-          <a:bodyPr/>
+          <a:bodyPr>
+            <a:normAutofit/>
+          </a:bodyPr>
           <a:lstStyle>
             <a:lvl1pPr marL="0" indent="0">
               <a:buNone/>
-              <a:defRPr sz="1600"/>
+              <a:defRPr sz="2000">
+                <a:latin typeface="Times New Roman" panose="02020603050405020304" pitchFamily="18" charset="0"/>
+                <a:cs typeface="Times New Roman" panose="02020603050405020304" pitchFamily="18" charset="0"/>
+              </a:defRPr>
             </a:lvl1pPr>
             <a:lvl2pPr marL="457200" indent="0">
               <a:buNone/>
@@ -2357,7 +4254,7 @@
           <a:p>
             <a:pPr lvl="0"/>
             <a:r>
-              <a:rPr lang="en-US"/>
+              <a:rPr lang="en-US" dirty="0"/>
               <a:t>Click to edit Master text styles</a:t>
             </a:r>
           </a:p>
@@ -2499,15 +4396,18 @@
           </a:xfrm>
         </p:spPr>
         <p:txBody>
-          <a:bodyPr anchor="b"/>
+          <a:bodyPr anchor="b" anchorCtr="0"/>
           <a:lstStyle>
-            <a:lvl1pPr>
-              <a:defRPr sz="3200"/>
+            <a:lvl1pPr algn="l">
+              <a:defRPr sz="3200">
+                <a:latin typeface="Times New Roman" panose="02020603050405020304" pitchFamily="18" charset="0"/>
+                <a:cs typeface="Times New Roman" panose="02020603050405020304" pitchFamily="18" charset="0"/>
+              </a:defRPr>
             </a:lvl1pPr>
           </a:lstStyle>
           <a:p>
             <a:r>
-              <a:rPr lang="en-US"/>
+              <a:rPr lang="en-US" dirty="0"/>
               <a:t>Click to edit Master title style</a:t>
             </a:r>
           </a:p>
@@ -2576,7 +4476,7 @@
             </a:lvl9pPr>
           </a:lstStyle>
           <a:p>
-            <a:endParaRPr lang="en-US"/>
+            <a:endParaRPr lang="en-US" dirty="0"/>
           </a:p>
         </p:txBody>
       </p:sp>
@@ -2603,11 +4503,16 @@
           </a:xfrm>
         </p:spPr>
         <p:txBody>
-          <a:bodyPr/>
+          <a:bodyPr>
+            <a:normAutofit/>
+          </a:bodyPr>
           <a:lstStyle>
             <a:lvl1pPr marL="0" indent="0">
               <a:buNone/>
-              <a:defRPr sz="1600"/>
+              <a:defRPr sz="2000">
+                <a:latin typeface="Times New Roman" panose="02020603050405020304" pitchFamily="18" charset="0"/>
+                <a:cs typeface="Times New Roman" panose="02020603050405020304" pitchFamily="18" charset="0"/>
+              </a:defRPr>
             </a:lvl1pPr>
             <a:lvl2pPr marL="457200" indent="0">
               <a:buNone/>
@@ -2645,7 +4550,7 @@
           <a:p>
             <a:pPr lvl="0"/>
             <a:r>
-              <a:rPr lang="en-US"/>
+              <a:rPr lang="en-US" dirty="0"/>
               <a:t>Click to edit Master text styles</a:t>
             </a:r>
           </a:p>
@@ -3356,111 +5261,15 @@
             <p:ph type="ctrTitle"/>
           </p:nvPr>
         </p:nvSpPr>
-        <p:spPr/>
+        <p:spPr>
+          <a:xfrm>
+            <a:off x="1524000" y="715640"/>
+            <a:ext cx="9144000" cy="5426719"/>
+          </a:xfrm>
+        </p:spPr>
         <p:txBody>
           <a:bodyPr>
             <a:noAutofit/>
-          </a:bodyPr>
-          <a:lstStyle/>
-          <a:p>
-            <a:pPr marL="0" marR="0" algn="ctr">
-              <a:spcBef>
-                <a:spcPts val="0"/>
-              </a:spcBef>
-              <a:spcAft>
-                <a:spcPts val="1000"/>
-              </a:spcAft>
-            </a:pPr>
-            <a:br>
-              <a:rPr lang="bs-Latn-BA" sz="4000" cap="small" dirty="0">
-                <a:effectLst/>
-                <a:latin typeface="Times New Roman" panose="02020603050405020304" pitchFamily="18" charset="0"/>
-                <a:ea typeface="Calibri" panose="020F0502020204030204" pitchFamily="34" charset="0"/>
-                <a:cs typeface="Times New Roman" panose="02020603050405020304" pitchFamily="18" charset="0"/>
-              </a:rPr>
-            </a:br>
-            <a:r>
-              <a:rPr lang="bs-Latn-BA" sz="4000" cap="small" dirty="0">
-                <a:effectLst/>
-                <a:latin typeface="Times New Roman" panose="02020603050405020304" pitchFamily="18" charset="0"/>
-                <a:ea typeface="Calibri" panose="020F0502020204030204" pitchFamily="34" charset="0"/>
-                <a:cs typeface="Times New Roman" panose="02020603050405020304" pitchFamily="18" charset="0"/>
-              </a:rPr>
-              <a:t>Uporedna analiza Python i .NET okruženja za treniranje modela dubokog učenja na primjeru detekcije raka pluća</a:t>
-            </a:r>
-            <a:endParaRPr lang="en-US" sz="4000" dirty="0">
-              <a:effectLst/>
-              <a:latin typeface="Times New Roman" panose="02020603050405020304" pitchFamily="18" charset="0"/>
-              <a:ea typeface="Calibri" panose="020F0502020204030204" pitchFamily="34" charset="0"/>
-              <a:cs typeface="Times New Roman" panose="02020603050405020304" pitchFamily="18" charset="0"/>
-            </a:endParaRPr>
-          </a:p>
-        </p:txBody>
-      </p:sp>
-      <p:sp>
-        <p:nvSpPr>
-          <p:cNvPr id="4" name="Rectangle 1">
-            <a:extLst>
-              <a:ext uri="{FF2B5EF4-FFF2-40B4-BE49-F238E27FC236}">
-                <a16:creationId xmlns:a16="http://schemas.microsoft.com/office/drawing/2014/main" id="{AA947D18-48E6-4BEF-BF23-5070FB7F27B4}"/>
-              </a:ext>
-            </a:extLst>
-          </p:cNvPr>
-          <p:cNvSpPr>
-            <a:spLocks noGrp="1" noChangeArrowheads="1"/>
-          </p:cNvSpPr>
-          <p:nvPr>
-            <p:ph type="subTitle" idx="1"/>
-          </p:nvPr>
-        </p:nvSpPr>
-        <p:spPr bwMode="auto">
-          <a:xfrm>
-            <a:off x="1523999" y="4296302"/>
-            <a:ext cx="9143999" cy="369332"/>
-          </a:xfrm>
-          <a:prstGeom prst="rect">
-            <a:avLst/>
-          </a:prstGeom>
-          <a:noFill/>
-          <a:ln>
-            <a:noFill/>
-          </a:ln>
-          <a:effectLst/>
-          <a:extLst>
-            <a:ext uri="{909E8E84-426E-40DD-AFC4-6F175D3DCCD1}">
-              <a14:hiddenFill xmlns:a14="http://schemas.microsoft.com/office/drawing/2010/main">
-                <a:solidFill>
-                  <a:schemeClr val="accent1"/>
-                </a:solidFill>
-              </a14:hiddenFill>
-            </a:ext>
-            <a:ext uri="{91240B29-F687-4F45-9708-019B960494DF}">
-              <a14:hiddenLine xmlns:a14="http://schemas.microsoft.com/office/drawing/2010/main" w="9525">
-                <a:solidFill>
-                  <a:schemeClr val="tx1"/>
-                </a:solidFill>
-                <a:miter lim="800000"/>
-                <a:headEnd/>
-                <a:tailEnd/>
-              </a14:hiddenLine>
-            </a:ext>
-            <a:ext uri="{AF507438-7753-43E0-B8FC-AC1667EBCBE1}">
-              <a14:hiddenEffects xmlns:a14="http://schemas.microsoft.com/office/drawing/2010/main">
-                <a:effectLst>
-                  <a:outerShdw dist="35921" dir="2700000" algn="ctr" rotWithShape="0">
-                    <a:schemeClr val="bg2"/>
-                  </a:outerShdw>
-                </a:effectLst>
-              </a14:hiddenEffects>
-            </a:ext>
-          </a:extLst>
-        </p:spPr>
-        <p:txBody>
-          <a:bodyPr vert="horz" wrap="square" lIns="91440" tIns="45720" rIns="91440" bIns="45720" numCol="1" anchor="ctr" anchorCtr="0" compatLnSpc="1">
-            <a:prstTxWarp prst="textNoShape">
-              <a:avLst/>
-            </a:prstTxWarp>
-            <a:spAutoFit/>
           </a:bodyPr>
           <a:lstStyle/>
           <a:p>
@@ -3480,15 +5289,221 @@
               <a:buNone/>
               <a:tabLst/>
             </a:pPr>
-            <a:endParaRPr kumimoji="0" lang="en-US" altLang="en-US" sz="1800" b="0" i="0" u="none" strike="noStrike" cap="none" normalizeH="0" baseline="0" dirty="0">
-              <a:ln>
-                <a:noFill/>
-              </a:ln>
-              <a:solidFill>
-                <a:schemeClr val="tx1"/>
-              </a:solidFill>
+            <a:br>
+              <a:rPr lang="en-US" sz="4000" b="1" cap="small" dirty="0">
+                <a:effectLst/>
+                <a:latin typeface="Times New Roman" panose="02020603050405020304" pitchFamily="18" charset="0"/>
+                <a:ea typeface="Calibri" panose="020F0502020204030204" pitchFamily="34" charset="0"/>
+                <a:cs typeface="Times New Roman" panose="02020603050405020304" pitchFamily="18" charset="0"/>
+              </a:rPr>
+            </a:br>
+            <a:r>
+              <a:rPr kumimoji="0" lang="en-US" altLang="en-US" sz="2400" b="0" i="0" u="none" strike="noStrike" cap="none" normalizeH="0" baseline="0" dirty="0">
+                <a:ln>
+                  <a:noFill/>
+                </a:ln>
+                <a:solidFill>
+                  <a:schemeClr val="tx1"/>
+                </a:solidFill>
+                <a:effectLst/>
+                <a:latin typeface="Times New Roman" panose="02020603050405020304" pitchFamily="18" charset="0"/>
+                <a:cs typeface="Times New Roman" panose="02020603050405020304" pitchFamily="18" charset="0"/>
+              </a:rPr>
+              <a:t>UNIVERZITET U TUZLI</a:t>
+            </a:r>
+            <a:br>
+              <a:rPr kumimoji="0" lang="en-US" altLang="en-US" sz="1400" b="0" i="0" u="none" strike="noStrike" cap="none" normalizeH="0" baseline="0" dirty="0">
+                <a:ln>
+                  <a:noFill/>
+                </a:ln>
+                <a:solidFill>
+                  <a:schemeClr val="tx1"/>
+                </a:solidFill>
+                <a:effectLst/>
+                <a:latin typeface="Times New Roman" panose="02020603050405020304" pitchFamily="18" charset="0"/>
+                <a:cs typeface="Times New Roman" panose="02020603050405020304" pitchFamily="18" charset="0"/>
+              </a:rPr>
+            </a:br>
+            <a:r>
+              <a:rPr lang="en-US" altLang="en-US" sz="2000" dirty="0">
+                <a:latin typeface="Times New Roman" panose="02020603050405020304" pitchFamily="18" charset="0"/>
+                <a:cs typeface="Times New Roman" panose="02020603050405020304" pitchFamily="18" charset="0"/>
+              </a:rPr>
+              <a:t>FAKULTET ELEKTROTEHNIKE</a:t>
+            </a:r>
+            <a:br>
+              <a:rPr kumimoji="0" lang="en-US" altLang="en-US" sz="4400" b="0" i="0" u="none" strike="noStrike" cap="none" normalizeH="0" baseline="0" dirty="0">
+                <a:ln>
+                  <a:noFill/>
+                </a:ln>
+                <a:solidFill>
+                  <a:schemeClr val="tx1"/>
+                </a:solidFill>
+                <a:effectLst/>
+                <a:latin typeface="Times New Roman" panose="02020603050405020304" pitchFamily="18" charset="0"/>
+                <a:cs typeface="Times New Roman" panose="02020603050405020304" pitchFamily="18" charset="0"/>
+              </a:rPr>
+            </a:br>
+            <a:br>
+              <a:rPr lang="en-US" altLang="en-US" sz="4000" dirty="0">
+                <a:latin typeface="Times New Roman" panose="02020603050405020304" pitchFamily="18" charset="0"/>
+                <a:cs typeface="Times New Roman" panose="02020603050405020304" pitchFamily="18" charset="0"/>
+              </a:rPr>
+            </a:br>
+            <a:r>
+              <a:rPr lang="bs-Latn-BA" sz="4000" b="1" cap="small" dirty="0">
+                <a:effectLst/>
+                <a:latin typeface="Times New Roman" panose="02020603050405020304" pitchFamily="18" charset="0"/>
+                <a:ea typeface="Calibri" panose="020F0502020204030204" pitchFamily="34" charset="0"/>
+                <a:cs typeface="Times New Roman" panose="02020603050405020304" pitchFamily="18" charset="0"/>
+              </a:rPr>
+              <a:t>Uporedna analiza Python i .NET okruženja za treniranje modela dubokog učenja na primjeru detekcije raka pluća</a:t>
+            </a:r>
+            <a:br>
+              <a:rPr lang="en-US" sz="4000" b="1" cap="small" dirty="0">
+                <a:effectLst/>
+                <a:latin typeface="Times New Roman" panose="02020603050405020304" pitchFamily="18" charset="0"/>
+                <a:ea typeface="Calibri" panose="020F0502020204030204" pitchFamily="34" charset="0"/>
+                <a:cs typeface="Times New Roman" panose="02020603050405020304" pitchFamily="18" charset="0"/>
+              </a:rPr>
+            </a:br>
+            <a:br>
+              <a:rPr lang="en-US" sz="4000" b="1" cap="small" dirty="0">
+                <a:effectLst/>
+                <a:latin typeface="Times New Roman" panose="02020603050405020304" pitchFamily="18" charset="0"/>
+                <a:ea typeface="Calibri" panose="020F0502020204030204" pitchFamily="34" charset="0"/>
+                <a:cs typeface="Times New Roman" panose="02020603050405020304" pitchFamily="18" charset="0"/>
+              </a:rPr>
+            </a:br>
+            <a:r>
+              <a:rPr kumimoji="0" lang="en-US" altLang="en-US" sz="2000" b="0" i="0" u="none" strike="noStrike" cap="none" normalizeH="0" baseline="0" dirty="0">
+                <a:ln>
+                  <a:noFill/>
+                </a:ln>
+                <a:solidFill>
+                  <a:schemeClr val="tx1"/>
+                </a:solidFill>
+                <a:effectLst/>
+                <a:latin typeface="Times New Roman" panose="02020603050405020304" pitchFamily="18" charset="0"/>
+                <a:cs typeface="Times New Roman" panose="02020603050405020304" pitchFamily="18" charset="0"/>
+              </a:rPr>
+              <a:t>Student: Omar </a:t>
+            </a:r>
+            <a:r>
+              <a:rPr kumimoji="0" lang="en-US" altLang="en-US" sz="2000" b="0" i="0" u="none" strike="noStrike" cap="none" normalizeH="0" baseline="0" dirty="0" err="1">
+                <a:ln>
+                  <a:noFill/>
+                </a:ln>
+                <a:solidFill>
+                  <a:schemeClr val="tx1"/>
+                </a:solidFill>
+                <a:effectLst/>
+                <a:latin typeface="Times New Roman" panose="02020603050405020304" pitchFamily="18" charset="0"/>
+                <a:cs typeface="Times New Roman" panose="02020603050405020304" pitchFamily="18" charset="0"/>
+              </a:rPr>
+              <a:t>Kurtović</a:t>
+            </a:r>
+            <a:br>
+              <a:rPr kumimoji="0" lang="en-US" altLang="en-US" sz="4000" b="0" i="0" u="none" strike="noStrike" cap="none" normalizeH="0" baseline="0" dirty="0">
+                <a:ln>
+                  <a:noFill/>
+                </a:ln>
+                <a:solidFill>
+                  <a:schemeClr val="tx1"/>
+                </a:solidFill>
+                <a:effectLst/>
+                <a:latin typeface="Times New Roman" panose="02020603050405020304" pitchFamily="18" charset="0"/>
+                <a:cs typeface="Times New Roman" panose="02020603050405020304" pitchFamily="18" charset="0"/>
+              </a:rPr>
+            </a:br>
+            <a:r>
+              <a:rPr kumimoji="0" lang="en-US" altLang="en-US" sz="2000" b="0" i="0" u="none" strike="noStrike" cap="none" normalizeH="0" baseline="0" dirty="0">
+                <a:ln>
+                  <a:noFill/>
+                </a:ln>
+                <a:solidFill>
+                  <a:schemeClr val="tx1"/>
+                </a:solidFill>
+                <a:effectLst/>
+                <a:latin typeface="Times New Roman" panose="02020603050405020304" pitchFamily="18" charset="0"/>
+                <a:cs typeface="Times New Roman" panose="02020603050405020304" pitchFamily="18" charset="0"/>
+              </a:rPr>
+              <a:t>Mentor</a:t>
+            </a:r>
+            <a:r>
+              <a:rPr lang="en-US" altLang="en-US" sz="2000" dirty="0">
+                <a:latin typeface="Times New Roman" panose="02020603050405020304" pitchFamily="18" charset="0"/>
+                <a:cs typeface="Times New Roman" panose="02020603050405020304" pitchFamily="18" charset="0"/>
+              </a:rPr>
+              <a:t>: </a:t>
+            </a:r>
+            <a:r>
+              <a:rPr lang="en-US" altLang="en-US" sz="2000" dirty="0" err="1">
+                <a:latin typeface="Times New Roman" panose="02020603050405020304" pitchFamily="18" charset="0"/>
+                <a:cs typeface="Times New Roman" panose="02020603050405020304" pitchFamily="18" charset="0"/>
+              </a:rPr>
+              <a:t>dr.sci</a:t>
+            </a:r>
+            <a:r>
+              <a:rPr lang="en-US" altLang="en-US" sz="2000" dirty="0">
+                <a:latin typeface="Times New Roman" panose="02020603050405020304" pitchFamily="18" charset="0"/>
+                <a:cs typeface="Times New Roman" panose="02020603050405020304" pitchFamily="18" charset="0"/>
+              </a:rPr>
+              <a:t>. Damir </a:t>
+            </a:r>
+            <a:r>
+              <a:rPr lang="en-US" altLang="en-US" sz="2000" dirty="0" err="1">
+                <a:latin typeface="Times New Roman" panose="02020603050405020304" pitchFamily="18" charset="0"/>
+                <a:cs typeface="Times New Roman" panose="02020603050405020304" pitchFamily="18" charset="0"/>
+              </a:rPr>
+              <a:t>Demirović</a:t>
+            </a:r>
+            <a:r>
+              <a:rPr lang="en-US" altLang="en-US" sz="2000" dirty="0">
+                <a:latin typeface="Times New Roman" panose="02020603050405020304" pitchFamily="18" charset="0"/>
+                <a:cs typeface="Times New Roman" panose="02020603050405020304" pitchFamily="18" charset="0"/>
+              </a:rPr>
+              <a:t>, </a:t>
+            </a:r>
+            <a:r>
+              <a:rPr lang="en-US" altLang="en-US" sz="2000" dirty="0" err="1">
+                <a:latin typeface="Times New Roman" panose="02020603050405020304" pitchFamily="18" charset="0"/>
+                <a:cs typeface="Times New Roman" panose="02020603050405020304" pitchFamily="18" charset="0"/>
+              </a:rPr>
+              <a:t>vanr.prof</a:t>
+            </a:r>
+            <a:r>
+              <a:rPr lang="en-US" altLang="en-US" sz="2000" dirty="0">
+                <a:latin typeface="Times New Roman" panose="02020603050405020304" pitchFamily="18" charset="0"/>
+                <a:cs typeface="Times New Roman" panose="02020603050405020304" pitchFamily="18" charset="0"/>
+              </a:rPr>
+              <a:t>.</a:t>
+            </a:r>
+            <a:br>
+              <a:rPr lang="en-US" altLang="en-US" sz="2000" dirty="0">
+                <a:latin typeface="Times New Roman" panose="02020603050405020304" pitchFamily="18" charset="0"/>
+                <a:cs typeface="Times New Roman" panose="02020603050405020304" pitchFamily="18" charset="0"/>
+              </a:rPr>
+            </a:br>
+            <a:r>
+              <a:rPr lang="en-US" altLang="en-US" sz="2000" dirty="0">
+                <a:latin typeface="Times New Roman" panose="02020603050405020304" pitchFamily="18" charset="0"/>
+                <a:cs typeface="Times New Roman" panose="02020603050405020304" pitchFamily="18" charset="0"/>
+              </a:rPr>
+              <a:t>Tuzla, August 2026. </a:t>
+            </a:r>
+            <a:r>
+              <a:rPr lang="en-US" altLang="en-US" sz="2000" dirty="0" err="1">
+                <a:latin typeface="Times New Roman" panose="02020603050405020304" pitchFamily="18" charset="0"/>
+                <a:cs typeface="Times New Roman" panose="02020603050405020304" pitchFamily="18" charset="0"/>
+              </a:rPr>
+              <a:t>godine</a:t>
+            </a:r>
+            <a:endParaRPr lang="en-US" sz="2000" b="1" dirty="0">
               <a:effectLst/>
-              <a:latin typeface="Arial" panose="020B0604020202020204" pitchFamily="34" charset="0"/>
+              <a:latin typeface="Times New Roman" panose="02020603050405020304" pitchFamily="18" charset="0"/>
+              <a:ea typeface="Calibri" panose="020F0502020204030204" pitchFamily="34" charset="0"/>
+              <a:cs typeface="Times New Roman" panose="02020603050405020304" pitchFamily="18" charset="0"/>
             </a:endParaRPr>
           </a:p>
         </p:txBody>
@@ -3528,7 +5543,7 @@
           <p:cNvPr id="2" name="Title 1">
             <a:extLst>
               <a:ext uri="{FF2B5EF4-FFF2-40B4-BE49-F238E27FC236}">
-                <a16:creationId xmlns:a16="http://schemas.microsoft.com/office/drawing/2014/main" id="{642D972C-BCE3-4F5E-B614-12241183882C}"/>
+                <a16:creationId xmlns:a16="http://schemas.microsoft.com/office/drawing/2014/main" id="{BAFA7B68-A7A1-41B4-9E17-A1182295BB9B}"/>
               </a:ext>
             </a:extLst>
           </p:cNvPr>
@@ -3545,15 +5560,24 @@
           <a:lstStyle/>
           <a:p>
             <a:r>
-              <a:rPr lang="en-US" dirty="0" err="1"/>
+              <a:rPr lang="en-US" dirty="0" err="1">
+                <a:latin typeface="Times New Roman" panose="02020603050405020304" pitchFamily="18" charset="0"/>
+                <a:cs typeface="Times New Roman" panose="02020603050405020304" pitchFamily="18" charset="0"/>
+              </a:rPr>
               <a:t>Cilj</a:t>
             </a:r>
             <a:r>
-              <a:rPr lang="en-US" dirty="0"/>
-              <a:t> </a:t>
-            </a:r>
-            <a:r>
-              <a:rPr lang="en-US" dirty="0" err="1"/>
+              <a:rPr lang="en-US" dirty="0">
+                <a:latin typeface="Times New Roman" panose="02020603050405020304" pitchFamily="18" charset="0"/>
+                <a:cs typeface="Times New Roman" panose="02020603050405020304" pitchFamily="18" charset="0"/>
+              </a:rPr>
+              <a:t> </a:t>
+            </a:r>
+            <a:r>
+              <a:rPr lang="en-US" dirty="0" err="1">
+                <a:latin typeface="Times New Roman" panose="02020603050405020304" pitchFamily="18" charset="0"/>
+                <a:cs typeface="Times New Roman" panose="02020603050405020304" pitchFamily="18" charset="0"/>
+              </a:rPr>
               <a:t>rada</a:t>
             </a:r>
             <a:endParaRPr lang="en-US" dirty="0"/>
@@ -3565,7 +5589,7 @@
           <p:cNvPr id="6" name="Picture Placeholder 5">
             <a:extLst>
               <a:ext uri="{FF2B5EF4-FFF2-40B4-BE49-F238E27FC236}">
-                <a16:creationId xmlns:a16="http://schemas.microsoft.com/office/drawing/2014/main" id="{67B3B748-2B19-45C0-91A4-47B1E8A450ED}"/>
+                <a16:creationId xmlns:a16="http://schemas.microsoft.com/office/drawing/2014/main" id="{9088EF0A-B97F-44BE-88A0-40B675B1C3C6}"/>
               </a:ext>
             </a:extLst>
           </p:cNvPr>
@@ -3577,7 +5601,7 @@
           </p:nvPr>
         </p:nvPicPr>
         <p:blipFill>
-          <a:blip r:embed="rId2">
+          <a:blip r:embed="rId3">
             <a:extLst>
               <a:ext uri="{28A0092B-C50C-407E-A947-70E740481C1C}">
                 <a14:useLocalDpi xmlns:a14="http://schemas.microsoft.com/office/drawing/2010/main" val="0"/>
@@ -3589,24 +5613,14 @@
             <a:fillRect/>
           </a:stretch>
         </p:blipFill>
-        <p:spPr>
-          <a:xfrm>
-            <a:off x="5183188" y="987426"/>
-            <a:ext cx="6172200" cy="4387764"/>
-          </a:xfrm>
-          <a:prstGeom prst="roundRect">
-            <a:avLst>
-              <a:gd name="adj" fmla="val 7115"/>
-            </a:avLst>
-          </a:prstGeom>
-        </p:spPr>
+        <p:spPr/>
       </p:pic>
       <p:sp>
         <p:nvSpPr>
           <p:cNvPr id="4" name="Text Placeholder 3">
             <a:extLst>
               <a:ext uri="{FF2B5EF4-FFF2-40B4-BE49-F238E27FC236}">
-                <a16:creationId xmlns:a16="http://schemas.microsoft.com/office/drawing/2014/main" id="{BB815A87-A581-4D1B-9581-F90ACA453F1C}"/>
+                <a16:creationId xmlns:a16="http://schemas.microsoft.com/office/drawing/2014/main" id="{D1783B05-5000-4EC6-A370-B9403E40B92D}"/>
               </a:ext>
             </a:extLst>
           </p:cNvPr>
@@ -3619,447 +5633,276 @@
         </p:nvSpPr>
         <p:spPr/>
         <p:txBody>
-          <a:bodyPr/>
+          <a:bodyPr>
+            <a:normAutofit/>
+          </a:bodyPr>
           <a:lstStyle/>
           <a:p>
             <a:r>
-              <a:rPr lang="en-US" dirty="0" err="1"/>
-              <a:t>Dominacija</a:t>
-            </a:r>
-            <a:r>
-              <a:rPr lang="en-US" dirty="0"/>
+              <a:rPr lang="pl-PL" sz="2000" dirty="0"/>
+              <a:t>Python je standard za probleme mašinskog učenja</a:t>
+            </a:r>
+            <a:endParaRPr lang="en-US" sz="2000" dirty="0"/>
+          </a:p>
+          <a:p>
+            <a:r>
+              <a:rPr lang="en-US" sz="2000" dirty="0" err="1"/>
+              <a:t>Veliki</a:t>
+            </a:r>
+            <a:r>
+              <a:rPr lang="en-US" sz="2000" dirty="0"/>
+              <a:t> </a:t>
+            </a:r>
+            <a:r>
+              <a:rPr lang="en-US" sz="2000" dirty="0" err="1"/>
+              <a:t>broj</a:t>
+            </a:r>
+            <a:r>
+              <a:rPr lang="en-US" sz="2000" dirty="0"/>
+              <a:t> </a:t>
+            </a:r>
+            <a:r>
+              <a:rPr lang="en-US" sz="2000" dirty="0" err="1"/>
+              <a:t>postojećih</a:t>
+            </a:r>
+            <a:r>
+              <a:rPr lang="en-US" sz="2000" dirty="0"/>
+              <a:t> </a:t>
+            </a:r>
+            <a:r>
+              <a:rPr lang="en-US" sz="2000" dirty="0" err="1"/>
+              <a:t>aplikacija</a:t>
+            </a:r>
+            <a:r>
+              <a:rPr lang="en-US" sz="2000" dirty="0"/>
+              <a:t> </a:t>
+            </a:r>
+            <a:r>
+              <a:rPr lang="en-US" sz="2000" dirty="0" err="1"/>
+              <a:t>gradi</a:t>
+            </a:r>
+            <a:r>
+              <a:rPr lang="en-US" sz="2000" dirty="0"/>
+              <a:t> se </a:t>
+            </a:r>
+            <a:r>
+              <a:rPr lang="en-US" sz="2000" dirty="0" err="1"/>
+              <a:t>na</a:t>
+            </a:r>
+            <a:r>
+              <a:rPr lang="en-US" sz="2000" dirty="0"/>
+              <a:t> </a:t>
+            </a:r>
+            <a:r>
+              <a:rPr lang="en-US" sz="2000" dirty="0" err="1"/>
+              <a:t>drugim</a:t>
+            </a:r>
+            <a:r>
+              <a:rPr lang="en-US" sz="2000" dirty="0"/>
+              <a:t> </a:t>
+            </a:r>
+            <a:r>
+              <a:rPr lang="en-US" sz="2000" dirty="0" err="1"/>
+              <a:t>tehnologijama</a:t>
+            </a:r>
+            <a:r>
+              <a:rPr lang="en-US" sz="2000" dirty="0"/>
+              <a:t>: TypeScript/JavaScript, Java, C#/.NET, PHP</a:t>
+            </a:r>
+          </a:p>
+          <a:p>
+            <a:r>
+              <a:rPr lang="en-US" sz="2000" dirty="0" err="1">
+                <a:latin typeface="Times New Roman" panose="02020603050405020304" pitchFamily="18" charset="0"/>
+                <a:cs typeface="Times New Roman" panose="02020603050405020304" pitchFamily="18" charset="0"/>
+              </a:rPr>
+              <a:t>Integracija</a:t>
+            </a:r>
+            <a:r>
+              <a:rPr lang="en-US" sz="2000" dirty="0">
+                <a:latin typeface="Times New Roman" panose="02020603050405020304" pitchFamily="18" charset="0"/>
+                <a:cs typeface="Times New Roman" panose="02020603050405020304" pitchFamily="18" charset="0"/>
+              </a:rPr>
               <a:t> Python </a:t>
             </a:r>
             <a:r>
-              <a:rPr lang="en-US" dirty="0" err="1"/>
-              <a:t>programskog</a:t>
-            </a:r>
-            <a:r>
-              <a:rPr lang="en-US" dirty="0"/>
-              <a:t> </a:t>
-            </a:r>
-            <a:r>
-              <a:rPr lang="en-US" dirty="0" err="1"/>
-              <a:t>jezika</a:t>
-            </a:r>
-            <a:r>
-              <a:rPr lang="en-US" dirty="0"/>
-              <a:t> za </a:t>
-            </a:r>
-            <a:r>
-              <a:rPr lang="en-US" dirty="0" err="1"/>
+              <a:rPr lang="en-US" sz="2000" dirty="0" err="1">
+                <a:latin typeface="Times New Roman" panose="02020603050405020304" pitchFamily="18" charset="0"/>
+                <a:cs typeface="Times New Roman" panose="02020603050405020304" pitchFamily="18" charset="0"/>
+              </a:rPr>
+              <a:t>rješenja</a:t>
+            </a:r>
+            <a:r>
+              <a:rPr lang="en-US" sz="2000" dirty="0">
+                <a:latin typeface="Times New Roman" panose="02020603050405020304" pitchFamily="18" charset="0"/>
+                <a:cs typeface="Times New Roman" panose="02020603050405020304" pitchFamily="18" charset="0"/>
+              </a:rPr>
+              <a:t> </a:t>
+            </a:r>
+            <a:r>
+              <a:rPr lang="en-US" sz="2000" dirty="0" err="1">
+                <a:latin typeface="Times New Roman" panose="02020603050405020304" pitchFamily="18" charset="0"/>
+                <a:cs typeface="Times New Roman" panose="02020603050405020304" pitchFamily="18" charset="0"/>
+              </a:rPr>
+              <a:t>donosi</a:t>
+            </a:r>
+            <a:r>
+              <a:rPr lang="en-US" sz="2000" dirty="0">
+                <a:latin typeface="Times New Roman" panose="02020603050405020304" pitchFamily="18" charset="0"/>
+                <a:cs typeface="Times New Roman" panose="02020603050405020304" pitchFamily="18" charset="0"/>
+              </a:rPr>
+              <a:t> </a:t>
+            </a:r>
+            <a:r>
+              <a:rPr lang="en-US" sz="2000" dirty="0" err="1">
+                <a:latin typeface="Times New Roman" panose="02020603050405020304" pitchFamily="18" charset="0"/>
+                <a:cs typeface="Times New Roman" panose="02020603050405020304" pitchFamily="18" charset="0"/>
+              </a:rPr>
+              <a:t>dodatnu</a:t>
+            </a:r>
+            <a:r>
+              <a:rPr lang="en-US" sz="2000" dirty="0">
+                <a:latin typeface="Times New Roman" panose="02020603050405020304" pitchFamily="18" charset="0"/>
+                <a:cs typeface="Times New Roman" panose="02020603050405020304" pitchFamily="18" charset="0"/>
+              </a:rPr>
+              <a:t> </a:t>
+            </a:r>
+            <a:r>
+              <a:rPr lang="en-US" sz="2000" dirty="0" err="1">
+                <a:latin typeface="Times New Roman" panose="02020603050405020304" pitchFamily="18" charset="0"/>
+                <a:cs typeface="Times New Roman" panose="02020603050405020304" pitchFamily="18" charset="0"/>
+              </a:rPr>
+              <a:t>kompleksnost</a:t>
+            </a:r>
+            <a:endParaRPr lang="en-US" sz="2000" dirty="0">
+              <a:latin typeface="Times New Roman" panose="02020603050405020304" pitchFamily="18" charset="0"/>
+              <a:cs typeface="Times New Roman" panose="02020603050405020304" pitchFamily="18" charset="0"/>
+            </a:endParaRPr>
+          </a:p>
+          <a:p>
+            <a:r>
+              <a:rPr lang="en-US" sz="2000" b="1" dirty="0" err="1">
+                <a:latin typeface="Times New Roman" panose="02020603050405020304" pitchFamily="18" charset="0"/>
+                <a:cs typeface="Times New Roman" panose="02020603050405020304" pitchFamily="18" charset="0"/>
+              </a:rPr>
+              <a:t>Pitanje</a:t>
+            </a:r>
+            <a:r>
+              <a:rPr lang="en-US" sz="2000" b="1" dirty="0">
+                <a:latin typeface="Times New Roman" panose="02020603050405020304" pitchFamily="18" charset="0"/>
+                <a:cs typeface="Times New Roman" panose="02020603050405020304" pitchFamily="18" charset="0"/>
+              </a:rPr>
+              <a:t> </a:t>
+            </a:r>
+            <a:r>
+              <a:rPr lang="en-US" sz="2000" b="1" dirty="0" err="1">
+                <a:latin typeface="Times New Roman" panose="02020603050405020304" pitchFamily="18" charset="0"/>
+                <a:cs typeface="Times New Roman" panose="02020603050405020304" pitchFamily="18" charset="0"/>
+              </a:rPr>
+              <a:t>rada</a:t>
+            </a:r>
+            <a:r>
+              <a:rPr lang="en-US" sz="2000" b="1" dirty="0">
+                <a:latin typeface="Times New Roman" panose="02020603050405020304" pitchFamily="18" charset="0"/>
+                <a:cs typeface="Times New Roman" panose="02020603050405020304" pitchFamily="18" charset="0"/>
+              </a:rPr>
+              <a:t>:</a:t>
+            </a:r>
+            <a:r>
+              <a:rPr lang="en-US" sz="2000" dirty="0">
+                <a:latin typeface="Times New Roman" panose="02020603050405020304" pitchFamily="18" charset="0"/>
+                <a:cs typeface="Times New Roman" panose="02020603050405020304" pitchFamily="18" charset="0"/>
+              </a:rPr>
+              <a:t> </a:t>
+            </a:r>
+            <a:r>
+              <a:rPr lang="en-US" sz="2000" dirty="0" err="1"/>
+              <a:t>koje</a:t>
+            </a:r>
+            <a:r>
+              <a:rPr lang="en-US" sz="2000" dirty="0"/>
+              <a:t> </a:t>
+            </a:r>
+            <a:r>
+              <a:rPr lang="en-US" sz="2000" dirty="0" err="1"/>
+              <a:t>su</a:t>
+            </a:r>
+            <a:r>
+              <a:rPr lang="en-US" sz="2000" dirty="0"/>
+              <a:t> </a:t>
+            </a:r>
+            <a:r>
+              <a:rPr lang="en-US" sz="2000" dirty="0" err="1"/>
+              <a:t>prednosti</a:t>
+            </a:r>
+            <a:r>
+              <a:rPr lang="en-US" sz="2000" dirty="0"/>
+              <a:t> </a:t>
+            </a:r>
+            <a:r>
+              <a:rPr lang="en-US" sz="2000" dirty="0" err="1"/>
+              <a:t>i</a:t>
+            </a:r>
+            <a:r>
+              <a:rPr lang="en-US" sz="2000" dirty="0"/>
+              <a:t> mane </a:t>
+            </a:r>
+            <a:r>
+              <a:rPr lang="en-US" sz="2000" dirty="0" err="1"/>
               <a:t>rješavanja</a:t>
             </a:r>
             <a:r>
-              <a:rPr lang="en-US" dirty="0"/>
-              <a:t> </a:t>
-            </a:r>
-            <a:r>
-              <a:rPr lang="en-US" dirty="0" err="1"/>
+              <a:rPr lang="en-US" sz="2000" dirty="0"/>
+              <a:t> </a:t>
+            </a:r>
+            <a:r>
+              <a:rPr lang="en-US" sz="2000" dirty="0" err="1"/>
               <a:t>problema</a:t>
             </a:r>
             <a:r>
-              <a:rPr lang="en-US" dirty="0"/>
-              <a:t> </a:t>
-            </a:r>
-            <a:r>
-              <a:rPr lang="en-US" dirty="0" err="1"/>
-              <a:t>uz</a:t>
-            </a:r>
-            <a:r>
-              <a:rPr lang="en-US" dirty="0"/>
-              <a:t> </a:t>
-            </a:r>
-            <a:r>
-              <a:rPr lang="en-US" dirty="0" err="1"/>
-              <a:t>pomoć</a:t>
-            </a:r>
-            <a:r>
-              <a:rPr lang="en-US" dirty="0"/>
-              <a:t> </a:t>
-            </a:r>
-            <a:r>
-              <a:rPr lang="en-US" dirty="0" err="1"/>
+              <a:rPr lang="en-US" sz="2000" dirty="0"/>
+              <a:t> </a:t>
+            </a:r>
+            <a:r>
+              <a:rPr lang="en-US" sz="2000" dirty="0" err="1"/>
               <a:t>mašinskog</a:t>
             </a:r>
             <a:r>
-              <a:rPr lang="en-US" dirty="0"/>
-              <a:t> </a:t>
-            </a:r>
-            <a:r>
-              <a:rPr lang="en-US" dirty="0" err="1"/>
+              <a:rPr lang="en-US" sz="2000" dirty="0"/>
+              <a:t> </a:t>
+            </a:r>
+            <a:r>
+              <a:rPr lang="en-US" sz="2000" dirty="0" err="1"/>
               <a:t>učenja</a:t>
             </a:r>
             <a:r>
-              <a:rPr lang="en-US" dirty="0"/>
-              <a:t> je </a:t>
-            </a:r>
-            <a:r>
-              <a:rPr lang="en-US" dirty="0" err="1"/>
-              <a:t>siguran</a:t>
-            </a:r>
-            <a:r>
-              <a:rPr lang="en-US" dirty="0"/>
-              <a:t>. </a:t>
-            </a:r>
-          </a:p>
-          <a:p>
-            <a:r>
-              <a:rPr lang="en-US" dirty="0" err="1"/>
-              <a:t>Međutim</a:t>
-            </a:r>
-            <a:r>
-              <a:rPr lang="en-US" dirty="0"/>
+              <a:rPr lang="en-US" sz="2000" dirty="0"/>
+              <a:t> u </a:t>
+            </a:r>
+            <a:r>
+              <a:rPr lang="en-US" sz="2000" dirty="0" err="1"/>
+              <a:t>alternativnim</a:t>
+            </a:r>
+            <a:r>
+              <a:rPr lang="en-US" sz="2000" dirty="0"/>
+              <a:t> </a:t>
+            </a:r>
+            <a:r>
+              <a:rPr lang="en-US" sz="2000" dirty="0" err="1"/>
+              <a:t>ekosistemima</a:t>
+            </a:r>
+            <a:r>
+              <a:rPr lang="en-US" sz="2000" dirty="0"/>
               <a:t>, </a:t>
             </a:r>
             <a:r>
-              <a:rPr lang="en-US" dirty="0" err="1"/>
-              <a:t>veliki</a:t>
-            </a:r>
-            <a:r>
-              <a:rPr lang="en-US" dirty="0"/>
-              <a:t> </a:t>
-            </a:r>
-            <a:r>
-              <a:rPr lang="en-US" dirty="0" err="1"/>
-              <a:t>broj</a:t>
-            </a:r>
-            <a:r>
-              <a:rPr lang="en-US" dirty="0"/>
-              <a:t> </a:t>
-            </a:r>
-            <a:r>
-              <a:rPr lang="en-US" dirty="0" err="1"/>
-              <a:t>postojećih</a:t>
-            </a:r>
-            <a:r>
-              <a:rPr lang="en-US" dirty="0"/>
-              <a:t> </a:t>
-            </a:r>
-            <a:r>
-              <a:rPr lang="en-US" dirty="0" err="1"/>
-              <a:t>aplikacija</a:t>
-            </a:r>
-            <a:r>
-              <a:rPr lang="en-US" dirty="0"/>
-              <a:t> se </a:t>
-            </a:r>
-            <a:r>
-              <a:rPr lang="en-US" dirty="0" err="1"/>
-              <a:t>oslanja</a:t>
-            </a:r>
-            <a:r>
-              <a:rPr lang="en-US" dirty="0"/>
-              <a:t> </a:t>
-            </a:r>
-            <a:r>
-              <a:rPr lang="en-US" dirty="0" err="1"/>
-              <a:t>na</a:t>
-            </a:r>
-            <a:r>
-              <a:rPr lang="en-US" dirty="0"/>
-              <a:t> </a:t>
-            </a:r>
-            <a:r>
-              <a:rPr lang="en-US" dirty="0" err="1"/>
-              <a:t>raznolik</a:t>
-            </a:r>
-            <a:r>
-              <a:rPr lang="en-US" dirty="0"/>
-              <a:t> </a:t>
-            </a:r>
-            <a:r>
-              <a:rPr lang="en-US" dirty="0" err="1"/>
-              <a:t>skup</a:t>
-            </a:r>
-            <a:r>
-              <a:rPr lang="en-US" dirty="0"/>
-              <a:t> </a:t>
-            </a:r>
-            <a:r>
-              <a:rPr lang="en-US" dirty="0" err="1"/>
-              <a:t>tehnologija</a:t>
-            </a:r>
-            <a:r>
-              <a:rPr lang="en-US" dirty="0"/>
-              <a:t>. </a:t>
-            </a:r>
-            <a:r>
-              <a:rPr lang="en-US" dirty="0" err="1"/>
-              <a:t>Neki</a:t>
-            </a:r>
-            <a:r>
-              <a:rPr lang="en-US" dirty="0"/>
-              <a:t> od </a:t>
-            </a:r>
-            <a:r>
-              <a:rPr lang="en-US" dirty="0" err="1"/>
-              <a:t>najpopularnih</a:t>
-            </a:r>
-            <a:r>
-              <a:rPr lang="en-US" dirty="0"/>
-              <a:t> </a:t>
-            </a:r>
-            <a:r>
-              <a:rPr lang="en-US" dirty="0" err="1"/>
-              <a:t>programskih</a:t>
-            </a:r>
-            <a:r>
-              <a:rPr lang="en-US" dirty="0"/>
-              <a:t> </a:t>
-            </a:r>
-            <a:r>
-              <a:rPr lang="en-US" dirty="0" err="1"/>
-              <a:t>jezika</a:t>
-            </a:r>
-            <a:r>
-              <a:rPr lang="en-US" dirty="0"/>
-              <a:t> </a:t>
-            </a:r>
-            <a:r>
-              <a:rPr lang="en-US" dirty="0" err="1"/>
-              <a:t>su</a:t>
-            </a:r>
-            <a:r>
-              <a:rPr lang="en-US" dirty="0"/>
-              <a:t>: TypeScript, Java, C#, PHP, C++ I </a:t>
-            </a:r>
-            <a:r>
-              <a:rPr lang="en-US" dirty="0" err="1"/>
-              <a:t>drugi</a:t>
-            </a:r>
-            <a:r>
-              <a:rPr lang="en-US" dirty="0"/>
-              <a:t>. </a:t>
-            </a:r>
-          </a:p>
-          <a:p>
-            <a:r>
-              <a:rPr lang="en-US" dirty="0" err="1"/>
-              <a:t>Proces</a:t>
-            </a:r>
-            <a:r>
-              <a:rPr lang="en-US" dirty="0"/>
-              <a:t> </a:t>
-            </a:r>
-            <a:r>
-              <a:rPr lang="en-US" dirty="0" err="1"/>
-              <a:t>uvođenja</a:t>
-            </a:r>
-            <a:r>
-              <a:rPr lang="en-US" dirty="0"/>
-              <a:t> Python </a:t>
-            </a:r>
-            <a:r>
-              <a:rPr lang="en-US" dirty="0" err="1"/>
-              <a:t>rješenja</a:t>
-            </a:r>
-            <a:r>
-              <a:rPr lang="en-US" dirty="0"/>
-              <a:t> u </a:t>
-            </a:r>
-            <a:r>
-              <a:rPr lang="en-US" dirty="0" err="1"/>
-              <a:t>postojeće</a:t>
-            </a:r>
-            <a:r>
-              <a:rPr lang="en-US" dirty="0"/>
-              <a:t> </a:t>
-            </a:r>
-            <a:r>
-              <a:rPr lang="en-US" dirty="0" err="1"/>
-              <a:t>aplikacije</a:t>
-            </a:r>
-            <a:r>
-              <a:rPr lang="en-US" dirty="0"/>
-              <a:t> </a:t>
-            </a:r>
-            <a:r>
-              <a:rPr lang="en-US" dirty="0" err="1"/>
-              <a:t>uvodi</a:t>
-            </a:r>
-            <a:r>
-              <a:rPr lang="en-US" dirty="0"/>
-              <a:t> </a:t>
-            </a:r>
-            <a:r>
-              <a:rPr lang="en-US" dirty="0" err="1"/>
-              <a:t>dodatnu</a:t>
-            </a:r>
-            <a:r>
-              <a:rPr lang="en-US" dirty="0"/>
-              <a:t> </a:t>
-            </a:r>
-            <a:r>
-              <a:rPr lang="en-US" dirty="0" err="1"/>
-              <a:t>kompleksnost</a:t>
-            </a:r>
-            <a:r>
-              <a:rPr lang="en-US" dirty="0"/>
-              <a:t>. </a:t>
-            </a:r>
-            <a:br>
-              <a:rPr lang="en-US" dirty="0"/>
-            </a:br>
-            <a:r>
-              <a:rPr lang="en-US" dirty="0" err="1"/>
-              <a:t>Pitanje</a:t>
-            </a:r>
-            <a:r>
-              <a:rPr lang="en-US" dirty="0"/>
-              <a:t> </a:t>
-            </a:r>
-            <a:r>
-              <a:rPr lang="en-US" dirty="0" err="1"/>
-              <a:t>koje</a:t>
-            </a:r>
-            <a:r>
-              <a:rPr lang="en-US" dirty="0"/>
-              <a:t> </a:t>
-            </a:r>
-            <a:r>
-              <a:rPr lang="en-US" dirty="0" err="1"/>
-              <a:t>dati</a:t>
-            </a:r>
-            <a:r>
-              <a:rPr lang="en-US" dirty="0"/>
-              <a:t> rad </a:t>
-            </a:r>
-            <a:r>
-              <a:rPr lang="en-US" dirty="0" err="1"/>
-              <a:t>postavlja</a:t>
-            </a:r>
-            <a:r>
-              <a:rPr lang="en-US" dirty="0"/>
-              <a:t> </a:t>
-            </a:r>
-            <a:r>
-              <a:rPr lang="en-US" dirty="0" err="1"/>
-              <a:t>jeste</a:t>
-            </a:r>
-            <a:r>
-              <a:rPr lang="en-US" dirty="0"/>
-              <a:t> </a:t>
-            </a:r>
-            <a:r>
-              <a:rPr lang="en-US" dirty="0" err="1"/>
-              <a:t>koje</a:t>
-            </a:r>
-            <a:r>
-              <a:rPr lang="en-US" dirty="0"/>
-              <a:t> </a:t>
-            </a:r>
-            <a:r>
-              <a:rPr lang="en-US" dirty="0" err="1"/>
-              <a:t>su</a:t>
-            </a:r>
-            <a:r>
-              <a:rPr lang="en-US" dirty="0"/>
-              <a:t> </a:t>
-            </a:r>
-            <a:r>
-              <a:rPr lang="en-US" dirty="0" err="1"/>
-              <a:t>stvarne</a:t>
-            </a:r>
-            <a:r>
-              <a:rPr lang="en-US" dirty="0"/>
-              <a:t> </a:t>
-            </a:r>
-            <a:r>
-              <a:rPr lang="en-US" dirty="0" err="1"/>
-              <a:t>prednosti</a:t>
-            </a:r>
-            <a:r>
-              <a:rPr lang="en-US" dirty="0"/>
-              <a:t>, mane I </a:t>
-            </a:r>
-            <a:r>
-              <a:rPr lang="en-US" dirty="0" err="1"/>
-              <a:t>razlike</a:t>
-            </a:r>
-            <a:r>
-              <a:rPr lang="en-US" dirty="0"/>
-              <a:t> u </a:t>
-            </a:r>
-            <a:r>
-              <a:rPr lang="en-US" dirty="0" err="1"/>
-              <a:t>performansama</a:t>
-            </a:r>
-            <a:r>
-              <a:rPr lang="en-US" dirty="0"/>
-              <a:t> </a:t>
-            </a:r>
-            <a:r>
-              <a:rPr lang="en-US" dirty="0" err="1"/>
-              <a:t>prilikom</a:t>
-            </a:r>
-            <a:r>
-              <a:rPr lang="en-US" dirty="0"/>
-              <a:t> </a:t>
-            </a:r>
-            <a:r>
-              <a:rPr lang="en-US" dirty="0" err="1"/>
-              <a:t>rješavanja</a:t>
-            </a:r>
-            <a:r>
-              <a:rPr lang="en-US" dirty="0"/>
-              <a:t> </a:t>
-            </a:r>
-            <a:r>
-              <a:rPr lang="en-US" dirty="0" err="1"/>
-              <a:t>problema</a:t>
-            </a:r>
-            <a:r>
-              <a:rPr lang="en-US" dirty="0"/>
-              <a:t> </a:t>
-            </a:r>
-            <a:r>
-              <a:rPr lang="en-US" dirty="0" err="1"/>
-              <a:t>mašinskog</a:t>
-            </a:r>
-            <a:r>
-              <a:rPr lang="en-US" dirty="0"/>
-              <a:t> </a:t>
-            </a:r>
-            <a:r>
-              <a:rPr lang="en-US" dirty="0" err="1"/>
-              <a:t>učenja</a:t>
-            </a:r>
-            <a:r>
-              <a:rPr lang="en-US" dirty="0"/>
-              <a:t> u </a:t>
-            </a:r>
-            <a:r>
-              <a:rPr lang="en-US" dirty="0" err="1"/>
-              <a:t>alternativnom</a:t>
-            </a:r>
-            <a:r>
-              <a:rPr lang="en-US" dirty="0"/>
-              <a:t> </a:t>
-            </a:r>
-            <a:r>
-              <a:rPr lang="en-US" dirty="0" err="1"/>
-              <a:t>ekosistemu</a:t>
-            </a:r>
-            <a:r>
-              <a:rPr lang="en-US" dirty="0"/>
-              <a:t> od Python, </a:t>
-            </a:r>
-            <a:r>
-              <a:rPr lang="en-US" dirty="0" err="1"/>
+              <a:rPr lang="en-US" sz="2000" dirty="0" err="1"/>
               <a:t>poput</a:t>
             </a:r>
             <a:r>
-              <a:rPr lang="en-US" dirty="0"/>
-              <a:t> .NET.</a:t>
-            </a:r>
-            <a:endParaRPr lang="bs-Latn-BA" dirty="0"/>
-          </a:p>
-          <a:p>
-            <a:endParaRPr lang="en-US" dirty="0"/>
-          </a:p>
-          <a:p>
-            <a:endParaRPr lang="en-US" dirty="0"/>
+              <a:rPr lang="en-US" sz="2000" dirty="0"/>
+              <a:t> .NET-a?</a:t>
+            </a:r>
           </a:p>
         </p:txBody>
       </p:sp>
@@ -4068,7 +5911,7 @@
           <p:cNvPr id="7" name="TextBox 6">
             <a:extLst>
               <a:ext uri="{FF2B5EF4-FFF2-40B4-BE49-F238E27FC236}">
-                <a16:creationId xmlns:a16="http://schemas.microsoft.com/office/drawing/2014/main" id="{FDD9F49E-587E-48EE-959B-59DC6829D5B4}"/>
+                <a16:creationId xmlns:a16="http://schemas.microsoft.com/office/drawing/2014/main" id="{6DC7F9F0-2DEF-4CAE-BC7B-9E4C123832E7}"/>
               </a:ext>
             </a:extLst>
           </p:cNvPr>
@@ -4077,8 +5920,8 @@
         </p:nvSpPr>
         <p:spPr>
           <a:xfrm>
-            <a:off x="5180012" y="5424617"/>
-            <a:ext cx="6172200" cy="369332"/>
+            <a:off x="5183188" y="5940357"/>
+            <a:ext cx="6172200" cy="338554"/>
           </a:xfrm>
           <a:prstGeom prst="rect">
             <a:avLst/>
@@ -4093,7 +5936,7 @@
           <a:p>
             <a:pPr algn="ctr"/>
             <a:r>
-              <a:rPr kumimoji="0" lang="en-US" altLang="en-US" sz="1800" b="0" i="0" u="none" strike="noStrike" cap="none" normalizeH="0" baseline="0" dirty="0" err="1">
+              <a:rPr kumimoji="0" lang="en-US" altLang="en-US" sz="1600" b="0" i="0" u="none" strike="noStrike" cap="none" normalizeH="0" baseline="0" dirty="0" err="1">
                 <a:ln>
                   <a:noFill/>
                 </a:ln>
@@ -4101,11 +5944,13 @@
                   <a:schemeClr val="tx1"/>
                 </a:solidFill>
                 <a:effectLst/>
+                <a:latin typeface="Times New Roman" panose="02020603050405020304" pitchFamily="18" charset="0"/>
+                <a:cs typeface="Times New Roman" panose="02020603050405020304" pitchFamily="18" charset="0"/>
               </a:rPr>
               <a:t>Najčešće</a:t>
             </a:r>
             <a:r>
-              <a:rPr kumimoji="0" lang="en-US" altLang="en-US" sz="1800" b="0" i="0" u="none" strike="noStrike" cap="none" normalizeH="0" baseline="0" dirty="0">
+              <a:rPr kumimoji="0" lang="en-US" altLang="en-US" sz="1600" b="0" i="0" u="none" strike="noStrike" cap="none" normalizeH="0" baseline="0" dirty="0">
                 <a:ln>
                   <a:noFill/>
                 </a:ln>
@@ -4113,11 +5958,13 @@
                   <a:schemeClr val="tx1"/>
                 </a:solidFill>
                 <a:effectLst/>
+                <a:latin typeface="Times New Roman" panose="02020603050405020304" pitchFamily="18" charset="0"/>
+                <a:cs typeface="Times New Roman" panose="02020603050405020304" pitchFamily="18" charset="0"/>
               </a:rPr>
               <a:t> </a:t>
             </a:r>
             <a:r>
-              <a:rPr kumimoji="0" lang="en-US" altLang="en-US" sz="1800" b="0" i="0" u="none" strike="noStrike" cap="none" normalizeH="0" baseline="0" dirty="0" err="1">
+              <a:rPr kumimoji="0" lang="en-US" altLang="en-US" sz="1600" b="0" i="0" u="none" strike="noStrike" cap="none" normalizeH="0" baseline="0" dirty="0" err="1">
                 <a:ln>
                   <a:noFill/>
                 </a:ln>
@@ -4125,11 +5972,13 @@
                   <a:schemeClr val="tx1"/>
                 </a:solidFill>
                 <a:effectLst/>
+                <a:latin typeface="Times New Roman" panose="02020603050405020304" pitchFamily="18" charset="0"/>
+                <a:cs typeface="Times New Roman" panose="02020603050405020304" pitchFamily="18" charset="0"/>
               </a:rPr>
               <a:t>korištena</a:t>
             </a:r>
             <a:r>
-              <a:rPr kumimoji="0" lang="en-US" altLang="en-US" sz="1800" b="0" i="0" u="none" strike="noStrike" cap="none" normalizeH="0" baseline="0" dirty="0">
+              <a:rPr kumimoji="0" lang="en-US" altLang="en-US" sz="1600" b="0" i="0" u="none" strike="noStrike" cap="none" normalizeH="0" baseline="0" dirty="0">
                 <a:ln>
                   <a:noFill/>
                 </a:ln>
@@ -4137,11 +5986,13 @@
                   <a:schemeClr val="tx1"/>
                 </a:solidFill>
                 <a:effectLst/>
+                <a:latin typeface="Times New Roman" panose="02020603050405020304" pitchFamily="18" charset="0"/>
+                <a:cs typeface="Times New Roman" panose="02020603050405020304" pitchFamily="18" charset="0"/>
               </a:rPr>
               <a:t> </a:t>
             </a:r>
             <a:r>
-              <a:rPr kumimoji="0" lang="en-US" altLang="en-US" sz="1800" b="0" i="0" u="none" strike="noStrike" cap="none" normalizeH="0" baseline="0" dirty="0" err="1">
+              <a:rPr kumimoji="0" lang="en-US" altLang="en-US" sz="1600" b="0" i="0" u="none" strike="noStrike" cap="none" normalizeH="0" baseline="0" dirty="0" err="1">
                 <a:ln>
                   <a:noFill/>
                 </a:ln>
@@ -4149,11 +6000,13 @@
                   <a:schemeClr val="tx1"/>
                 </a:solidFill>
                 <a:effectLst/>
+                <a:latin typeface="Times New Roman" panose="02020603050405020304" pitchFamily="18" charset="0"/>
+                <a:cs typeface="Times New Roman" panose="02020603050405020304" pitchFamily="18" charset="0"/>
               </a:rPr>
               <a:t>okruženja</a:t>
             </a:r>
             <a:r>
-              <a:rPr kumimoji="0" lang="en-US" altLang="en-US" sz="1800" b="0" i="0" u="none" strike="noStrike" cap="none" normalizeH="0" baseline="0" dirty="0">
+              <a:rPr kumimoji="0" lang="en-US" altLang="en-US" sz="1600" b="0" i="0" u="none" strike="noStrike" cap="none" normalizeH="0" baseline="0" dirty="0">
                 <a:ln>
                   <a:noFill/>
                 </a:ln>
@@ -4161,11 +6014,13 @@
                   <a:schemeClr val="tx1"/>
                 </a:solidFill>
                 <a:effectLst/>
+                <a:latin typeface="Times New Roman" panose="02020603050405020304" pitchFamily="18" charset="0"/>
+                <a:cs typeface="Times New Roman" panose="02020603050405020304" pitchFamily="18" charset="0"/>
               </a:rPr>
               <a:t> za AI </a:t>
             </a:r>
             <a:r>
-              <a:rPr kumimoji="0" lang="en-US" altLang="en-US" sz="1800" b="0" i="0" u="none" strike="noStrike" cap="none" normalizeH="0" baseline="0" dirty="0" err="1">
+              <a:rPr kumimoji="0" lang="en-US" altLang="en-US" sz="1600" b="0" i="0" u="none" strike="noStrike" cap="none" normalizeH="0" baseline="0" dirty="0" err="1">
                 <a:ln>
                   <a:noFill/>
                 </a:ln>
@@ -4173,11 +6028,13 @@
                   <a:schemeClr val="tx1"/>
                 </a:solidFill>
                 <a:effectLst/>
+                <a:latin typeface="Times New Roman" panose="02020603050405020304" pitchFamily="18" charset="0"/>
+                <a:cs typeface="Times New Roman" panose="02020603050405020304" pitchFamily="18" charset="0"/>
               </a:rPr>
               <a:t>projekte</a:t>
             </a:r>
             <a:r>
-              <a:rPr kumimoji="0" lang="en-US" altLang="en-US" sz="1800" b="0" i="0" u="none" strike="noStrike" cap="none" normalizeH="0" baseline="0" dirty="0">
+              <a:rPr kumimoji="0" lang="en-US" altLang="en-US" sz="1600" b="0" i="0" u="none" strike="noStrike" cap="none" normalizeH="0" baseline="0" dirty="0">
                 <a:ln>
                   <a:noFill/>
                 </a:ln>
@@ -4185,8 +6042,45 @@
                   <a:schemeClr val="tx1"/>
                 </a:solidFill>
                 <a:effectLst/>
+                <a:latin typeface="Times New Roman" panose="02020603050405020304" pitchFamily="18" charset="0"/>
+                <a:cs typeface="Times New Roman" panose="02020603050405020304" pitchFamily="18" charset="0"/>
               </a:rPr>
-              <a:t> (GitHub 2025) </a:t>
+              <a:t> (</a:t>
+            </a:r>
+            <a:r>
+              <a:rPr lang="en-US" sz="1600" dirty="0">
+                <a:latin typeface="Times New Roman" panose="02020603050405020304" pitchFamily="18" charset="0"/>
+                <a:cs typeface="Times New Roman" panose="02020603050405020304" pitchFamily="18" charset="0"/>
+              </a:rPr>
+              <a:t>GitHub </a:t>
+            </a:r>
+            <a:r>
+              <a:rPr lang="en-US" sz="1600" dirty="0" err="1">
+                <a:latin typeface="Times New Roman" panose="02020603050405020304" pitchFamily="18" charset="0"/>
+                <a:cs typeface="Times New Roman" panose="02020603050405020304" pitchFamily="18" charset="0"/>
+              </a:rPr>
+              <a:t>Octoverse</a:t>
+            </a:r>
+            <a:r>
+              <a:rPr lang="en-US" sz="1600" dirty="0">
+                <a:latin typeface="Times New Roman" panose="02020603050405020304" pitchFamily="18" charset="0"/>
+                <a:cs typeface="Times New Roman" panose="02020603050405020304" pitchFamily="18" charset="0"/>
+              </a:rPr>
+              <a:t> 2025</a:t>
+            </a:r>
+            <a:r>
+              <a:rPr kumimoji="0" lang="en-US" altLang="en-US" sz="1600" b="0" i="0" u="none" strike="noStrike" cap="none" normalizeH="0" baseline="0" dirty="0">
+                <a:ln>
+                  <a:noFill/>
+                </a:ln>
+                <a:solidFill>
+                  <a:schemeClr val="tx1"/>
+                </a:solidFill>
+                <a:effectLst/>
+                <a:latin typeface="Times New Roman" panose="02020603050405020304" pitchFamily="18" charset="0"/>
+                <a:cs typeface="Times New Roman" panose="02020603050405020304" pitchFamily="18" charset="0"/>
+              </a:rPr>
+              <a:t>) </a:t>
             </a:r>
           </a:p>
         </p:txBody>
@@ -4194,7 +6088,7 @@
     </p:spTree>
     <p:extLst>
       <p:ext uri="{BB962C8B-B14F-4D97-AF65-F5344CB8AC3E}">
-        <p14:creationId xmlns:p14="http://schemas.microsoft.com/office/powerpoint/2010/main" val="4084039826"/>
+        <p14:creationId xmlns:p14="http://schemas.microsoft.com/office/powerpoint/2010/main" val="4204437042"/>
       </p:ext>
     </p:extLst>
   </p:cSld>
@@ -4276,24 +6170,214 @@
         </p:nvSpPr>
         <p:spPr/>
         <p:txBody>
-          <a:bodyPr/>
+          <a:bodyPr>
+            <a:normAutofit lnSpcReduction="10000"/>
+          </a:bodyPr>
           <a:lstStyle/>
           <a:p>
             <a:r>
+              <a:rPr lang="en-US" dirty="0" err="1"/>
+              <a:t>Poređenje</a:t>
+            </a:r>
+            <a:r>
+              <a:rPr lang="en-US" dirty="0"/>
+              <a:t> </a:t>
+            </a:r>
+            <a:r>
+              <a:rPr lang="en-US" dirty="0" err="1"/>
+              <a:t>ekosistema</a:t>
+            </a:r>
+            <a:r>
+              <a:rPr lang="en-US" dirty="0"/>
+              <a:t> </a:t>
+            </a:r>
+            <a:r>
+              <a:rPr lang="en-US" dirty="0" err="1"/>
+              <a:t>vrši</a:t>
+            </a:r>
+            <a:r>
+              <a:rPr lang="en-US" dirty="0"/>
+              <a:t> se </a:t>
+            </a:r>
+            <a:r>
+              <a:rPr lang="en-US" dirty="0" err="1"/>
+              <a:t>na</a:t>
+            </a:r>
+            <a:r>
+              <a:rPr lang="en-US" dirty="0"/>
+              <a:t> </a:t>
+            </a:r>
+            <a:r>
+              <a:rPr lang="en-US" dirty="0" err="1"/>
+              <a:t>praktičnom</a:t>
+            </a:r>
+            <a:r>
+              <a:rPr lang="en-US" dirty="0"/>
+              <a:t> </a:t>
+            </a:r>
+            <a:r>
+              <a:rPr lang="en-US" dirty="0" err="1"/>
+              <a:t>primjeru</a:t>
+            </a:r>
+            <a:r>
+              <a:rPr lang="en-US" dirty="0"/>
+              <a:t> — </a:t>
+            </a:r>
+            <a:r>
+              <a:rPr lang="en-US" dirty="0" err="1"/>
+              <a:t>detekciji</a:t>
+            </a:r>
+            <a:r>
+              <a:rPr lang="en-US" dirty="0"/>
+              <a:t> </a:t>
+            </a:r>
+            <a:r>
+              <a:rPr lang="en-US" dirty="0" err="1"/>
+              <a:t>raka</a:t>
+            </a:r>
+            <a:r>
+              <a:rPr lang="en-US" dirty="0"/>
+              <a:t> </a:t>
+            </a:r>
+            <a:r>
+              <a:rPr lang="en-US" dirty="0" err="1"/>
+              <a:t>pluća</a:t>
+            </a:r>
+            <a:r>
+              <a:rPr lang="en-US" dirty="0"/>
+              <a:t> </a:t>
+            </a:r>
+            <a:r>
+              <a:rPr lang="en-US" dirty="0" err="1"/>
+              <a:t>na</a:t>
+            </a:r>
+            <a:r>
+              <a:rPr lang="en-US" dirty="0"/>
+              <a:t> </a:t>
+            </a:r>
+            <a:r>
+              <a:rPr lang="en-US" dirty="0" err="1"/>
+              <a:t>javno</a:t>
+            </a:r>
+            <a:r>
+              <a:rPr lang="en-US" dirty="0"/>
+              <a:t> </a:t>
+            </a:r>
+            <a:r>
+              <a:rPr lang="en-US" dirty="0" err="1"/>
+              <a:t>dostupnim</a:t>
+            </a:r>
+            <a:r>
+              <a:rPr lang="en-US" dirty="0"/>
+              <a:t> </a:t>
+            </a:r>
+            <a:r>
+              <a:rPr lang="en-US" dirty="0" err="1"/>
+              <a:t>medicinskim</a:t>
+            </a:r>
+            <a:r>
+              <a:rPr lang="en-US" dirty="0"/>
+              <a:t> </a:t>
+            </a:r>
+            <a:r>
+              <a:rPr lang="en-US" dirty="0" err="1"/>
+              <a:t>podacima</a:t>
+            </a:r>
+            <a:r>
+              <a:rPr lang="en-US" dirty="0"/>
+              <a:t>.</a:t>
+            </a:r>
+          </a:p>
+          <a:p>
+            <a:r>
               <a:rPr lang="en-US" dirty="0"/>
               <a:t>Za </a:t>
             </a:r>
             <a:r>
               <a:rPr lang="en-US" dirty="0" err="1"/>
-              <a:t>analizu</a:t>
-            </a:r>
-            <a:r>
-              <a:rPr lang="en-US" dirty="0"/>
-              <a:t> </a:t>
-            </a:r>
-            <a:r>
-              <a:rPr lang="en-US" dirty="0" err="1"/>
-              <a:t>okruženja</a:t>
+              <a:t>detekciju</a:t>
+            </a:r>
+            <a:r>
+              <a:rPr lang="en-US" dirty="0"/>
+              <a:t> je </a:t>
+            </a:r>
+            <a:r>
+              <a:rPr lang="en-US" dirty="0" err="1"/>
+              <a:t>implementirana</a:t>
+            </a:r>
+            <a:r>
+              <a:rPr lang="en-US" dirty="0"/>
+              <a:t> </a:t>
+            </a:r>
+            <a:r>
+              <a:rPr lang="en-US" dirty="0" err="1"/>
+              <a:t>konvoluciona</a:t>
+            </a:r>
+            <a:r>
+              <a:rPr lang="en-US" dirty="0"/>
+              <a:t> </a:t>
+            </a:r>
+            <a:r>
+              <a:rPr lang="en-US" dirty="0" err="1"/>
+              <a:t>neuralna</a:t>
+            </a:r>
+            <a:r>
+              <a:rPr lang="en-US" dirty="0"/>
+              <a:t> </a:t>
+            </a:r>
+            <a:r>
+              <a:rPr lang="en-US" dirty="0" err="1"/>
+              <a:t>mreža</a:t>
+            </a:r>
+            <a:r>
+              <a:rPr lang="en-US" dirty="0"/>
+              <a:t> (CNN).</a:t>
+            </a:r>
+          </a:p>
+          <a:p>
+            <a:r>
+              <a:rPr lang="en-US" dirty="0" err="1"/>
+              <a:t>Evaluacija</a:t>
+            </a:r>
+            <a:r>
+              <a:rPr lang="en-US" dirty="0"/>
+              <a:t> se </a:t>
+            </a:r>
+            <a:r>
+              <a:rPr lang="en-US" dirty="0" err="1"/>
+              <a:t>vrši</a:t>
+            </a:r>
+            <a:r>
+              <a:rPr lang="en-US" dirty="0"/>
+              <a:t> </a:t>
+            </a:r>
+            <a:r>
+              <a:rPr lang="en-US" dirty="0" err="1"/>
+              <a:t>standardnim</a:t>
+            </a:r>
+            <a:r>
+              <a:rPr lang="en-US" dirty="0"/>
+              <a:t> </a:t>
+            </a:r>
+            <a:r>
+              <a:rPr lang="en-US" dirty="0" err="1"/>
+              <a:t>klasifikacijskim</a:t>
+            </a:r>
+            <a:r>
+              <a:rPr lang="en-US" dirty="0"/>
+              <a:t> </a:t>
+            </a:r>
+            <a:r>
+              <a:rPr lang="en-US" dirty="0" err="1"/>
+              <a:t>metrikama</a:t>
+            </a:r>
+            <a:r>
+              <a:rPr lang="en-US" dirty="0"/>
+              <a:t>: </a:t>
+            </a:r>
+            <a:r>
+              <a:rPr lang="en-US" dirty="0" err="1"/>
+              <a:t>tačnost</a:t>
             </a:r>
             <a:r>
               <a:rPr lang="en-US" dirty="0"/>
@@ -4301,113 +6385,55 @@
             </a:r>
             <a:r>
               <a:rPr lang="en-US" dirty="0" err="1"/>
-              <a:t>odabran</a:t>
-            </a:r>
-            <a:r>
-              <a:rPr lang="en-US" dirty="0"/>
-              <a:t> je problem </a:t>
-            </a:r>
-            <a:r>
-              <a:rPr lang="en-US" dirty="0" err="1"/>
-              <a:t>detekcija</a:t>
-            </a:r>
-            <a:r>
-              <a:rPr lang="en-US" dirty="0"/>
-              <a:t> </a:t>
-            </a:r>
-            <a:r>
-              <a:rPr lang="en-US" dirty="0" err="1"/>
-              <a:t>raka</a:t>
-            </a:r>
-            <a:r>
-              <a:rPr lang="en-US" dirty="0"/>
-              <a:t> </a:t>
-            </a:r>
-            <a:r>
-              <a:rPr lang="en-US" dirty="0" err="1"/>
-              <a:t>pluća</a:t>
-            </a:r>
-            <a:r>
-              <a:rPr lang="en-US" dirty="0"/>
-              <a:t> </a:t>
-            </a:r>
-            <a:r>
-              <a:rPr lang="en-US" dirty="0" err="1"/>
-              <a:t>primjenom</a:t>
-            </a:r>
-            <a:r>
-              <a:rPr lang="en-US" dirty="0"/>
-              <a:t> </a:t>
-            </a:r>
-            <a:r>
-              <a:rPr lang="en-US" dirty="0" err="1"/>
-              <a:t>konvolucionih</a:t>
-            </a:r>
-            <a:r>
-              <a:rPr lang="en-US" dirty="0"/>
-              <a:t> </a:t>
-            </a:r>
-            <a:r>
-              <a:rPr lang="en-US" dirty="0" err="1"/>
-              <a:t>neuronskih</a:t>
-            </a:r>
-            <a:r>
-              <a:rPr lang="en-US" dirty="0"/>
-              <a:t> </a:t>
-            </a:r>
-            <a:r>
-              <a:rPr lang="en-US" dirty="0" err="1"/>
-              <a:t>mreža</a:t>
-            </a:r>
-            <a:r>
-              <a:rPr lang="en-US" dirty="0"/>
-              <a:t> </a:t>
-            </a:r>
-            <a:r>
-              <a:rPr lang="en-US" dirty="0" err="1"/>
-              <a:t>nad</a:t>
-            </a:r>
-            <a:r>
-              <a:rPr lang="en-US" dirty="0"/>
-              <a:t> </a:t>
-            </a:r>
-            <a:r>
-              <a:rPr lang="en-US" dirty="0" err="1"/>
-              <a:t>javno</a:t>
-            </a:r>
-            <a:r>
-              <a:rPr lang="en-US" dirty="0"/>
-              <a:t> </a:t>
-            </a:r>
-            <a:r>
-              <a:rPr lang="en-US" dirty="0" err="1"/>
-              <a:t>dostupnim</a:t>
-            </a:r>
-            <a:r>
-              <a:rPr lang="en-US" dirty="0"/>
-              <a:t> </a:t>
-            </a:r>
-            <a:r>
-              <a:rPr lang="en-US" dirty="0" err="1"/>
-              <a:t>medicinskim</a:t>
-            </a:r>
-            <a:r>
-              <a:rPr lang="en-US" dirty="0"/>
-              <a:t> </a:t>
-            </a:r>
-            <a:r>
-              <a:rPr lang="en-US" dirty="0" err="1"/>
-              <a:t>podacima</a:t>
+              <a:t>preciznost</a:t>
+            </a:r>
+            <a:r>
+              <a:rPr lang="en-US" dirty="0"/>
+              <a:t>, </a:t>
+            </a:r>
+            <a:r>
+              <a:rPr lang="en-US" dirty="0" err="1"/>
+              <a:t>odziv</a:t>
+            </a:r>
+            <a:r>
+              <a:rPr lang="en-US" dirty="0"/>
+              <a:t> </a:t>
+            </a:r>
+            <a:r>
+              <a:rPr lang="en-US" dirty="0" err="1"/>
+              <a:t>i</a:t>
+            </a:r>
+            <a:r>
+              <a:rPr lang="en-US" dirty="0"/>
+              <a:t> F1 </a:t>
+            </a:r>
+            <a:r>
+              <a:rPr lang="en-US" dirty="0" err="1"/>
+              <a:t>mjera</a:t>
             </a:r>
             <a:r>
               <a:rPr lang="en-US" dirty="0"/>
               <a:t>. </a:t>
             </a:r>
-          </a:p>
-          <a:p>
-            <a:r>
-              <a:rPr lang="en-US" dirty="0" err="1"/>
-              <a:t>Metodologija</a:t>
+            <a:r>
+              <a:rPr lang="en-US" dirty="0" err="1"/>
+              <a:t>Dodatno</a:t>
+            </a:r>
+            <a:r>
+              <a:rPr lang="en-US" dirty="0"/>
+              <a:t> se </a:t>
+            </a:r>
+            <a:r>
+              <a:rPr lang="en-US" dirty="0" err="1"/>
+              <a:t>porede</a:t>
+            </a:r>
+            <a:r>
+              <a:rPr lang="en-US" dirty="0"/>
+              <a:t> </a:t>
+            </a:r>
+            <a:r>
+              <a:rPr lang="en-US" dirty="0" err="1"/>
+              <a:t>vrijeme</a:t>
             </a:r>
             <a:r>
               <a:rPr lang="en-US" dirty="0"/>
@@ -4423,302 +6449,25 @@
             </a:r>
             <a:r>
               <a:rPr lang="en-US" dirty="0" err="1"/>
-              <a:t>obuhvata</a:t>
-            </a:r>
-            <a:r>
-              <a:rPr lang="en-US" dirty="0"/>
-              <a:t> </a:t>
-            </a:r>
-            <a:r>
-              <a:rPr lang="en-US" dirty="0" err="1"/>
-              <a:t>implementaciju</a:t>
-            </a:r>
-            <a:r>
-              <a:rPr lang="en-US" dirty="0"/>
-              <a:t> </a:t>
-            </a:r>
-            <a:r>
-              <a:rPr lang="en-US" dirty="0" err="1"/>
-              <a:t>identične</a:t>
-            </a:r>
-            <a:r>
-              <a:rPr lang="en-US" dirty="0"/>
-              <a:t> </a:t>
-            </a:r>
-            <a:r>
-              <a:rPr lang="en-US" dirty="0" err="1"/>
-              <a:t>arhitekture</a:t>
-            </a:r>
-            <a:r>
-              <a:rPr lang="en-US" dirty="0"/>
-              <a:t> </a:t>
-            </a:r>
-            <a:r>
-              <a:rPr lang="en-US" dirty="0" err="1"/>
-              <a:t>neuronske</a:t>
-            </a:r>
-            <a:r>
-              <a:rPr lang="en-US" dirty="0"/>
-              <a:t> </a:t>
-            </a:r>
-            <a:r>
-              <a:rPr lang="en-US" dirty="0" err="1"/>
-              <a:t>mreže</a:t>
-            </a:r>
-            <a:r>
-              <a:rPr lang="en-US" dirty="0"/>
-              <a:t> u </a:t>
-            </a:r>
-            <a:r>
-              <a:rPr lang="en-US" dirty="0" err="1"/>
-              <a:t>oba</a:t>
-            </a:r>
-            <a:r>
-              <a:rPr lang="en-US" dirty="0"/>
-              <a:t> </a:t>
-            </a:r>
-            <a:r>
-              <a:rPr lang="en-US" dirty="0" err="1"/>
-              <a:t>okruženja</a:t>
-            </a:r>
-            <a:r>
-              <a:rPr lang="en-US" dirty="0"/>
-              <a:t>, </a:t>
-            </a:r>
-            <a:r>
-              <a:rPr lang="en-US" dirty="0" err="1"/>
-              <a:t>te</a:t>
-            </a:r>
-            <a:r>
-              <a:rPr lang="en-US" dirty="0"/>
-              <a:t> </a:t>
-            </a:r>
-            <a:r>
-              <a:rPr lang="en-US" dirty="0" err="1"/>
-              <a:t>treniranje</a:t>
-            </a:r>
-            <a:r>
-              <a:rPr lang="en-US" dirty="0"/>
-              <a:t> </a:t>
-            </a:r>
-            <a:r>
-              <a:rPr lang="en-US" dirty="0" err="1"/>
-              <a:t>mreže</a:t>
-            </a:r>
-            <a:r>
-              <a:rPr lang="en-US" dirty="0"/>
-              <a:t> </a:t>
-            </a:r>
-            <a:r>
-              <a:rPr lang="en-US" dirty="0" err="1"/>
-              <a:t>nad</a:t>
-            </a:r>
-            <a:r>
-              <a:rPr lang="en-US" dirty="0"/>
-              <a:t> </a:t>
-            </a:r>
-            <a:r>
-              <a:rPr lang="en-US" dirty="0" err="1"/>
-              <a:t>istim</a:t>
-            </a:r>
-            <a:r>
-              <a:rPr lang="en-US" dirty="0"/>
-              <a:t> </a:t>
-            </a:r>
-            <a:r>
-              <a:rPr lang="en-US" dirty="0" err="1"/>
-              <a:t>skupom</a:t>
-            </a:r>
-            <a:r>
-              <a:rPr lang="en-US" dirty="0"/>
-              <a:t> </a:t>
-            </a:r>
-            <a:r>
-              <a:rPr lang="en-US" dirty="0" err="1"/>
-              <a:t>podataka</a:t>
-            </a:r>
-            <a:r>
-              <a:rPr lang="en-US" dirty="0"/>
-              <a:t>. </a:t>
-            </a:r>
-          </a:p>
-          <a:p>
-            <a:r>
-              <a:rPr lang="en-US" dirty="0" err="1"/>
-              <a:t>Evaluacija</a:t>
-            </a:r>
-            <a:r>
-              <a:rPr lang="en-US" dirty="0"/>
-              <a:t> </a:t>
-            </a:r>
-            <a:r>
-              <a:rPr lang="en-US" dirty="0" err="1"/>
-              <a:t>okruženja</a:t>
-            </a:r>
-            <a:r>
-              <a:rPr lang="en-US" dirty="0"/>
-              <a:t> se </a:t>
-            </a:r>
-            <a:r>
-              <a:rPr lang="en-US" dirty="0" err="1"/>
-              <a:t>radi</a:t>
-            </a:r>
-            <a:r>
-              <a:rPr lang="en-US" dirty="0"/>
-              <a:t> </a:t>
-            </a:r>
-            <a:r>
-              <a:rPr lang="en-US" dirty="0" err="1"/>
-              <a:t>pomoću</a:t>
-            </a:r>
-            <a:r>
-              <a:rPr lang="en-US" dirty="0"/>
-              <a:t> </a:t>
-            </a:r>
-            <a:r>
-              <a:rPr lang="en-US" dirty="0" err="1"/>
-              <a:t>standardnih</a:t>
-            </a:r>
-            <a:r>
-              <a:rPr lang="en-US" dirty="0"/>
-              <a:t> </a:t>
-            </a:r>
-            <a:r>
-              <a:rPr lang="en-US" dirty="0" err="1"/>
-              <a:t>klasifikacijskih</a:t>
-            </a:r>
-            <a:r>
-              <a:rPr lang="en-US" dirty="0"/>
-              <a:t> </a:t>
-            </a:r>
-            <a:r>
-              <a:rPr lang="en-US" dirty="0" err="1"/>
-              <a:t>metrika</a:t>
-            </a:r>
-            <a:r>
-              <a:rPr lang="en-US" dirty="0"/>
-              <a:t> </a:t>
-            </a:r>
-            <a:r>
-              <a:rPr lang="en-US" dirty="0" err="1"/>
-              <a:t>poput</a:t>
-            </a:r>
-            <a:r>
-              <a:rPr lang="en-US" dirty="0"/>
-              <a:t> </a:t>
-            </a:r>
-            <a:r>
-              <a:rPr lang="en-US" dirty="0" err="1"/>
-              <a:t>tačnosti</a:t>
-            </a:r>
-            <a:r>
-              <a:rPr lang="en-US" dirty="0"/>
-              <a:t>, </a:t>
-            </a:r>
-            <a:r>
-              <a:rPr lang="en-US" dirty="0" err="1"/>
-              <a:t>odziva</a:t>
-            </a:r>
-            <a:r>
-              <a:rPr lang="en-US" dirty="0"/>
-              <a:t>, </a:t>
-            </a:r>
-            <a:r>
-              <a:rPr lang="en-US" dirty="0" err="1"/>
-              <a:t>preciznosti</a:t>
-            </a:r>
-            <a:r>
-              <a:rPr lang="en-US" dirty="0"/>
-              <a:t>, F1 </a:t>
-            </a:r>
-            <a:r>
-              <a:rPr lang="en-US" dirty="0" err="1"/>
-              <a:t>skora</a:t>
-            </a:r>
-            <a:r>
-              <a:rPr lang="en-US" dirty="0"/>
-              <a:t>, </a:t>
-            </a:r>
-            <a:r>
-              <a:rPr lang="en-US" dirty="0" err="1"/>
-              <a:t>vremena</a:t>
-            </a:r>
-            <a:r>
-              <a:rPr lang="en-US" dirty="0"/>
-              <a:t> </a:t>
-            </a:r>
-            <a:r>
-              <a:rPr lang="en-US" dirty="0" err="1"/>
-              <a:t>treniranja</a:t>
-            </a:r>
-            <a:r>
-              <a:rPr lang="en-US" dirty="0"/>
-              <a:t> </a:t>
-            </a:r>
-            <a:r>
-              <a:rPr lang="en-US" dirty="0" err="1"/>
-              <a:t>kao</a:t>
-            </a:r>
-            <a:r>
-              <a:rPr lang="en-US" dirty="0"/>
-              <a:t> I </a:t>
-            </a:r>
-            <a:r>
-              <a:rPr lang="en-US" dirty="0" err="1"/>
-              <a:t>efkikasnosti</a:t>
-            </a:r>
-            <a:r>
-              <a:rPr lang="en-US" dirty="0"/>
-              <a:t> </a:t>
-            </a:r>
-            <a:r>
-              <a:rPr lang="en-US" dirty="0" err="1"/>
-              <a:t>razvoja</a:t>
-            </a:r>
-            <a:r>
-              <a:rPr lang="en-US" dirty="0"/>
-              <a:t> I </a:t>
-            </a:r>
-            <a:r>
-              <a:rPr lang="en-US" dirty="0" err="1"/>
-              <a:t>podrške</a:t>
-            </a:r>
-            <a:r>
-              <a:rPr lang="en-US" dirty="0"/>
-              <a:t> za </a:t>
-            </a:r>
-            <a:r>
-              <a:rPr lang="en-US" dirty="0" err="1"/>
-              <a:t>mašinsko</a:t>
-            </a:r>
-            <a:r>
-              <a:rPr lang="en-US" dirty="0"/>
-              <a:t> </a:t>
-            </a:r>
-            <a:r>
-              <a:rPr lang="en-US" dirty="0" err="1"/>
-              <a:t>učenje</a:t>
-            </a:r>
-            <a:r>
-              <a:rPr lang="en-US" dirty="0"/>
-              <a:t> u </a:t>
-            </a:r>
-            <a:r>
-              <a:rPr lang="en-US" dirty="0" err="1"/>
-              <a:t>oba</a:t>
-            </a:r>
-            <a:r>
-              <a:rPr lang="en-US" dirty="0"/>
-              <a:t> </a:t>
-            </a:r>
-            <a:r>
-              <a:rPr lang="en-US" dirty="0" err="1"/>
-              <a:t>okruženja</a:t>
-            </a:r>
-            <a:r>
-              <a:rPr lang="en-US" dirty="0"/>
-              <a:t>.</a:t>
-            </a:r>
+              <a:t>i</a:t>
+            </a:r>
+            <a:r>
+              <a:rPr lang="en-US" dirty="0"/>
+              <a:t> </a:t>
+            </a:r>
+            <a:r>
+              <a:rPr lang="en-US" dirty="0" err="1"/>
+              <a:t>jednostavnost</a:t>
+            </a:r>
+            <a:r>
+              <a:rPr lang="en-US" dirty="0"/>
+              <a:t> </a:t>
+            </a:r>
+            <a:r>
+              <a:rPr lang="en-US" dirty="0" err="1"/>
+              <a:t>implementacije</a:t>
+            </a:r>
+            <a:endParaRPr lang="en-US" dirty="0"/>
           </a:p>
         </p:txBody>
       </p:sp>
@@ -4739,7 +6488,7 @@
           </p:nvPr>
         </p:nvPicPr>
         <p:blipFill>
-          <a:blip r:embed="rId2">
+          <a:blip r:embed="rId3">
             <a:extLst>
               <a:ext uri="{28A0092B-C50C-407E-A947-70E740481C1C}">
                 <a14:useLocalDpi xmlns:a14="http://schemas.microsoft.com/office/drawing/2010/main" val="0"/>
@@ -4794,7 +6543,7 @@
           <p:cNvPr id="2" name="Title 1">
             <a:extLst>
               <a:ext uri="{FF2B5EF4-FFF2-40B4-BE49-F238E27FC236}">
-                <a16:creationId xmlns:a16="http://schemas.microsoft.com/office/drawing/2014/main" id="{88385F22-80A3-4B4A-8821-FCD74188F0C0}"/>
+                <a16:creationId xmlns:a16="http://schemas.microsoft.com/office/drawing/2014/main" id="{0F666145-742D-4748-9401-149F1C80AAAB}"/>
               </a:ext>
             </a:extLst>
           </p:cNvPr>
@@ -4823,10 +6572,10 @@
       </p:sp>
       <p:sp>
         <p:nvSpPr>
-          <p:cNvPr id="3" name="Picture Placeholder 2">
+          <p:cNvPr id="3" name="Content Placeholder 2">
             <a:extLst>
               <a:ext uri="{FF2B5EF4-FFF2-40B4-BE49-F238E27FC236}">
-                <a16:creationId xmlns:a16="http://schemas.microsoft.com/office/drawing/2014/main" id="{113F1A3E-ADF7-4E5D-AD5B-B6CA8A17BA6D}"/>
+                <a16:creationId xmlns:a16="http://schemas.microsoft.com/office/drawing/2014/main" id="{6AD63760-CF12-426E-A02A-08EEC6E9C21A}"/>
               </a:ext>
             </a:extLst>
           </p:cNvPr>
@@ -4834,25 +6583,7 @@
             <a:spLocks noGrp="1"/>
           </p:cNvSpPr>
           <p:nvPr>
-            <p:ph type="pic" idx="1"/>
-          </p:nvPr>
-        </p:nvSpPr>
-        <p:spPr/>
-      </p:sp>
-      <p:sp>
-        <p:nvSpPr>
-          <p:cNvPr id="4" name="Text Placeholder 3">
-            <a:extLst>
-              <a:ext uri="{FF2B5EF4-FFF2-40B4-BE49-F238E27FC236}">
-                <a16:creationId xmlns:a16="http://schemas.microsoft.com/office/drawing/2014/main" id="{9E7C2E54-8542-4003-9633-9A2E1A93E3EC}"/>
-              </a:ext>
-            </a:extLst>
-          </p:cNvPr>
-          <p:cNvSpPr>
-            <a:spLocks noGrp="1"/>
-          </p:cNvSpPr>
-          <p:nvPr>
-            <p:ph type="body" sz="half" idx="2"/>
+            <p:ph idx="1"/>
           </p:nvPr>
         </p:nvSpPr>
         <p:spPr/>
@@ -4866,7 +6597,7 @@
             </a:r>
             <a:r>
               <a:rPr lang="en-US" dirty="0" err="1"/>
-              <a:t>implementacija</a:t>
+              <a:t>implementaciju</a:t>
             </a:r>
             <a:r>
               <a:rPr lang="en-US" dirty="0"/>
@@ -5186,7 +6917,15 @@
             </a:r>
             <a:r>
               <a:rPr lang="en-US" dirty="0"/>
-              <a:t> Python I .NET </a:t>
+              <a:t> Python </a:t>
+            </a:r>
+            <a:r>
+              <a:rPr lang="en-US" dirty="0" err="1"/>
+              <a:t>ili</a:t>
+            </a:r>
+            <a:r>
+              <a:rPr lang="en-US" dirty="0"/>
+              <a:t> .NET </a:t>
             </a:r>
             <a:r>
               <a:rPr lang="en-US" dirty="0" err="1"/>
@@ -5260,13 +6999,16 @@
               <a:rPr lang="en-US" dirty="0"/>
               <a:t>.</a:t>
             </a:r>
+          </a:p>
+          <a:p>
+            <a:endParaRPr lang="en-US" dirty="0"/>
           </a:p>
         </p:txBody>
       </p:sp>
     </p:spTree>
     <p:extLst>
       <p:ext uri="{BB962C8B-B14F-4D97-AF65-F5344CB8AC3E}">
-        <p14:creationId xmlns:p14="http://schemas.microsoft.com/office/powerpoint/2010/main" val="3650117464"/>
+        <p14:creationId xmlns:p14="http://schemas.microsoft.com/office/powerpoint/2010/main" val="1218492399"/>
       </p:ext>
     </p:extLst>
   </p:cSld>
@@ -5279,14 +7021,6 @@
 <file path=ppt/slides/slide5.xml><?xml version="1.0" encoding="utf-8"?>
 <p:sld xmlns:a="http://schemas.openxmlformats.org/drawingml/2006/main" xmlns:r="http://schemas.openxmlformats.org/officeDocument/2006/relationships" xmlns:p="http://schemas.openxmlformats.org/presentationml/2006/main">
   <p:cSld>
-    <p:bg>
-      <p:bgPr>
-        <a:solidFill>
-          <a:srgbClr val="F8FAFC"/>
-        </a:solidFill>
-        <a:effectLst/>
-      </p:bgPr>
-    </p:bg>
     <p:spTree>
       <p:nvGrpSpPr>
         <p:cNvPr id="1" name=""/>
@@ -5306,7 +7040,7 @@
           <p:cNvPr id="2" name="Title 1">
             <a:extLst>
               <a:ext uri="{FF2B5EF4-FFF2-40B4-BE49-F238E27FC236}">
-                <a16:creationId xmlns:a16="http://schemas.microsoft.com/office/drawing/2014/main" id="{D6B6A35C-F492-465D-B8E4-9484DDBCD272}"/>
+                <a16:creationId xmlns:a16="http://schemas.microsoft.com/office/drawing/2014/main" id="{A04CE29B-4DCC-472C-8716-0E42362021AB}"/>
               </a:ext>
             </a:extLst>
           </p:cNvPr>
@@ -5317,19 +7051,22 @@
             <p:ph type="title"/>
           </p:nvPr>
         </p:nvSpPr>
-        <p:spPr>
-          <a:xfrm>
-            <a:off x="839788" y="884342"/>
-            <a:ext cx="3932237" cy="614218"/>
-          </a:xfrm>
-        </p:spPr>
+        <p:spPr/>
         <p:txBody>
           <a:bodyPr/>
           <a:lstStyle/>
           <a:p>
             <a:r>
               <a:rPr lang="en-US" dirty="0" err="1"/>
-              <a:t>Arhitektura</a:t>
+              <a:t>Trening</a:t>
+            </a:r>
+            <a:r>
+              <a:rPr lang="en-US" dirty="0"/>
+              <a:t> </a:t>
+            </a:r>
+            <a:r>
+              <a:rPr lang="en-US" dirty="0" err="1"/>
+              <a:t>podaci</a:t>
             </a:r>
             <a:endParaRPr lang="en-US" dirty="0"/>
           </a:p>
@@ -5337,10 +7074,10 @@
       </p:sp>
       <p:sp>
         <p:nvSpPr>
-          <p:cNvPr id="4" name="Text Placeholder 3">
+          <p:cNvPr id="3" name="Content Placeholder 2">
             <a:extLst>
               <a:ext uri="{FF2B5EF4-FFF2-40B4-BE49-F238E27FC236}">
-                <a16:creationId xmlns:a16="http://schemas.microsoft.com/office/drawing/2014/main" id="{A90DC994-20B6-4350-BF13-D82EBFDEB572}"/>
+                <a16:creationId xmlns:a16="http://schemas.microsoft.com/office/drawing/2014/main" id="{1C549CA4-95EA-4E69-8738-C94E406BBF9B}"/>
               </a:ext>
             </a:extLst>
           </p:cNvPr>
@@ -5348,22 +7085,56 @@
             <a:spLocks noGrp="1"/>
           </p:cNvSpPr>
           <p:nvPr>
-            <p:ph type="body" sz="half" idx="2"/>
-          </p:nvPr>
-        </p:nvSpPr>
-        <p:spPr>
-          <a:xfrm>
-            <a:off x="839788" y="1865745"/>
-            <a:ext cx="3932237" cy="4003243"/>
-          </a:xfrm>
-        </p:spPr>
+            <p:ph idx="1"/>
+          </p:nvPr>
+        </p:nvSpPr>
+        <p:spPr/>
         <p:txBody>
           <a:bodyPr/>
           <a:lstStyle/>
           <a:p>
-            <a:r>
-              <a:rPr lang="en-US" dirty="0" err="1"/>
-              <a:t>Sistem</a:t>
+            <a:pPr marL="0" indent="0">
+              <a:buNone/>
+            </a:pPr>
+            <a:r>
+              <a:rPr lang="en-US" dirty="0"/>
+              <a:t>Za </a:t>
+            </a:r>
+            <a:r>
+              <a:rPr lang="en-US" dirty="0" err="1"/>
+              <a:t>treniranje</a:t>
+            </a:r>
+            <a:r>
+              <a:rPr lang="en-US" dirty="0"/>
+              <a:t> </a:t>
+            </a:r>
+            <a:r>
+              <a:rPr lang="en-US" dirty="0" err="1"/>
+              <a:t>konvolucione</a:t>
+            </a:r>
+            <a:r>
+              <a:rPr lang="en-US" dirty="0"/>
+              <a:t> </a:t>
+            </a:r>
+            <a:r>
+              <a:rPr lang="en-US" dirty="0" err="1"/>
+              <a:t>neuronske</a:t>
+            </a:r>
+            <a:r>
+              <a:rPr lang="en-US" dirty="0"/>
+              <a:t> </a:t>
+            </a:r>
+            <a:r>
+              <a:rPr lang="en-US" dirty="0" err="1"/>
+              <a:t>mreže</a:t>
+            </a:r>
+            <a:r>
+              <a:rPr lang="en-US" dirty="0"/>
+              <a:t> </a:t>
+            </a:r>
+            <a:r>
+              <a:rPr lang="en-US" dirty="0" err="1"/>
+              <a:t>korišten</a:t>
             </a:r>
             <a:r>
               <a:rPr lang="en-US" dirty="0"/>
@@ -5371,166 +7142,241 @@
             </a:r>
             <a:r>
               <a:rPr lang="en-US" dirty="0" err="1"/>
-              <a:t>organiziran</a:t>
-            </a:r>
-            <a:r>
-              <a:rPr lang="en-US" dirty="0"/>
-              <a:t> </a:t>
-            </a:r>
-            <a:r>
-              <a:rPr lang="en-US" dirty="0" err="1"/>
-              <a:t>uz</a:t>
-            </a:r>
-            <a:r>
-              <a:rPr lang="en-US" dirty="0"/>
-              <a:t> </a:t>
-            </a:r>
-            <a:r>
-              <a:rPr lang="en-US" dirty="0" err="1"/>
-              <a:t>pomo</a:t>
-            </a:r>
-            <a:r>
-              <a:rPr lang="bs-Latn-BA" dirty="0"/>
-              <a:t>ć .NET Aspire koji povezuje oba okruženja I web interfejs.</a:t>
-            </a:r>
-          </a:p>
-          <a:p>
-            <a:pPr marL="285750" indent="-285750">
-              <a:buFont typeface="Arial" panose="020B0604020202020204" pitchFamily="34" charset="0"/>
-              <a:buChar char="•"/>
+              <a:t>skup</a:t>
+            </a:r>
+            <a:r>
+              <a:rPr lang="en-US" dirty="0"/>
+              <a:t> </a:t>
+            </a:r>
+            <a:r>
+              <a:rPr lang="en-US" dirty="0" err="1"/>
+              <a:t>podataka</a:t>
+            </a:r>
+            <a:r>
+              <a:rPr lang="en-US" dirty="0"/>
+              <a:t> </a:t>
+            </a:r>
+            <a:r>
+              <a:rPr lang="en-US" dirty="0" err="1"/>
+              <a:t>sa</a:t>
+            </a:r>
+            <a:r>
+              <a:rPr lang="en-US" dirty="0"/>
+              <a:t> </a:t>
+            </a:r>
+            <a:r>
+              <a:rPr lang="en-US" dirty="0" err="1"/>
+              <a:t>stranica</a:t>
+            </a:r>
+            <a:r>
+              <a:rPr lang="en-US" dirty="0"/>
+              <a:t> Kaggle IQ-OTH/NCCD(</a:t>
+            </a:r>
+            <a:r>
+              <a:rPr lang="en-US" dirty="0" err="1"/>
+              <a:t>eng.</a:t>
+            </a:r>
+            <a:r>
+              <a:rPr lang="en-US" dirty="0"/>
+              <a:t> </a:t>
+            </a:r>
+            <a:r>
+              <a:rPr lang="hr-HR" i="1" dirty="0">
+                <a:effectLst/>
+                <a:latin typeface="Times New Roman" panose="02020603050405020304" pitchFamily="18" charset="0"/>
+                <a:ea typeface="Calibri" panose="020F0502020204030204" pitchFamily="34" charset="0"/>
+              </a:rPr>
+              <a:t>Iraq-Oncology Teaching Hospital</a:t>
+            </a:r>
+            <a:r>
+              <a:rPr lang="en-GB" i="1" dirty="0">
+                <a:effectLst/>
+                <a:latin typeface="Times New Roman" panose="02020603050405020304" pitchFamily="18" charset="0"/>
+                <a:ea typeface="Calibri" panose="020F0502020204030204" pitchFamily="34" charset="0"/>
+              </a:rPr>
+              <a:t>/National </a:t>
+            </a:r>
+            <a:r>
+              <a:rPr lang="en-GB" i="1" dirty="0" err="1">
+                <a:effectLst/>
+                <a:latin typeface="Times New Roman" panose="02020603050405020304" pitchFamily="18" charset="0"/>
+                <a:ea typeface="Calibri" panose="020F0502020204030204" pitchFamily="34" charset="0"/>
+              </a:rPr>
+              <a:t>Center</a:t>
+            </a:r>
+            <a:r>
+              <a:rPr lang="en-GB" i="1" dirty="0">
+                <a:effectLst/>
+                <a:latin typeface="Times New Roman" panose="02020603050405020304" pitchFamily="18" charset="0"/>
+                <a:ea typeface="Calibri" panose="020F0502020204030204" pitchFamily="34" charset="0"/>
+              </a:rPr>
+              <a:t> for Cancer Diseases).</a:t>
+            </a:r>
+          </a:p>
+          <a:p>
+            <a:pPr marL="0" indent="0">
+              <a:buNone/>
             </a:pPr>
             <a:r>
-              <a:rPr lang="bs-Latn-BA" dirty="0"/>
-              <a:t>C# Web Api</a:t>
-            </a:r>
-            <a:r>
-              <a:rPr lang="en-US" dirty="0"/>
-              <a:t>(</a:t>
-            </a:r>
-            <a:r>
-              <a:rPr lang="en-US" dirty="0" err="1"/>
-              <a:t>apiservice</a:t>
-            </a:r>
-            <a:r>
-              <a:rPr lang="en-US" dirty="0"/>
-              <a:t>): </a:t>
-            </a:r>
-            <a:r>
-              <a:rPr lang="de-DE" dirty="0"/>
-              <a:t>Slu</a:t>
-            </a:r>
-            <a:r>
-              <a:rPr lang="bs-Latn-BA" dirty="0"/>
-              <a:t>ži za treniranje C# modela, analizu te sačuvanju podataka u SQLite bazu podataka</a:t>
-            </a:r>
-            <a:endParaRPr lang="en-US" dirty="0"/>
-          </a:p>
-          <a:p>
-            <a:pPr marL="285750" indent="-285750">
-              <a:buFont typeface="Arial" panose="020B0604020202020204" pitchFamily="34" charset="0"/>
-              <a:buChar char="•"/>
-            </a:pPr>
-            <a:r>
-              <a:rPr lang="bs-Latn-BA" dirty="0"/>
-              <a:t>Python Fast API</a:t>
-            </a:r>
-            <a:r>
-              <a:rPr lang="en-US" dirty="0"/>
-              <a:t>(python-</a:t>
-            </a:r>
-            <a:r>
-              <a:rPr lang="en-US" dirty="0" err="1"/>
-              <a:t>api</a:t>
-            </a:r>
-            <a:r>
-              <a:rPr lang="en-US" dirty="0"/>
-              <a:t>)</a:t>
-            </a:r>
-            <a:r>
-              <a:rPr lang="bs-Latn-BA" dirty="0"/>
-              <a:t>: Služi za treniranje Python modela </a:t>
-            </a:r>
-            <a:endParaRPr lang="en-US" dirty="0"/>
-          </a:p>
-          <a:p>
-            <a:pPr marL="285750" indent="-285750">
-              <a:buFont typeface="Arial" panose="020B0604020202020204" pitchFamily="34" charset="0"/>
-              <a:buChar char="•"/>
-            </a:pPr>
-            <a:r>
-              <a:rPr lang="en-US" dirty="0" err="1"/>
-              <a:t>Blazor</a:t>
-            </a:r>
-            <a:r>
-              <a:rPr lang="en-US" dirty="0"/>
-              <a:t> Server(</a:t>
-            </a:r>
-            <a:r>
-              <a:rPr lang="en-US" dirty="0" err="1"/>
-              <a:t>webfrontend</a:t>
-            </a:r>
-            <a:r>
-              <a:rPr lang="en-US" dirty="0"/>
-              <a:t>)</a:t>
-            </a:r>
-            <a:r>
-              <a:rPr lang="bs-Latn-BA" dirty="0"/>
-              <a:t>: Služi za prikaz UI aplikacije te mogućnost treniranja novih modela, analizu uz postojeće modele, pregled i brisanje te uporedba performansi modela</a:t>
-            </a:r>
-            <a:endParaRPr lang="en-US" dirty="0"/>
-          </a:p>
-          <a:p>
-            <a:pPr marL="285750" indent="-285750">
-              <a:buFont typeface="Arial" panose="020B0604020202020204" pitchFamily="34" charset="0"/>
-              <a:buChar char="•"/>
-            </a:pPr>
-            <a:endParaRPr lang="bs-Latn-BA" dirty="0"/>
-          </a:p>
-          <a:p>
-            <a:pPr marL="285750" indent="-285750">
+              <a:rPr lang="en-US" dirty="0" err="1"/>
+              <a:t>Skup</a:t>
+            </a:r>
+            <a:r>
+              <a:rPr lang="en-US" dirty="0"/>
+              <a:t> </a:t>
+            </a:r>
+            <a:r>
+              <a:rPr lang="en-US" dirty="0" err="1"/>
+              <a:t>podataka</a:t>
+            </a:r>
+            <a:r>
+              <a:rPr lang="en-US" dirty="0"/>
+              <a:t> </a:t>
+            </a:r>
+            <a:r>
+              <a:rPr lang="en-US" dirty="0" err="1"/>
+              <a:t>sadrži</a:t>
+            </a:r>
+            <a:r>
+              <a:rPr lang="en-US" dirty="0"/>
+              <a:t> 110 </a:t>
+            </a:r>
+            <a:r>
+              <a:rPr lang="en-US" dirty="0" err="1"/>
+              <a:t>slučajeva</a:t>
+            </a:r>
+            <a:r>
+              <a:rPr lang="en-US" dirty="0"/>
+              <a:t>, </a:t>
+            </a:r>
+            <a:r>
+              <a:rPr lang="en-US" dirty="0" err="1"/>
+              <a:t>iz</a:t>
+            </a:r>
+            <a:r>
+              <a:rPr lang="en-US" dirty="0"/>
+              <a:t> </a:t>
+            </a:r>
+            <a:r>
+              <a:rPr lang="en-US" dirty="0" err="1"/>
+              <a:t>kojih</a:t>
+            </a:r>
+            <a:r>
+              <a:rPr lang="en-US" dirty="0"/>
+              <a:t> je </a:t>
+            </a:r>
+            <a:r>
+              <a:rPr lang="en-US" dirty="0" err="1"/>
+              <a:t>izdvojeno</a:t>
+            </a:r>
+            <a:r>
+              <a:rPr lang="en-US" dirty="0"/>
+              <a:t> 1190 </a:t>
+            </a:r>
+            <a:r>
+              <a:rPr lang="en-US" dirty="0" err="1"/>
+              <a:t>slika</a:t>
+            </a:r>
+            <a:r>
+              <a:rPr lang="en-US" dirty="0"/>
+              <a:t>, </a:t>
+            </a:r>
+            <a:r>
+              <a:rPr lang="en-US" dirty="0" err="1"/>
+              <a:t>koje</a:t>
+            </a:r>
+            <a:r>
+              <a:rPr lang="en-US" dirty="0"/>
+              <a:t> </a:t>
+            </a:r>
+            <a:r>
+              <a:rPr lang="en-US" dirty="0" err="1"/>
+              <a:t>su</a:t>
+            </a:r>
+            <a:r>
+              <a:rPr lang="en-US" dirty="0"/>
+              <a:t> </a:t>
+            </a:r>
+            <a:r>
+              <a:rPr lang="en-US" dirty="0" err="1"/>
+              <a:t>grupisane</a:t>
+            </a:r>
+            <a:r>
+              <a:rPr lang="en-US" dirty="0"/>
+              <a:t> u 3 </a:t>
+            </a:r>
+            <a:r>
+              <a:rPr lang="en-US" dirty="0" err="1"/>
+              <a:t>klase</a:t>
+            </a:r>
+            <a:r>
+              <a:rPr lang="en-US" dirty="0"/>
+              <a:t>:</a:t>
+            </a:r>
+          </a:p>
+          <a:p>
+            <a:pPr>
               <a:buFontTx/>
               <a:buChar char="-"/>
             </a:pPr>
-            <a:endParaRPr lang="bs-Latn-BA" dirty="0"/>
-          </a:p>
-        </p:txBody>
-      </p:sp>
-      <p:pic>
-        <p:nvPicPr>
-          <p:cNvPr id="6" name="Picture 5">
-            <a:extLst>
-              <a:ext uri="{FF2B5EF4-FFF2-40B4-BE49-F238E27FC236}">
-                <a16:creationId xmlns:a16="http://schemas.microsoft.com/office/drawing/2014/main" id="{85A52407-54AF-40F2-A8D1-D2733E61C169}"/>
-              </a:ext>
-            </a:extLst>
-          </p:cNvPr>
-          <p:cNvPicPr>
-            <a:picLocks noChangeAspect="1"/>
-          </p:cNvPicPr>
-          <p:nvPr/>
-        </p:nvPicPr>
-        <p:blipFill>
-          <a:blip r:embed="rId2"/>
-          <a:stretch>
-            <a:fillRect/>
-          </a:stretch>
-        </p:blipFill>
-        <p:spPr>
-          <a:xfrm>
-            <a:off x="4772025" y="884342"/>
-            <a:ext cx="6735115" cy="4706007"/>
-          </a:xfrm>
-          <a:prstGeom prst="roundRect">
-            <a:avLst>
-              <a:gd name="adj" fmla="val 9209"/>
-            </a:avLst>
-          </a:prstGeom>
-        </p:spPr>
-      </p:pic>
+            <a:r>
+              <a:rPr lang="en-US" dirty="0" err="1"/>
+              <a:t>Maligno</a:t>
+            </a:r>
+            <a:r>
+              <a:rPr lang="en-US" dirty="0"/>
+              <a:t>: 40 </a:t>
+            </a:r>
+            <a:r>
+              <a:rPr lang="en-US" dirty="0" err="1"/>
+              <a:t>slučajeva</a:t>
+            </a:r>
+            <a:endParaRPr lang="en-US" dirty="0"/>
+          </a:p>
+          <a:p>
+            <a:pPr>
+              <a:buFontTx/>
+              <a:buChar char="-"/>
+            </a:pPr>
+            <a:r>
+              <a:rPr lang="en-US" dirty="0" err="1"/>
+              <a:t>Benigno</a:t>
+            </a:r>
+            <a:r>
+              <a:rPr lang="en-US" dirty="0"/>
+              <a:t>: 15 </a:t>
+            </a:r>
+            <a:r>
+              <a:rPr lang="en-US" dirty="0" err="1"/>
+              <a:t>slučajeva</a:t>
+            </a:r>
+            <a:endParaRPr lang="en-US" dirty="0"/>
+          </a:p>
+          <a:p>
+            <a:pPr>
+              <a:buFontTx/>
+              <a:buChar char="-"/>
+            </a:pPr>
+            <a:r>
+              <a:rPr lang="en-US" dirty="0" err="1"/>
+              <a:t>Normalno</a:t>
+            </a:r>
+            <a:r>
+              <a:rPr lang="en-US" dirty="0"/>
+              <a:t>: 55 </a:t>
+            </a:r>
+            <a:r>
+              <a:rPr lang="en-US" dirty="0" err="1"/>
+              <a:t>slučajeva</a:t>
+            </a:r>
+            <a:endParaRPr lang="en-US" dirty="0"/>
+          </a:p>
+        </p:txBody>
+      </p:sp>
     </p:spTree>
     <p:extLst>
       <p:ext uri="{BB962C8B-B14F-4D97-AF65-F5344CB8AC3E}">
-        <p14:creationId xmlns:p14="http://schemas.microsoft.com/office/powerpoint/2010/main" val="2405284989"/>
+        <p14:creationId xmlns:p14="http://schemas.microsoft.com/office/powerpoint/2010/main" val="2413054177"/>
       </p:ext>
     </p:extLst>
   </p:cSld>
@@ -5562,7 +7408,7 @@
           <p:cNvPr id="2" name="Title 1">
             <a:extLst>
               <a:ext uri="{FF2B5EF4-FFF2-40B4-BE49-F238E27FC236}">
-                <a16:creationId xmlns:a16="http://schemas.microsoft.com/office/drawing/2014/main" id="{4DF58A7F-1010-491C-BFF6-2A903462207D}"/>
+                <a16:creationId xmlns:a16="http://schemas.microsoft.com/office/drawing/2014/main" id="{C0A2994B-8B2B-4805-ADBB-2737DB2F4E3C}"/>
               </a:ext>
             </a:extLst>
           </p:cNvPr>
@@ -5573,37 +7419,19 @@
             <p:ph type="title"/>
           </p:nvPr>
         </p:nvSpPr>
-        <p:spPr>
-          <a:xfrm>
-            <a:off x="839788" y="457200"/>
-            <a:ext cx="4610753" cy="1600200"/>
-          </a:xfrm>
-        </p:spPr>
+        <p:spPr/>
         <p:txBody>
           <a:bodyPr/>
           <a:lstStyle/>
           <a:p>
             <a:r>
               <a:rPr lang="en-US" dirty="0" err="1"/>
-              <a:t>Uporedba</a:t>
-            </a:r>
-            <a:r>
-              <a:rPr lang="en-US" dirty="0"/>
-              <a:t> </a:t>
-            </a:r>
-            <a:r>
-              <a:rPr lang="en-US" dirty="0" err="1"/>
-              <a:t>rezultata</a:t>
-            </a:r>
-            <a:r>
-              <a:rPr lang="en-US" dirty="0"/>
-              <a:t>: </a:t>
-            </a:r>
-            <a:r>
-              <a:rPr lang="en-US" dirty="0" err="1"/>
-              <a:t>Odziv</a:t>
-            </a:r>
-            <a:endParaRPr lang="en-US" dirty="0"/>
+              <a:t>Arhitektura</a:t>
+            </a:r>
+            <a:r>
+              <a:rPr lang="en-US" dirty="0"/>
+              <a:t> CNN	</a:t>
+            </a:r>
           </a:p>
         </p:txBody>
       </p:sp>
@@ -5612,7 +7440,7 @@
           <p:cNvPr id="3" name="Content Placeholder 2">
             <a:extLst>
               <a:ext uri="{FF2B5EF4-FFF2-40B4-BE49-F238E27FC236}">
-                <a16:creationId xmlns:a16="http://schemas.microsoft.com/office/drawing/2014/main" id="{38FCEF3B-39E0-42A6-8CA7-9A6660D2F220}"/>
+                <a16:creationId xmlns:a16="http://schemas.microsoft.com/office/drawing/2014/main" id="{7596351B-9930-4AAD-8CF3-F9E9D24CAEA3}"/>
               </a:ext>
             </a:extLst>
           </p:cNvPr>
@@ -5623,461 +7451,86 @@
             <p:ph idx="1"/>
           </p:nvPr>
         </p:nvSpPr>
-        <p:spPr>
-          <a:xfrm>
-            <a:off x="5585012" y="987425"/>
-            <a:ext cx="5770376" cy="4873625"/>
-          </a:xfrm>
-        </p:spPr>
+        <p:spPr/>
         <p:txBody>
           <a:bodyPr/>
           <a:lstStyle/>
           <a:p>
-            <a:endParaRPr lang="en-US" dirty="0"/>
-          </a:p>
-        </p:txBody>
-      </p:sp>
-      <mc:AlternateContent xmlns:mc="http://schemas.openxmlformats.org/markup-compatibility/2006" xmlns:a14="http://schemas.microsoft.com/office/drawing/2010/main">
-        <mc:Choice Requires="a14">
-          <p:sp>
-            <p:nvSpPr>
-              <p:cNvPr id="4" name="Text Placeholder 3">
-                <a:extLst>
-                  <a:ext uri="{FF2B5EF4-FFF2-40B4-BE49-F238E27FC236}">
-                    <a16:creationId xmlns:a16="http://schemas.microsoft.com/office/drawing/2014/main" id="{D1015D11-8193-46C8-9F1E-A086BF9A93F7}"/>
-                  </a:ext>
-                </a:extLst>
-              </p:cNvPr>
-              <p:cNvSpPr>
-                <a:spLocks noGrp="1"/>
-              </p:cNvSpPr>
-              <p:nvPr>
-                <p:ph type="body" sz="half" idx="2"/>
-              </p:nvPr>
-            </p:nvSpPr>
-            <p:spPr>
-              <a:xfrm>
-                <a:off x="839788" y="2057400"/>
-                <a:ext cx="4610753" cy="3811588"/>
-              </a:xfrm>
-            </p:spPr>
-            <p:txBody>
-              <a:bodyPr/>
-              <a:lstStyle/>
-              <a:p>
-                <a:r>
-                  <a:rPr lang="en-US" b="1" dirty="0" err="1"/>
-                  <a:t>Odziv</a:t>
-                </a:r>
-                <a:r>
-                  <a:rPr lang="en-US" b="1" dirty="0"/>
-                  <a:t> / </a:t>
-                </a:r>
-                <a:r>
-                  <a:rPr lang="en-US" b="1" dirty="0" err="1"/>
-                  <a:t>Osjetljivost</a:t>
-                </a:r>
-                <a:r>
-                  <a:rPr lang="en-US" b="1" dirty="0"/>
-                  <a:t> (Recall):</a:t>
-                </a:r>
-                <a:r>
-                  <a:rPr lang="en-US" dirty="0"/>
-                  <a:t> </a:t>
-                </a:r>
-                <a:r>
-                  <a:rPr lang="en-US" dirty="0" err="1"/>
-                  <a:t>Najvažnija</a:t>
-                </a:r>
-                <a:r>
-                  <a:rPr lang="en-US" dirty="0"/>
-                  <a:t> </a:t>
-                </a:r>
-                <a:r>
-                  <a:rPr lang="en-US" dirty="0" err="1"/>
-                  <a:t>metrika</a:t>
-                </a:r>
-                <a:r>
-                  <a:rPr lang="en-US" dirty="0"/>
-                  <a:t> u </a:t>
-                </a:r>
-                <a:r>
-                  <a:rPr lang="en-US" dirty="0" err="1"/>
-                  <a:t>medicinskoj</a:t>
-                </a:r>
-                <a:r>
-                  <a:rPr lang="en-US" dirty="0"/>
-                  <a:t> </a:t>
-                </a:r>
-                <a:r>
-                  <a:rPr lang="en-US" dirty="0" err="1"/>
-                  <a:t>dijagnostici</a:t>
-                </a:r>
-                <a:r>
-                  <a:rPr lang="en-US" dirty="0"/>
-                  <a:t>. </a:t>
-                </a:r>
-                <a:r>
-                  <a:rPr lang="en-US" dirty="0" err="1"/>
-                  <a:t>Mjeri</a:t>
-                </a:r>
-                <a:r>
-                  <a:rPr lang="en-US" dirty="0"/>
-                  <a:t> </a:t>
-                </a:r>
-                <a:r>
-                  <a:rPr lang="en-US" dirty="0" err="1"/>
-                  <a:t>procenat</a:t>
-                </a:r>
-                <a:r>
-                  <a:rPr lang="en-US" dirty="0"/>
-                  <a:t> </a:t>
-                </a:r>
-                <a:r>
-                  <a:rPr lang="en-US" dirty="0" err="1"/>
-                  <a:t>stvarnih</a:t>
-                </a:r>
-                <a:r>
-                  <a:rPr lang="en-US" dirty="0"/>
-                  <a:t> </a:t>
-                </a:r>
-                <a:r>
-                  <a:rPr lang="en-US" dirty="0" err="1"/>
-                  <a:t>slučajeva</a:t>
-                </a:r>
-                <a:r>
-                  <a:rPr lang="en-US" dirty="0"/>
-                  <a:t> </a:t>
-                </a:r>
-                <a:r>
-                  <a:rPr lang="en-US" dirty="0" err="1"/>
-                  <a:t>raka</a:t>
-                </a:r>
-                <a:r>
-                  <a:rPr lang="en-US" dirty="0"/>
-                  <a:t> </a:t>
-                </a:r>
-                <a:r>
-                  <a:rPr lang="en-US" dirty="0" err="1"/>
-                  <a:t>koje</a:t>
-                </a:r>
-                <a:r>
-                  <a:rPr lang="en-US" dirty="0"/>
-                  <a:t> je model </a:t>
-                </a:r>
-                <a:r>
-                  <a:rPr lang="en-US" dirty="0" err="1"/>
-                  <a:t>uspješno</a:t>
-                </a:r>
-                <a:r>
-                  <a:rPr lang="en-US" dirty="0"/>
-                  <a:t> </a:t>
-                </a:r>
-                <a:r>
-                  <a:rPr lang="en-US" dirty="0" err="1"/>
-                  <a:t>pronašao</a:t>
-                </a:r>
-                <a:r>
-                  <a:rPr lang="en-US" dirty="0"/>
-                  <a:t>. </a:t>
-                </a:r>
-                <a:r>
-                  <a:rPr lang="en-US" dirty="0" err="1"/>
-                  <a:t>Cilj</a:t>
-                </a:r>
-                <a:r>
-                  <a:rPr lang="en-US" dirty="0"/>
-                  <a:t> je </a:t>
-                </a:r>
-                <a:r>
-                  <a:rPr lang="en-US" dirty="0" err="1"/>
-                  <a:t>minimizirati</a:t>
-                </a:r>
-                <a:r>
-                  <a:rPr lang="en-US" dirty="0"/>
-                  <a:t> </a:t>
-                </a:r>
-                <a:r>
-                  <a:rPr lang="en-US" dirty="0" err="1"/>
-                  <a:t>lažno</a:t>
-                </a:r>
-                <a:r>
-                  <a:rPr lang="en-US" dirty="0"/>
-                  <a:t> </a:t>
-                </a:r>
-                <a:r>
-                  <a:rPr lang="en-US" dirty="0" err="1"/>
-                  <a:t>negativne</a:t>
-                </a:r>
-                <a:r>
-                  <a:rPr lang="en-US" dirty="0"/>
-                  <a:t> </a:t>
-                </a:r>
-                <a:r>
-                  <a:rPr lang="en-US" dirty="0" err="1"/>
-                  <a:t>rezultate</a:t>
-                </a:r>
-                <a:r>
-                  <a:rPr lang="en-US" dirty="0"/>
-                  <a:t> (</a:t>
-                </a:r>
-                <a:r>
-                  <a:rPr lang="en-US" dirty="0" err="1"/>
-                  <a:t>propuštene</a:t>
-                </a:r>
-                <a:r>
-                  <a:rPr lang="en-US" dirty="0"/>
-                  <a:t> </a:t>
-                </a:r>
-                <a:r>
-                  <a:rPr lang="en-US" dirty="0" err="1"/>
-                  <a:t>dijagnoze</a:t>
-                </a:r>
-                <a:r>
-                  <a:rPr lang="en-US" dirty="0"/>
-                  <a:t>).</a:t>
-                </a:r>
-              </a:p>
-              <a:p>
-                <a:endParaRPr lang="en-US" dirty="0"/>
-              </a:p>
-              <a:p>
-                <a:r>
-                  <a:rPr lang="en-US" dirty="0" err="1"/>
-                  <a:t>Odziv</a:t>
-                </a:r>
-                <a:r>
-                  <a:rPr lang="en-US" dirty="0"/>
-                  <a:t> </a:t>
-                </a:r>
-                <a14:m>
-                  <m:oMath xmlns:m="http://schemas.openxmlformats.org/officeDocument/2006/math">
-                    <m:r>
-                      <a:rPr lang="en-US" i="1" smtClean="0">
-                        <a:latin typeface="Cambria Math" panose="02040503050406030204" pitchFamily="18" charset="0"/>
-                      </a:rPr>
-                      <m:t>=</m:t>
-                    </m:r>
-                    <m:r>
-                      <a:rPr lang="el-GR" i="1" smtClean="0">
-                        <a:latin typeface="Cambria Math" panose="02040503050406030204" pitchFamily="18" charset="0"/>
-                      </a:rPr>
-                      <m:t>𝜋</m:t>
-                    </m:r>
-                    <m:sSup>
-                      <m:sSupPr>
-                        <m:ctrlPr>
-                          <a:rPr lang="en-US" i="1" smtClean="0">
-                            <a:latin typeface="Cambria Math" panose="02040503050406030204" pitchFamily="18" charset="0"/>
-                          </a:rPr>
-                        </m:ctrlPr>
-                      </m:sSupPr>
-                      <m:e>
-                        <m:r>
-                          <a:rPr lang="en-US" i="1" smtClean="0">
-                            <a:latin typeface="Cambria Math" panose="02040503050406030204" pitchFamily="18" charset="0"/>
-                          </a:rPr>
-                          <m:t>𝑟</m:t>
-                        </m:r>
-                      </m:e>
-                      <m:sup>
-                        <m:r>
-                          <a:rPr lang="en-US" i="1" smtClean="0">
-                            <a:latin typeface="Cambria Math" panose="02040503050406030204" pitchFamily="18" charset="0"/>
-                          </a:rPr>
-                          <m:t>2</m:t>
-                        </m:r>
-                      </m:sup>
-                    </m:sSup>
-                  </m:oMath>
-                </a14:m>
-                <a:endParaRPr lang="en-US" dirty="0"/>
-              </a:p>
-            </p:txBody>
-          </p:sp>
-        </mc:Choice>
-        <mc:Fallback xmlns="">
-          <p:sp>
-            <p:nvSpPr>
-              <p:cNvPr id="4" name="Text Placeholder 3">
-                <a:extLst>
-                  <a:ext uri="{FF2B5EF4-FFF2-40B4-BE49-F238E27FC236}">
-                    <a16:creationId xmlns:a16="http://schemas.microsoft.com/office/drawing/2014/main" id="{D1015D11-8193-46C8-9F1E-A086BF9A93F7}"/>
-                  </a:ext>
-                </a:extLst>
-              </p:cNvPr>
-              <p:cNvSpPr>
-                <a:spLocks noGrp="1" noRot="1" noChangeAspect="1" noMove="1" noResize="1" noEditPoints="1" noAdjustHandles="1" noChangeArrowheads="1" noChangeShapeType="1" noTextEdit="1"/>
-              </p:cNvSpPr>
-              <p:nvPr>
-                <p:ph type="body" sz="half" idx="2"/>
-              </p:nvPr>
-            </p:nvSpPr>
-            <p:spPr>
-              <a:xfrm>
-                <a:off x="839788" y="2057400"/>
-                <a:ext cx="4610753" cy="3811588"/>
-              </a:xfrm>
-              <a:blipFill>
-                <a:blip r:embed="rId2"/>
-                <a:stretch>
-                  <a:fillRect l="-794" t="-1120"/>
-                </a:stretch>
-              </a:blipFill>
-            </p:spPr>
-            <p:txBody>
-              <a:bodyPr/>
-              <a:lstStyle/>
-              <a:p>
-                <a:r>
-                  <a:rPr lang="en-US">
-                    <a:noFill/>
-                  </a:rPr>
-                  <a:t> </a:t>
-                </a:r>
-              </a:p>
-            </p:txBody>
-          </p:sp>
-        </mc:Fallback>
-      </mc:AlternateContent>
+            <a:pPr marL="0" indent="0">
+              <a:buNone/>
+            </a:pPr>
+            <a:r>
+              <a:rPr lang="en-US" dirty="0" err="1"/>
+              <a:t>Implementirana</a:t>
+            </a:r>
+            <a:r>
+              <a:rPr lang="en-US" dirty="0"/>
+              <a:t> </a:t>
+            </a:r>
+            <a:r>
+              <a:rPr lang="en-US" dirty="0" err="1"/>
+              <a:t>konvoluciona</a:t>
+            </a:r>
+            <a:r>
+              <a:rPr lang="en-US" dirty="0"/>
+              <a:t> </a:t>
+            </a:r>
+            <a:r>
+              <a:rPr lang="en-US" dirty="0" err="1"/>
+              <a:t>neuronska</a:t>
+            </a:r>
+            <a:r>
+              <a:rPr lang="en-US" dirty="0"/>
+              <a:t> </a:t>
+            </a:r>
+            <a:r>
+              <a:rPr lang="en-US" dirty="0" err="1"/>
+              <a:t>mreža</a:t>
+            </a:r>
+            <a:r>
+              <a:rPr lang="en-US" dirty="0"/>
+              <a:t> se </a:t>
+            </a:r>
+            <a:r>
+              <a:rPr lang="en-US" dirty="0" err="1"/>
+              <a:t>sastoji</a:t>
+            </a:r>
+            <a:r>
+              <a:rPr lang="en-US" dirty="0"/>
+              <a:t> od </a:t>
+            </a:r>
+            <a:r>
+              <a:rPr lang="en-US" dirty="0" err="1"/>
+              <a:t>slijedećih</a:t>
+            </a:r>
+            <a:r>
+              <a:rPr lang="en-US" dirty="0"/>
+              <a:t> </a:t>
+            </a:r>
+            <a:r>
+              <a:rPr lang="en-US" dirty="0" err="1"/>
+              <a:t>slojeva</a:t>
+            </a:r>
+            <a:r>
+              <a:rPr lang="en-US" dirty="0"/>
+              <a:t>:</a:t>
+            </a:r>
+          </a:p>
+          <a:p>
+            <a:pPr marL="0" indent="0">
+              <a:buNone/>
+            </a:pPr>
+            <a:r>
+              <a:rPr lang="en-US" dirty="0"/>
+              <a:t>- </a:t>
+            </a:r>
+          </a:p>
+        </p:txBody>
+      </p:sp>
     </p:spTree>
     <p:extLst>
       <p:ext uri="{BB962C8B-B14F-4D97-AF65-F5344CB8AC3E}">
-        <p14:creationId xmlns:p14="http://schemas.microsoft.com/office/powerpoint/2010/main" val="133360018"/>
-      </p:ext>
-    </p:extLst>
-  </p:cSld>
-  <p:clrMapOvr>
-    <a:masterClrMapping/>
-  </p:clrMapOvr>
-</p:sld>
-</file>
-
-<file path=ppt/slides/slide7.xml><?xml version="1.0" encoding="utf-8"?>
-<p:sld xmlns:a="http://schemas.openxmlformats.org/drawingml/2006/main" xmlns:r="http://schemas.openxmlformats.org/officeDocument/2006/relationships" xmlns:p="http://schemas.openxmlformats.org/presentationml/2006/main">
-  <p:cSld>
-    <p:spTree>
-      <p:nvGrpSpPr>
-        <p:cNvPr id="1" name=""/>
-        <p:cNvGrpSpPr/>
-        <p:nvPr/>
-      </p:nvGrpSpPr>
-      <p:grpSpPr>
-        <a:xfrm>
-          <a:off x="0" y="0"/>
-          <a:ext cx="0" cy="0"/>
-          <a:chOff x="0" y="0"/>
-          <a:chExt cx="0" cy="0"/>
-        </a:xfrm>
-      </p:grpSpPr>
-      <p:sp>
-        <p:nvSpPr>
-          <p:cNvPr id="2" name="Title 1">
-            <a:extLst>
-              <a:ext uri="{FF2B5EF4-FFF2-40B4-BE49-F238E27FC236}">
-                <a16:creationId xmlns:a16="http://schemas.microsoft.com/office/drawing/2014/main" id="{E8776C1C-E291-4624-99D2-06E92328B02B}"/>
-              </a:ext>
-            </a:extLst>
-          </p:cNvPr>
-          <p:cNvSpPr>
-            <a:spLocks noGrp="1"/>
-          </p:cNvSpPr>
-          <p:nvPr>
-            <p:ph type="title"/>
-          </p:nvPr>
-        </p:nvSpPr>
-        <p:spPr/>
-        <p:txBody>
-          <a:bodyPr/>
-          <a:lstStyle/>
-          <a:p>
-            <a:r>
-              <a:rPr lang="en-US" dirty="0" err="1"/>
-              <a:t>Uporedba</a:t>
-            </a:r>
-            <a:r>
-              <a:rPr lang="en-US" dirty="0"/>
-              <a:t> </a:t>
-            </a:r>
-            <a:r>
-              <a:rPr lang="en-US" dirty="0" err="1"/>
-              <a:t>rezultata</a:t>
-            </a:r>
-            <a:endParaRPr lang="en-US" dirty="0"/>
-          </a:p>
-        </p:txBody>
-      </p:sp>
-      <p:sp>
-        <p:nvSpPr>
-          <p:cNvPr id="3" name="Content Placeholder 2">
-            <a:extLst>
-              <a:ext uri="{FF2B5EF4-FFF2-40B4-BE49-F238E27FC236}">
-                <a16:creationId xmlns:a16="http://schemas.microsoft.com/office/drawing/2014/main" id="{F3067341-0E32-4231-8CF8-8A47069858BC}"/>
-              </a:ext>
-            </a:extLst>
-          </p:cNvPr>
-          <p:cNvSpPr>
-            <a:spLocks noGrp="1"/>
-          </p:cNvSpPr>
-          <p:nvPr>
-            <p:ph idx="1"/>
-          </p:nvPr>
-        </p:nvSpPr>
-        <p:spPr/>
-        <p:txBody>
-          <a:bodyPr>
-            <a:normAutofit/>
-          </a:bodyPr>
-          <a:lstStyle/>
-          <a:p>
-            <a:pPr marL="0" indent="0">
-              <a:buNone/>
-            </a:pPr>
-            <a:r>
-              <a:rPr lang="en-US" sz="1200" dirty="0"/>
-              <a:t>Da </a:t>
-            </a:r>
-            <a:r>
-              <a:rPr lang="en-US" sz="1200" dirty="0" err="1"/>
-              <a:t>bismo</a:t>
-            </a:r>
-            <a:r>
-              <a:rPr lang="en-US" sz="1200" dirty="0"/>
-              <a:t> </a:t>
-            </a:r>
-            <a:r>
-              <a:rPr lang="en-US" sz="1200" dirty="0" err="1"/>
-              <a:t>bili</a:t>
-            </a:r>
-            <a:r>
-              <a:rPr lang="en-US" sz="1200" dirty="0"/>
-              <a:t> u </a:t>
-            </a:r>
-            <a:r>
-              <a:rPr lang="en-US" sz="1200" dirty="0" err="1"/>
-              <a:t>mogu</a:t>
-            </a:r>
-            <a:r>
-              <a:rPr lang="bs-Latn-BA" sz="1200" dirty="0"/>
-              <a:t>ćnosti da upoređujemo modele mašinskog učenja koristimo par zajedničkih metrika poput odziva, preciznost i f1 skora. Da bismo ove metrike mogli izračunati moramo prvo definisati određene parametre koji će nam pomoći prilikom računanja datih metrika.</a:t>
-            </a:r>
-          </a:p>
-          <a:p>
-            <a:pPr marL="0" indent="0">
-              <a:buNone/>
-            </a:pPr>
-            <a:r>
-              <a:rPr lang="bs-Latn-BA" sz="1200" dirty="0"/>
-              <a:t> - True Positive ili </a:t>
-            </a:r>
-            <a:endParaRPr lang="en-US" sz="1200" dirty="0"/>
-          </a:p>
-        </p:txBody>
-      </p:sp>
-    </p:spTree>
-    <p:extLst>
-      <p:ext uri="{BB962C8B-B14F-4D97-AF65-F5344CB8AC3E}">
-        <p14:creationId xmlns:p14="http://schemas.microsoft.com/office/powerpoint/2010/main" val="3301522357"/>
+        <p14:creationId xmlns:p14="http://schemas.microsoft.com/office/powerpoint/2010/main" val="1889477930"/>
       </p:ext>
     </p:extLst>
   </p:cSld>
@@ -6380,4 +7833,299 @@
     </a:ext>
   </a:extLst>
 </a:theme>
+</file>
+
+<file path=ppt/theme/theme2.xml><?xml version="1.0" encoding="utf-8"?>
+<a:theme xmlns:a="http://schemas.openxmlformats.org/drawingml/2006/main" name="Office Theme">
+  <a:themeElements>
+    <a:clrScheme name="Office">
+      <a:dk1>
+        <a:sysClr val="windowText" lastClr="000000"/>
+      </a:dk1>
+      <a:lt1>
+        <a:sysClr val="window" lastClr="FFFFFF"/>
+      </a:lt1>
+      <a:dk2>
+        <a:srgbClr val="44546A"/>
+      </a:dk2>
+      <a:lt2>
+        <a:srgbClr val="E7E6E6"/>
+      </a:lt2>
+      <a:accent1>
+        <a:srgbClr val="4472C4"/>
+      </a:accent1>
+      <a:accent2>
+        <a:srgbClr val="ED7D31"/>
+      </a:accent2>
+      <a:accent3>
+        <a:srgbClr val="A5A5A5"/>
+      </a:accent3>
+      <a:accent4>
+        <a:srgbClr val="FFC000"/>
+      </a:accent4>
+      <a:accent5>
+        <a:srgbClr val="5B9BD5"/>
+      </a:accent5>
+      <a:accent6>
+        <a:srgbClr val="70AD47"/>
+      </a:accent6>
+      <a:hlink>
+        <a:srgbClr val="0563C1"/>
+      </a:hlink>
+      <a:folHlink>
+        <a:srgbClr val="954F72"/>
+      </a:folHlink>
+    </a:clrScheme>
+    <a:fontScheme name="Office">
+      <a:majorFont>
+        <a:latin typeface="Calibri Light" panose="020F0302020204030204"/>
+        <a:ea typeface=""/>
+        <a:cs typeface=""/>
+        <a:font script="Jpan" typeface="游ゴシック Light"/>
+        <a:font script="Hang" typeface="맑은 고딕"/>
+        <a:font script="Hans" typeface="等线 Light"/>
+        <a:font script="Hant" typeface="新細明體"/>
+        <a:font script="Arab" typeface="Times New Roman"/>
+        <a:font script="Hebr" typeface="Times New Roman"/>
+        <a:font script="Thai" typeface="Angsana New"/>
+        <a:font script="Ethi" typeface="Nyala"/>
+        <a:font script="Beng" typeface="Vrinda"/>
+        <a:font script="Gujr" typeface="Shruti"/>
+        <a:font script="Khmr" typeface="MoolBoran"/>
+        <a:font script="Knda" typeface="Tunga"/>
+        <a:font script="Guru" typeface="Raavi"/>
+        <a:font script="Cans" typeface="Euphemia"/>
+        <a:font script="Cher" typeface="Plantagenet Cherokee"/>
+        <a:font script="Yiii" typeface="Microsoft Yi Baiti"/>
+        <a:font script="Tibt" typeface="Microsoft Himalaya"/>
+        <a:font script="Thaa" typeface="MV Boli"/>
+        <a:font script="Deva" typeface="Mangal"/>
+        <a:font script="Telu" typeface="Gautami"/>
+        <a:font script="Taml" typeface="Latha"/>
+        <a:font script="Syrc" typeface="Estrangelo Edessa"/>
+        <a:font script="Orya" typeface="Kalinga"/>
+        <a:font script="Mlym" typeface="Kartika"/>
+        <a:font script="Laoo" typeface="DokChampa"/>
+        <a:font script="Sinh" typeface="Iskoola Pota"/>
+        <a:font script="Mong" typeface="Mongolian Baiti"/>
+        <a:font script="Viet" typeface="Times New Roman"/>
+        <a:font script="Uigh" typeface="Microsoft Uighur"/>
+        <a:font script="Geor" typeface="Sylfaen"/>
+        <a:font script="Armn" typeface="Arial"/>
+        <a:font script="Bugi" typeface="Leelawadee UI"/>
+        <a:font script="Bopo" typeface="Microsoft JhengHei"/>
+        <a:font script="Java" typeface="Javanese Text"/>
+        <a:font script="Lisu" typeface="Segoe UI"/>
+        <a:font script="Mymr" typeface="Myanmar Text"/>
+        <a:font script="Nkoo" typeface="Ebrima"/>
+        <a:font script="Olck" typeface="Nirmala UI"/>
+        <a:font script="Osma" typeface="Ebrima"/>
+        <a:font script="Phag" typeface="Phagspa"/>
+        <a:font script="Syrn" typeface="Estrangelo Edessa"/>
+        <a:font script="Syrj" typeface="Estrangelo Edessa"/>
+        <a:font script="Syre" typeface="Estrangelo Edessa"/>
+        <a:font script="Sora" typeface="Nirmala UI"/>
+        <a:font script="Tale" typeface="Microsoft Tai Le"/>
+        <a:font script="Talu" typeface="Microsoft New Tai Lue"/>
+        <a:font script="Tfng" typeface="Ebrima"/>
+      </a:majorFont>
+      <a:minorFont>
+        <a:latin typeface="Calibri" panose="020F0502020204030204"/>
+        <a:ea typeface=""/>
+        <a:cs typeface=""/>
+        <a:font script="Jpan" typeface="游ゴシック"/>
+        <a:font script="Hang" typeface="맑은 고딕"/>
+        <a:font script="Hans" typeface="等线"/>
+        <a:font script="Hant" typeface="新細明體"/>
+        <a:font script="Arab" typeface="Arial"/>
+        <a:font script="Hebr" typeface="Arial"/>
+        <a:font script="Thai" typeface="Cordia New"/>
+        <a:font script="Ethi" typeface="Nyala"/>
+        <a:font script="Beng" typeface="Vrinda"/>
+        <a:font script="Gujr" typeface="Shruti"/>
+        <a:font script="Khmr" typeface="DaunPenh"/>
+        <a:font script="Knda" typeface="Tunga"/>
+        <a:font script="Guru" typeface="Raavi"/>
+        <a:font script="Cans" typeface="Euphemia"/>
+        <a:font script="Cher" typeface="Plantagenet Cherokee"/>
+        <a:font script="Yiii" typeface="Microsoft Yi Baiti"/>
+        <a:font script="Tibt" typeface="Microsoft Himalaya"/>
+        <a:font script="Thaa" typeface="MV Boli"/>
+        <a:font script="Deva" typeface="Mangal"/>
+        <a:font script="Telu" typeface="Gautami"/>
+        <a:font script="Taml" typeface="Latha"/>
+        <a:font script="Syrc" typeface="Estrangelo Edessa"/>
+        <a:font script="Orya" typeface="Kalinga"/>
+        <a:font script="Mlym" typeface="Kartika"/>
+        <a:font script="Laoo" typeface="DokChampa"/>
+        <a:font script="Sinh" typeface="Iskoola Pota"/>
+        <a:font script="Mong" typeface="Mongolian Baiti"/>
+        <a:font script="Viet" typeface="Arial"/>
+        <a:font script="Uigh" typeface="Microsoft Uighur"/>
+        <a:font script="Geor" typeface="Sylfaen"/>
+        <a:font script="Armn" typeface="Arial"/>
+        <a:font script="Bugi" typeface="Leelawadee UI"/>
+        <a:font script="Bopo" typeface="Microsoft JhengHei"/>
+        <a:font script="Java" typeface="Javanese Text"/>
+        <a:font script="Lisu" typeface="Segoe UI"/>
+        <a:font script="Mymr" typeface="Myanmar Text"/>
+        <a:font script="Nkoo" typeface="Ebrima"/>
+        <a:font script="Olck" typeface="Nirmala UI"/>
+        <a:font script="Osma" typeface="Ebrima"/>
+        <a:font script="Phag" typeface="Phagspa"/>
+        <a:font script="Syrn" typeface="Estrangelo Edessa"/>
+        <a:font script="Syrj" typeface="Estrangelo Edessa"/>
+        <a:font script="Syre" typeface="Estrangelo Edessa"/>
+        <a:font script="Sora" typeface="Nirmala UI"/>
+        <a:font script="Tale" typeface="Microsoft Tai Le"/>
+        <a:font script="Talu" typeface="Microsoft New Tai Lue"/>
+        <a:font script="Tfng" typeface="Ebrima"/>
+      </a:minorFont>
+    </a:fontScheme>
+    <a:fmtScheme name="Office">
+      <a:fillStyleLst>
+        <a:solidFill>
+          <a:schemeClr val="phClr"/>
+        </a:solidFill>
+        <a:gradFill rotWithShape="1">
+          <a:gsLst>
+            <a:gs pos="0">
+              <a:schemeClr val="phClr">
+                <a:lumMod val="110000"/>
+                <a:satMod val="105000"/>
+                <a:tint val="67000"/>
+              </a:schemeClr>
+            </a:gs>
+            <a:gs pos="50000">
+              <a:schemeClr val="phClr">
+                <a:lumMod val="105000"/>
+                <a:satMod val="103000"/>
+                <a:tint val="73000"/>
+              </a:schemeClr>
+            </a:gs>
+            <a:gs pos="100000">
+              <a:schemeClr val="phClr">
+                <a:lumMod val="105000"/>
+                <a:satMod val="109000"/>
+                <a:tint val="81000"/>
+              </a:schemeClr>
+            </a:gs>
+          </a:gsLst>
+          <a:lin ang="5400000" scaled="0"/>
+        </a:gradFill>
+        <a:gradFill rotWithShape="1">
+          <a:gsLst>
+            <a:gs pos="0">
+              <a:schemeClr val="phClr">
+                <a:satMod val="103000"/>
+                <a:lumMod val="102000"/>
+                <a:tint val="94000"/>
+              </a:schemeClr>
+            </a:gs>
+            <a:gs pos="50000">
+              <a:schemeClr val="phClr">
+                <a:satMod val="110000"/>
+                <a:lumMod val="100000"/>
+                <a:shade val="100000"/>
+              </a:schemeClr>
+            </a:gs>
+            <a:gs pos="100000">
+              <a:schemeClr val="phClr">
+                <a:lumMod val="99000"/>
+                <a:satMod val="120000"/>
+                <a:shade val="78000"/>
+              </a:schemeClr>
+            </a:gs>
+          </a:gsLst>
+          <a:lin ang="5400000" scaled="0"/>
+        </a:gradFill>
+      </a:fillStyleLst>
+      <a:lnStyleLst>
+        <a:ln w="6350" cap="flat" cmpd="sng" algn="ctr">
+          <a:solidFill>
+            <a:schemeClr val="phClr"/>
+          </a:solidFill>
+          <a:prstDash val="solid"/>
+          <a:miter lim="800000"/>
+        </a:ln>
+        <a:ln w="12700" cap="flat" cmpd="sng" algn="ctr">
+          <a:solidFill>
+            <a:schemeClr val="phClr"/>
+          </a:solidFill>
+          <a:prstDash val="solid"/>
+          <a:miter lim="800000"/>
+        </a:ln>
+        <a:ln w="19050" cap="flat" cmpd="sng" algn="ctr">
+          <a:solidFill>
+            <a:schemeClr val="phClr"/>
+          </a:solidFill>
+          <a:prstDash val="solid"/>
+          <a:miter lim="800000"/>
+        </a:ln>
+      </a:lnStyleLst>
+      <a:effectStyleLst>
+        <a:effectStyle>
+          <a:effectLst/>
+        </a:effectStyle>
+        <a:effectStyle>
+          <a:effectLst/>
+        </a:effectStyle>
+        <a:effectStyle>
+          <a:effectLst>
+            <a:outerShdw blurRad="57150" dist="19050" dir="5400000" algn="ctr" rotWithShape="0">
+              <a:srgbClr val="000000">
+                <a:alpha val="63000"/>
+              </a:srgbClr>
+            </a:outerShdw>
+          </a:effectLst>
+        </a:effectStyle>
+      </a:effectStyleLst>
+      <a:bgFillStyleLst>
+        <a:solidFill>
+          <a:schemeClr val="phClr"/>
+        </a:solidFill>
+        <a:solidFill>
+          <a:schemeClr val="phClr">
+            <a:tint val="95000"/>
+            <a:satMod val="170000"/>
+          </a:schemeClr>
+        </a:solidFill>
+        <a:gradFill rotWithShape="1">
+          <a:gsLst>
+            <a:gs pos="0">
+              <a:schemeClr val="phClr">
+                <a:tint val="93000"/>
+                <a:satMod val="150000"/>
+                <a:shade val="98000"/>
+                <a:lumMod val="102000"/>
+              </a:schemeClr>
+            </a:gs>
+            <a:gs pos="50000">
+              <a:schemeClr val="phClr">
+                <a:tint val="98000"/>
+                <a:satMod val="130000"/>
+                <a:shade val="90000"/>
+                <a:lumMod val="103000"/>
+              </a:schemeClr>
+            </a:gs>
+            <a:gs pos="100000">
+              <a:schemeClr val="phClr">
+                <a:shade val="63000"/>
+                <a:satMod val="120000"/>
+              </a:schemeClr>
+            </a:gs>
+          </a:gsLst>
+          <a:lin ang="5400000" scaled="0"/>
+        </a:gradFill>
+      </a:bgFillStyleLst>
+    </a:fmtScheme>
+  </a:themeElements>
+  <a:objectDefaults/>
+  <a:extraClrSchemeLst/>
+  <a:extLst>
+    <a:ext uri="{05A4C25C-085E-4340-85A3-A5531E510DB2}">
+      <thm15:themeFamily xmlns:thm15="http://schemas.microsoft.com/office/thememl/2012/main" name="Office Theme" id="{62F939B6-93AF-4DB8-9C6B-D6C7DFDC589F}" vid="{4A3C46E8-61CC-4603-A589-7422A47A8E4A}"/>
+    </a:ext>
+  </a:extLst>
+</a:theme>
 </file>
--- a/Presentation/Komparativna analiza ML metodologija.pptx
+++ b/Presentation/Komparativna analiza ML metodologija.pptx
@@ -5,7 +5,7 @@
     <p:sldMasterId id="2147483648" r:id="rId1"/>
   </p:sldMasterIdLst>
   <p:notesMasterIdLst>
-    <p:notesMasterId r:id="rId8"/>
+    <p:notesMasterId r:id="rId9"/>
   </p:notesMasterIdLst>
   <p:sldIdLst>
     <p:sldId id="256" r:id="rId2"/>
@@ -13,7 +13,8 @@
     <p:sldId id="262" r:id="rId4"/>
     <p:sldId id="266" r:id="rId5"/>
     <p:sldId id="267" r:id="rId6"/>
-    <p:sldId id="268" r:id="rId7"/>
+    <p:sldId id="271" r:id="rId7"/>
+    <p:sldId id="268" r:id="rId8"/>
   </p:sldIdLst>
   <p:sldSz cx="12192000" cy="6858000"/>
   <p:notesSz cx="6858000" cy="9144000"/>
@@ -202,7 +203,7 @@
           <a:p>
             <a:fld id="{CA5A90D3-49B2-4DF6-BAF7-8B743C4BA0C6}" type="datetimeFigureOut">
               <a:rPr lang="en-US" smtClean="0"/>
-              <a:t>8/17/2026</a:t>
+              <a:t>8/18/2026</a:t>
             </a:fld>
             <a:endParaRPr lang="en-US"/>
           </a:p>
@@ -2007,6 +2008,1257 @@
 </p:notes>
 </file>
 
+<file path=ppt/notesSlides/notesSlide3.xml><?xml version="1.0" encoding="utf-8"?>
+<p:notes xmlns:a="http://schemas.openxmlformats.org/drawingml/2006/main" xmlns:r="http://schemas.openxmlformats.org/officeDocument/2006/relationships" xmlns:p="http://schemas.openxmlformats.org/presentationml/2006/main">
+  <p:cSld>
+    <p:spTree>
+      <p:nvGrpSpPr>
+        <p:cNvPr id="1" name=""/>
+        <p:cNvGrpSpPr/>
+        <p:nvPr/>
+      </p:nvGrpSpPr>
+      <p:grpSpPr>
+        <a:xfrm>
+          <a:off x="0" y="0"/>
+          <a:ext cx="0" cy="0"/>
+          <a:chOff x="0" y="0"/>
+          <a:chExt cx="0" cy="0"/>
+        </a:xfrm>
+      </p:grpSpPr>
+      <p:sp>
+        <p:nvSpPr>
+          <p:cNvPr id="2" name="Slide Image Placeholder 1"/>
+          <p:cNvSpPr>
+            <a:spLocks noGrp="1" noRot="1" noChangeAspect="1"/>
+          </p:cNvSpPr>
+          <p:nvPr>
+            <p:ph type="sldImg"/>
+          </p:nvPr>
+        </p:nvSpPr>
+        <p:spPr/>
+      </p:sp>
+      <p:sp>
+        <p:nvSpPr>
+          <p:cNvPr id="3" name="Notes Placeholder 2"/>
+          <p:cNvSpPr>
+            <a:spLocks noGrp="1"/>
+          </p:cNvSpPr>
+          <p:nvPr>
+            <p:ph type="body" idx="1"/>
+          </p:nvPr>
+        </p:nvSpPr>
+        <p:spPr/>
+        <p:txBody>
+          <a:bodyPr/>
+          <a:lstStyle/>
+          <a:p>
+            <a:r>
+              <a:rPr lang="en-US" b="0" dirty="0" err="1"/>
+              <a:t>Zašto</a:t>
+            </a:r>
+            <a:r>
+              <a:rPr lang="en-US" b="0" dirty="0"/>
+              <a:t> </a:t>
+            </a:r>
+            <a:r>
+              <a:rPr lang="en-US" b="0" dirty="0" err="1"/>
+              <a:t>baš</a:t>
+            </a:r>
+            <a:r>
+              <a:rPr lang="en-US" b="0" dirty="0"/>
+              <a:t> </a:t>
+            </a:r>
+            <a:r>
+              <a:rPr lang="en-US" b="0" dirty="0" err="1"/>
+              <a:t>PyTorch</a:t>
+            </a:r>
+            <a:r>
+              <a:rPr lang="en-US" b="0" dirty="0"/>
+              <a:t> </a:t>
+            </a:r>
+            <a:r>
+              <a:rPr lang="en-US" b="0" dirty="0" err="1"/>
+              <a:t>i</a:t>
+            </a:r>
+            <a:r>
+              <a:rPr lang="en-US" b="0" dirty="0"/>
+              <a:t> </a:t>
+            </a:r>
+            <a:r>
+              <a:rPr lang="en-US" b="0" dirty="0" err="1"/>
+              <a:t>TorchSharp</a:t>
+            </a:r>
+            <a:r>
+              <a:rPr lang="en-US" b="0" dirty="0"/>
+              <a:t>?</a:t>
+            </a:r>
+            <a:br>
+              <a:rPr lang="en-US" dirty="0"/>
+            </a:br>
+            <a:r>
+              <a:rPr lang="en-US" dirty="0" err="1"/>
+              <a:t>Implementacija</a:t>
+            </a:r>
+            <a:r>
+              <a:rPr lang="en-US" dirty="0"/>
+              <a:t> je </a:t>
+            </a:r>
+            <a:r>
+              <a:rPr lang="en-US" dirty="0" err="1"/>
+              <a:t>bila</a:t>
+            </a:r>
+            <a:r>
+              <a:rPr lang="en-US" dirty="0"/>
+              <a:t> </a:t>
+            </a:r>
+            <a:r>
+              <a:rPr lang="en-US" dirty="0" err="1"/>
+              <a:t>moguća</a:t>
+            </a:r>
+            <a:r>
+              <a:rPr lang="en-US" dirty="0"/>
+              <a:t> </a:t>
+            </a:r>
+            <a:r>
+              <a:rPr lang="en-US" dirty="0" err="1"/>
+              <a:t>i</a:t>
+            </a:r>
+            <a:r>
+              <a:rPr lang="en-US" dirty="0"/>
+              <a:t> u </a:t>
+            </a:r>
+            <a:r>
+              <a:rPr lang="en-US" dirty="0" err="1"/>
+              <a:t>drugim</a:t>
+            </a:r>
+            <a:r>
+              <a:rPr lang="en-US" dirty="0"/>
+              <a:t> </a:t>
+            </a:r>
+            <a:r>
+              <a:rPr lang="en-US" dirty="0" err="1"/>
+              <a:t>bibliotekama</a:t>
+            </a:r>
+            <a:r>
+              <a:rPr lang="en-US" dirty="0"/>
+              <a:t>, </a:t>
+            </a:r>
+            <a:r>
+              <a:rPr lang="en-US" dirty="0" err="1"/>
+              <a:t>poput</a:t>
+            </a:r>
+            <a:r>
+              <a:rPr lang="en-US" dirty="0"/>
+              <a:t> TensorFlow.NET, </a:t>
+            </a:r>
+            <a:r>
+              <a:rPr lang="en-US" dirty="0" err="1"/>
+              <a:t>ali</a:t>
+            </a:r>
+            <a:r>
+              <a:rPr lang="en-US" dirty="0"/>
+              <a:t> </a:t>
+            </a:r>
+            <a:r>
+              <a:rPr lang="en-US" dirty="0" err="1"/>
+              <a:t>TorchSharp</a:t>
+            </a:r>
+            <a:r>
+              <a:rPr lang="en-US" dirty="0"/>
+              <a:t> se </a:t>
+            </a:r>
+            <a:r>
+              <a:rPr lang="en-US" dirty="0" err="1"/>
+              <a:t>pokazao</a:t>
+            </a:r>
+            <a:r>
+              <a:rPr lang="en-US" dirty="0"/>
+              <a:t> </a:t>
+            </a:r>
+            <a:r>
+              <a:rPr lang="en-US" dirty="0" err="1"/>
+              <a:t>kao</a:t>
+            </a:r>
+            <a:r>
+              <a:rPr lang="en-US" dirty="0"/>
+              <a:t> </a:t>
+            </a:r>
+            <a:r>
+              <a:rPr lang="en-US" dirty="0" err="1"/>
+              <a:t>najbolja</a:t>
+            </a:r>
+            <a:r>
+              <a:rPr lang="en-US" dirty="0"/>
+              <a:t> </a:t>
+            </a:r>
+            <a:r>
+              <a:rPr lang="en-US" dirty="0" err="1"/>
+              <a:t>opcija</a:t>
+            </a:r>
+            <a:r>
+              <a:rPr lang="en-US" dirty="0"/>
+              <a:t> </a:t>
+            </a:r>
+            <a:r>
+              <a:rPr lang="en-US" dirty="0" err="1"/>
+              <a:t>jer</a:t>
+            </a:r>
+            <a:r>
+              <a:rPr lang="en-US" dirty="0"/>
+              <a:t> </a:t>
+            </a:r>
+            <a:r>
+              <a:rPr lang="en-US" dirty="0" err="1"/>
+              <a:t>omogućava</a:t>
+            </a:r>
+            <a:r>
+              <a:rPr lang="en-US" dirty="0"/>
+              <a:t> </a:t>
+            </a:r>
+            <a:r>
+              <a:rPr lang="en-US" dirty="0" err="1"/>
+              <a:t>direktnu</a:t>
+            </a:r>
+            <a:r>
+              <a:rPr lang="en-US" dirty="0"/>
+              <a:t> </a:t>
+            </a:r>
+            <a:r>
+              <a:rPr lang="en-US" dirty="0" err="1"/>
+              <a:t>implementaciju</a:t>
+            </a:r>
+            <a:r>
+              <a:rPr lang="en-US" dirty="0"/>
+              <a:t> </a:t>
+            </a:r>
+            <a:r>
+              <a:rPr lang="en-US" dirty="0" err="1"/>
+              <a:t>neuronske</a:t>
+            </a:r>
+            <a:r>
+              <a:rPr lang="en-US" dirty="0"/>
+              <a:t> </a:t>
+            </a:r>
+            <a:r>
+              <a:rPr lang="en-US" dirty="0" err="1"/>
+              <a:t>mreže</a:t>
+            </a:r>
+            <a:r>
+              <a:rPr lang="en-US" dirty="0"/>
+              <a:t> </a:t>
+            </a:r>
+            <a:r>
+              <a:rPr lang="en-US" dirty="0" err="1"/>
+              <a:t>preko</a:t>
+            </a:r>
+            <a:r>
+              <a:rPr lang="en-US" dirty="0"/>
+              <a:t> </a:t>
+            </a:r>
+            <a:r>
+              <a:rPr lang="en-US" dirty="0" err="1"/>
+              <a:t>slojeva</a:t>
+            </a:r>
+            <a:r>
+              <a:rPr lang="en-US" dirty="0"/>
+              <a:t>, </a:t>
+            </a:r>
+            <a:r>
+              <a:rPr lang="en-US" dirty="0" err="1"/>
+              <a:t>vrlo</a:t>
+            </a:r>
+            <a:r>
+              <a:rPr lang="en-US" dirty="0"/>
+              <a:t> </a:t>
+            </a:r>
+            <a:r>
+              <a:rPr lang="en-US" dirty="0" err="1"/>
+              <a:t>slično</a:t>
+            </a:r>
+            <a:r>
+              <a:rPr lang="en-US" dirty="0"/>
+              <a:t> </a:t>
+            </a:r>
+            <a:r>
+              <a:rPr lang="en-US" dirty="0" err="1"/>
+              <a:t>kao</a:t>
+            </a:r>
+            <a:r>
+              <a:rPr lang="en-US" dirty="0"/>
+              <a:t> </a:t>
+            </a:r>
+            <a:r>
+              <a:rPr lang="en-US" dirty="0" err="1"/>
+              <a:t>i</a:t>
+            </a:r>
+            <a:r>
+              <a:rPr lang="en-US" dirty="0"/>
+              <a:t> </a:t>
+            </a:r>
+            <a:r>
+              <a:rPr lang="en-US" dirty="0" err="1"/>
+              <a:t>PyTorch</a:t>
+            </a:r>
+            <a:r>
+              <a:rPr lang="en-US" dirty="0"/>
+              <a:t>.</a:t>
+            </a:r>
+          </a:p>
+          <a:p>
+            <a:r>
+              <a:rPr lang="en-US" dirty="0"/>
+              <a:t>Da li </a:t>
+            </a:r>
+            <a:r>
+              <a:rPr lang="en-US" dirty="0" err="1"/>
+              <a:t>postoje</a:t>
+            </a:r>
+            <a:r>
+              <a:rPr lang="en-US" dirty="0"/>
+              <a:t> wrapper za </a:t>
+            </a:r>
+            <a:r>
+              <a:rPr lang="en-US" dirty="0" err="1"/>
+              <a:t>LibTorch</a:t>
+            </a:r>
+            <a:r>
+              <a:rPr lang="en-US" dirty="0"/>
+              <a:t> u </a:t>
+            </a:r>
+            <a:r>
+              <a:rPr lang="en-US" dirty="0" err="1"/>
+              <a:t>drugim</a:t>
+            </a:r>
+            <a:r>
+              <a:rPr lang="en-US" dirty="0"/>
+              <a:t> </a:t>
+            </a:r>
+            <a:r>
+              <a:rPr lang="en-US" dirty="0" err="1"/>
+              <a:t>jezicima</a:t>
+            </a:r>
+            <a:r>
+              <a:rPr lang="en-US" dirty="0"/>
+              <a:t>?</a:t>
+            </a:r>
+          </a:p>
+          <a:p>
+            <a:endParaRPr lang="en-US" dirty="0"/>
+          </a:p>
+          <a:p>
+            <a:r>
+              <a:rPr lang="pl-PL" b="0" dirty="0"/>
+              <a:t>Postoje li omotači za LibTorch u drugim jezicima?</a:t>
+            </a:r>
+            <a:br>
+              <a:rPr lang="en-US" dirty="0"/>
+            </a:br>
+            <a:r>
+              <a:rPr lang="en-US" dirty="0"/>
+              <a:t>Da, </a:t>
+            </a:r>
+            <a:r>
+              <a:rPr lang="en-US" dirty="0" err="1"/>
+              <a:t>postoje</a:t>
+            </a:r>
+            <a:r>
+              <a:rPr lang="en-US" dirty="0"/>
+              <a:t> — u </a:t>
+            </a:r>
+            <a:r>
+              <a:rPr lang="en-US" dirty="0" err="1"/>
+              <a:t>Javi</a:t>
+            </a:r>
+            <a:r>
+              <a:rPr lang="en-US" dirty="0"/>
+              <a:t>, </a:t>
+            </a:r>
+            <a:r>
+              <a:rPr lang="en-US" dirty="0" err="1"/>
+              <a:t>Rustu</a:t>
+            </a:r>
+            <a:r>
+              <a:rPr lang="en-US" dirty="0"/>
+              <a:t> (tch-</a:t>
+            </a:r>
+            <a:r>
+              <a:rPr lang="en-US" dirty="0" err="1"/>
+              <a:t>rs</a:t>
+            </a:r>
+            <a:r>
+              <a:rPr lang="en-US" dirty="0"/>
+              <a:t>), </a:t>
+            </a:r>
+            <a:r>
+              <a:rPr lang="en-US" dirty="0" err="1"/>
+              <a:t>JavaScriptu</a:t>
+            </a:r>
+            <a:r>
+              <a:rPr lang="en-US" dirty="0"/>
+              <a:t>. </a:t>
+            </a:r>
+            <a:r>
+              <a:rPr lang="en-US" dirty="0" err="1"/>
+              <a:t>Kako</a:t>
+            </a:r>
+            <a:r>
+              <a:rPr lang="en-US" dirty="0"/>
+              <a:t> je </a:t>
+            </a:r>
+            <a:r>
+              <a:rPr lang="en-US" dirty="0" err="1"/>
+              <a:t>pozadinska</a:t>
+            </a:r>
+            <a:r>
+              <a:rPr lang="en-US" dirty="0"/>
+              <a:t> </a:t>
+            </a:r>
+            <a:r>
+              <a:rPr lang="en-US" dirty="0" err="1"/>
+              <a:t>logika</a:t>
+            </a:r>
+            <a:r>
+              <a:rPr lang="en-US" dirty="0"/>
+              <a:t> </a:t>
+            </a:r>
+            <a:r>
+              <a:rPr lang="en-US" dirty="0" err="1"/>
+              <a:t>ista</a:t>
+            </a:r>
+            <a:r>
+              <a:rPr lang="en-US" dirty="0"/>
+              <a:t>, </a:t>
+            </a:r>
+            <a:r>
+              <a:rPr lang="en-US" dirty="0" err="1"/>
+              <a:t>omotač</a:t>
+            </a:r>
+            <a:r>
+              <a:rPr lang="en-US" dirty="0"/>
+              <a:t> </a:t>
+            </a:r>
+            <a:r>
+              <a:rPr lang="en-US" dirty="0" err="1"/>
+              <a:t>može</a:t>
+            </a:r>
+            <a:r>
+              <a:rPr lang="en-US" dirty="0"/>
+              <a:t> </a:t>
+            </a:r>
+            <a:r>
+              <a:rPr lang="en-US" dirty="0" err="1"/>
+              <a:t>biti</a:t>
+            </a:r>
+            <a:r>
+              <a:rPr lang="en-US" dirty="0"/>
+              <a:t> </a:t>
+            </a:r>
+            <a:r>
+              <a:rPr lang="en-US" dirty="0" err="1"/>
+              <a:t>napisan</a:t>
+            </a:r>
+            <a:r>
+              <a:rPr lang="en-US" dirty="0"/>
+              <a:t> u </a:t>
+            </a:r>
+            <a:r>
+              <a:rPr lang="en-US" dirty="0" err="1"/>
+              <a:t>bilo</a:t>
+            </a:r>
+            <a:r>
+              <a:rPr lang="en-US" dirty="0"/>
+              <a:t> </a:t>
+            </a:r>
+            <a:r>
+              <a:rPr lang="en-US" dirty="0" err="1"/>
+              <a:t>kojem</a:t>
+            </a:r>
+            <a:r>
+              <a:rPr lang="en-US" dirty="0"/>
+              <a:t> </a:t>
+            </a:r>
+            <a:r>
+              <a:rPr lang="en-US" dirty="0" err="1"/>
+              <a:t>programskom</a:t>
+            </a:r>
+            <a:r>
+              <a:rPr lang="en-US" dirty="0"/>
+              <a:t> </a:t>
+            </a:r>
+            <a:r>
+              <a:rPr lang="en-US" dirty="0" err="1"/>
+              <a:t>jeziku</a:t>
+            </a:r>
+            <a:r>
+              <a:rPr lang="en-US" dirty="0"/>
+              <a:t>.</a:t>
+            </a:r>
+          </a:p>
+        </p:txBody>
+      </p:sp>
+      <p:sp>
+        <p:nvSpPr>
+          <p:cNvPr id="4" name="Slide Number Placeholder 3"/>
+          <p:cNvSpPr>
+            <a:spLocks noGrp="1"/>
+          </p:cNvSpPr>
+          <p:nvPr>
+            <p:ph type="sldNum" sz="quarter" idx="5"/>
+          </p:nvPr>
+        </p:nvSpPr>
+        <p:spPr/>
+        <p:txBody>
+          <a:bodyPr/>
+          <a:lstStyle/>
+          <a:p>
+            <a:fld id="{9200A785-91A4-4858-91F9-18C65D64E1E0}" type="slidenum">
+              <a:rPr lang="en-US" smtClean="0"/>
+              <a:t>4</a:t>
+            </a:fld>
+            <a:endParaRPr lang="en-US"/>
+          </a:p>
+        </p:txBody>
+      </p:sp>
+    </p:spTree>
+    <p:extLst>
+      <p:ext uri="{BB962C8B-B14F-4D97-AF65-F5344CB8AC3E}">
+        <p14:creationId xmlns:p14="http://schemas.microsoft.com/office/powerpoint/2010/main" val="355107787"/>
+      </p:ext>
+    </p:extLst>
+  </p:cSld>
+  <p:clrMapOvr>
+    <a:masterClrMapping/>
+  </p:clrMapOvr>
+</p:notes>
+</file>
+
+<file path=ppt/notesSlides/notesSlide4.xml><?xml version="1.0" encoding="utf-8"?>
+<p:notes xmlns:a="http://schemas.openxmlformats.org/drawingml/2006/main" xmlns:r="http://schemas.openxmlformats.org/officeDocument/2006/relationships" xmlns:p="http://schemas.openxmlformats.org/presentationml/2006/main">
+  <p:cSld>
+    <p:spTree>
+      <p:nvGrpSpPr>
+        <p:cNvPr id="1" name=""/>
+        <p:cNvGrpSpPr/>
+        <p:nvPr/>
+      </p:nvGrpSpPr>
+      <p:grpSpPr>
+        <a:xfrm>
+          <a:off x="0" y="0"/>
+          <a:ext cx="0" cy="0"/>
+          <a:chOff x="0" y="0"/>
+          <a:chExt cx="0" cy="0"/>
+        </a:xfrm>
+      </p:grpSpPr>
+      <p:sp>
+        <p:nvSpPr>
+          <p:cNvPr id="2" name="Slide Image Placeholder 1"/>
+          <p:cNvSpPr>
+            <a:spLocks noGrp="1" noRot="1" noChangeAspect="1"/>
+          </p:cNvSpPr>
+          <p:nvPr>
+            <p:ph type="sldImg"/>
+          </p:nvPr>
+        </p:nvSpPr>
+        <p:spPr/>
+      </p:sp>
+      <p:sp>
+        <p:nvSpPr>
+          <p:cNvPr id="3" name="Notes Placeholder 2"/>
+          <p:cNvSpPr>
+            <a:spLocks noGrp="1"/>
+          </p:cNvSpPr>
+          <p:nvPr>
+            <p:ph type="body" idx="1"/>
+          </p:nvPr>
+        </p:nvSpPr>
+        <p:spPr/>
+        <p:txBody>
+          <a:bodyPr/>
+          <a:lstStyle/>
+          <a:p>
+            <a:pPr rtl="0"/>
+            <a:r>
+              <a:rPr lang="en-US" b="1" dirty="0" err="1"/>
+              <a:t>Kako</a:t>
+            </a:r>
+            <a:r>
+              <a:rPr lang="en-US" b="1" dirty="0"/>
+              <a:t> je </a:t>
+            </a:r>
+            <a:r>
+              <a:rPr lang="en-US" b="1" dirty="0" err="1"/>
+              <a:t>izdvojeno</a:t>
+            </a:r>
+            <a:r>
+              <a:rPr lang="en-US" b="1" dirty="0"/>
+              <a:t> </a:t>
+            </a:r>
+            <a:r>
+              <a:rPr lang="en-US" b="1" dirty="0" err="1"/>
+              <a:t>tih</a:t>
+            </a:r>
+            <a:r>
+              <a:rPr lang="en-US" b="1" dirty="0"/>
+              <a:t> 1097  </a:t>
+            </a:r>
+            <a:r>
+              <a:rPr lang="en-US" b="1" dirty="0" err="1"/>
+              <a:t>slika</a:t>
+            </a:r>
+            <a:r>
+              <a:rPr lang="en-US" b="1" dirty="0"/>
+              <a:t>?</a:t>
+            </a:r>
+            <a:br>
+              <a:rPr lang="en-US" dirty="0"/>
+            </a:br>
+            <a:r>
+              <a:rPr lang="en-US" dirty="0" err="1"/>
+              <a:t>Svaki</a:t>
+            </a:r>
+            <a:r>
+              <a:rPr lang="en-US" dirty="0"/>
+              <a:t> </a:t>
+            </a:r>
+            <a:r>
+              <a:rPr lang="en-US" dirty="0" err="1"/>
+              <a:t>slučaj</a:t>
+            </a:r>
+            <a:r>
+              <a:rPr lang="en-US" dirty="0"/>
+              <a:t> </a:t>
+            </a:r>
+            <a:r>
+              <a:rPr lang="en-US" dirty="0" err="1"/>
+              <a:t>predstavlja</a:t>
+            </a:r>
+            <a:r>
+              <a:rPr lang="en-US" dirty="0"/>
+              <a:t> </a:t>
+            </a:r>
+            <a:r>
+              <a:rPr lang="en-US" dirty="0" err="1"/>
+              <a:t>jednog</a:t>
+            </a:r>
+            <a:r>
+              <a:rPr lang="en-US" dirty="0"/>
+              <a:t> </a:t>
+            </a:r>
+            <a:r>
+              <a:rPr lang="en-US" dirty="0" err="1"/>
+              <a:t>pacijenta</a:t>
+            </a:r>
+            <a:r>
+              <a:rPr lang="en-US" dirty="0"/>
+              <a:t>, a </a:t>
+            </a:r>
+            <a:r>
+              <a:rPr lang="en-US" dirty="0" err="1"/>
+              <a:t>svaki</a:t>
+            </a:r>
+            <a:r>
+              <a:rPr lang="en-US" dirty="0"/>
+              <a:t> </a:t>
+            </a:r>
+            <a:r>
+              <a:rPr lang="en-US" dirty="0" err="1"/>
+              <a:t>snimak</a:t>
+            </a:r>
+            <a:r>
+              <a:rPr lang="en-US" dirty="0"/>
+              <a:t> </a:t>
+            </a:r>
+            <a:r>
+              <a:rPr lang="en-US" dirty="0" err="1"/>
+              <a:t>sadrži</a:t>
+            </a:r>
+            <a:r>
+              <a:rPr lang="en-US" dirty="0"/>
+              <a:t> </a:t>
+            </a:r>
+            <a:r>
+              <a:rPr lang="en-US" dirty="0" err="1"/>
+              <a:t>veliki</a:t>
+            </a:r>
+            <a:r>
+              <a:rPr lang="en-US" dirty="0"/>
+              <a:t> </a:t>
+            </a:r>
+            <a:r>
+              <a:rPr lang="en-US" dirty="0" err="1"/>
+              <a:t>broj</a:t>
+            </a:r>
+            <a:r>
+              <a:rPr lang="en-US" dirty="0"/>
+              <a:t> </a:t>
+            </a:r>
+            <a:r>
+              <a:rPr lang="en-US" dirty="0" err="1"/>
+              <a:t>slojeva</a:t>
+            </a:r>
+            <a:r>
+              <a:rPr lang="en-US" dirty="0"/>
+              <a:t> </a:t>
+            </a:r>
+            <a:r>
+              <a:rPr lang="en-US" dirty="0" err="1"/>
+              <a:t>grudnog</a:t>
+            </a:r>
+            <a:r>
+              <a:rPr lang="en-US" dirty="0"/>
+              <a:t> </a:t>
+            </a:r>
+            <a:r>
+              <a:rPr lang="en-US" dirty="0" err="1"/>
+              <a:t>koša</a:t>
+            </a:r>
+            <a:r>
+              <a:rPr lang="en-US" dirty="0"/>
+              <a:t>. </a:t>
+            </a:r>
+            <a:r>
+              <a:rPr lang="en-US" dirty="0" err="1"/>
+              <a:t>Većina</a:t>
+            </a:r>
+            <a:r>
+              <a:rPr lang="en-US" dirty="0"/>
+              <a:t> </a:t>
+            </a:r>
+            <a:r>
+              <a:rPr lang="en-US" dirty="0" err="1"/>
+              <a:t>slojeva</a:t>
+            </a:r>
+            <a:r>
+              <a:rPr lang="en-US" dirty="0"/>
+              <a:t> ne </a:t>
+            </a:r>
+            <a:r>
+              <a:rPr lang="en-US" dirty="0" err="1"/>
+              <a:t>prikazuje</a:t>
+            </a:r>
+            <a:r>
+              <a:rPr lang="en-US" dirty="0"/>
+              <a:t> </a:t>
+            </a:r>
+            <a:r>
+              <a:rPr lang="en-US" dirty="0" err="1"/>
+              <a:t>relevantnu</a:t>
+            </a:r>
+            <a:r>
+              <a:rPr lang="en-US" dirty="0"/>
+              <a:t> </a:t>
+            </a:r>
+            <a:r>
+              <a:rPr lang="en-US" dirty="0" err="1"/>
+              <a:t>informaciju</a:t>
+            </a:r>
+            <a:r>
+              <a:rPr lang="en-US" dirty="0"/>
+              <a:t>, pa </a:t>
+            </a:r>
+            <a:r>
+              <a:rPr lang="en-US" dirty="0" err="1"/>
+              <a:t>su</a:t>
+            </a:r>
+            <a:r>
+              <a:rPr lang="en-US" dirty="0"/>
+              <a:t> </a:t>
+            </a:r>
+            <a:r>
+              <a:rPr lang="en-US" dirty="0" err="1"/>
+              <a:t>autori</a:t>
+            </a:r>
+            <a:r>
+              <a:rPr lang="en-US" dirty="0"/>
+              <a:t> </a:t>
+            </a:r>
+            <a:r>
+              <a:rPr lang="en-US" dirty="0" err="1"/>
+              <a:t>skupa</a:t>
+            </a:r>
+            <a:r>
+              <a:rPr lang="en-US" dirty="0"/>
+              <a:t> </a:t>
+            </a:r>
+            <a:r>
+              <a:rPr lang="en-US" dirty="0" err="1"/>
+              <a:t>izdvojili</a:t>
+            </a:r>
+            <a:r>
+              <a:rPr lang="en-US" dirty="0"/>
+              <a:t> one </a:t>
+            </a:r>
+            <a:r>
+              <a:rPr lang="en-US" dirty="0" err="1"/>
+              <a:t>na</a:t>
+            </a:r>
+            <a:r>
+              <a:rPr lang="en-US" dirty="0"/>
+              <a:t> </a:t>
+            </a:r>
+            <a:r>
+              <a:rPr lang="en-US" dirty="0" err="1"/>
+              <a:t>kojima</a:t>
+            </a:r>
+            <a:r>
+              <a:rPr lang="en-US" dirty="0"/>
+              <a:t> je </a:t>
+            </a:r>
+            <a:r>
+              <a:rPr lang="en-US" dirty="0" err="1"/>
+              <a:t>nalaz</a:t>
+            </a:r>
+            <a:r>
+              <a:rPr lang="en-US" dirty="0"/>
+              <a:t> </a:t>
+            </a:r>
+            <a:r>
+              <a:rPr lang="en-US" dirty="0" err="1"/>
+              <a:t>vidljiv</a:t>
+            </a:r>
+            <a:r>
+              <a:rPr lang="en-US" dirty="0"/>
+              <a:t>. </a:t>
+            </a:r>
+            <a:r>
+              <a:rPr lang="en-US" dirty="0" err="1"/>
+              <a:t>Selekciju</a:t>
+            </a:r>
+            <a:r>
+              <a:rPr lang="en-US" dirty="0"/>
+              <a:t> </a:t>
+            </a:r>
+            <a:r>
+              <a:rPr lang="en-US" dirty="0" err="1"/>
+              <a:t>su</a:t>
+            </a:r>
+            <a:r>
+              <a:rPr lang="en-US" dirty="0"/>
+              <a:t>, </a:t>
+            </a:r>
+            <a:r>
+              <a:rPr lang="en-US" dirty="0" err="1"/>
+              <a:t>dakle</a:t>
+            </a:r>
+            <a:r>
+              <a:rPr lang="en-US" dirty="0"/>
+              <a:t>, </a:t>
+            </a:r>
+            <a:r>
+              <a:rPr lang="en-US" dirty="0" err="1"/>
+              <a:t>izvršili</a:t>
+            </a:r>
+            <a:r>
+              <a:rPr lang="en-US" dirty="0"/>
+              <a:t> </a:t>
+            </a:r>
+            <a:r>
+              <a:rPr lang="en-US" dirty="0" err="1"/>
+              <a:t>autori</a:t>
+            </a:r>
+            <a:r>
+              <a:rPr lang="en-US" dirty="0"/>
+              <a:t> </a:t>
+            </a:r>
+            <a:r>
+              <a:rPr lang="en-US" dirty="0" err="1"/>
+              <a:t>skupa</a:t>
+            </a:r>
+            <a:r>
+              <a:rPr lang="en-US" dirty="0"/>
+              <a:t>, ne ja.</a:t>
+            </a:r>
+          </a:p>
+          <a:p>
+            <a:pPr rtl="0"/>
+            <a:endParaRPr lang="en-US" b="1" dirty="0"/>
+          </a:p>
+          <a:p>
+            <a:pPr rtl="0"/>
+            <a:r>
+              <a:rPr lang="en-US" b="1" dirty="0" err="1"/>
+              <a:t>Zašto</a:t>
+            </a:r>
+            <a:r>
+              <a:rPr lang="en-US" b="1" dirty="0"/>
+              <a:t> </a:t>
+            </a:r>
+            <a:r>
+              <a:rPr lang="en-US" b="1" dirty="0" err="1"/>
+              <a:t>baš</a:t>
+            </a:r>
+            <a:r>
+              <a:rPr lang="en-US" b="1" dirty="0"/>
+              <a:t> </a:t>
+            </a:r>
+            <a:r>
+              <a:rPr lang="en-US" b="1" dirty="0" err="1"/>
+              <a:t>ovaj</a:t>
+            </a:r>
+            <a:r>
+              <a:rPr lang="en-US" b="1" dirty="0"/>
+              <a:t> </a:t>
+            </a:r>
+            <a:r>
+              <a:rPr lang="en-US" b="1" dirty="0" err="1"/>
+              <a:t>skup</a:t>
+            </a:r>
+            <a:r>
+              <a:rPr lang="en-US" b="1" dirty="0"/>
+              <a:t> </a:t>
+            </a:r>
+            <a:r>
+              <a:rPr lang="en-US" b="1" dirty="0" err="1"/>
+              <a:t>podataka</a:t>
+            </a:r>
+            <a:r>
+              <a:rPr lang="en-US" b="1" dirty="0"/>
+              <a:t>?</a:t>
+            </a:r>
+            <a:br>
+              <a:rPr lang="en-US" dirty="0"/>
+            </a:br>
+            <a:r>
+              <a:rPr lang="en-US" dirty="0"/>
+              <a:t>Kaggle </a:t>
+            </a:r>
+            <a:r>
+              <a:rPr lang="en-US" dirty="0" err="1"/>
+              <a:t>nudi</a:t>
+            </a:r>
+            <a:r>
+              <a:rPr lang="en-US" dirty="0"/>
+              <a:t> </a:t>
+            </a:r>
+            <a:r>
+              <a:rPr lang="en-US" dirty="0" err="1"/>
+              <a:t>veliki</a:t>
+            </a:r>
+            <a:r>
+              <a:rPr lang="en-US" dirty="0"/>
+              <a:t> </a:t>
+            </a:r>
+            <a:r>
+              <a:rPr lang="en-US" dirty="0" err="1"/>
+              <a:t>broj</a:t>
+            </a:r>
+            <a:r>
+              <a:rPr lang="en-US" dirty="0"/>
+              <a:t> </a:t>
+            </a:r>
+            <a:r>
+              <a:rPr lang="en-US" dirty="0" err="1"/>
+              <a:t>skupova</a:t>
+            </a:r>
+            <a:r>
+              <a:rPr lang="en-US" dirty="0"/>
+              <a:t> </a:t>
+            </a:r>
+            <a:r>
+              <a:rPr lang="en-US" dirty="0" err="1"/>
+              <a:t>podataka</a:t>
+            </a:r>
+            <a:r>
+              <a:rPr lang="en-US" dirty="0"/>
+              <a:t>. </a:t>
+            </a:r>
+            <a:r>
+              <a:rPr lang="en-US" dirty="0" err="1"/>
+              <a:t>Ovaj</a:t>
+            </a:r>
+            <a:r>
+              <a:rPr lang="en-US" dirty="0"/>
+              <a:t> je </a:t>
+            </a:r>
+            <a:r>
+              <a:rPr lang="en-US" dirty="0" err="1"/>
+              <a:t>odabran</a:t>
+            </a:r>
+            <a:r>
+              <a:rPr lang="en-US" dirty="0"/>
+              <a:t> </a:t>
+            </a:r>
+            <a:r>
+              <a:rPr lang="en-US" dirty="0" err="1"/>
+              <a:t>jer</a:t>
+            </a:r>
+            <a:r>
+              <a:rPr lang="en-US" dirty="0"/>
+              <a:t> </a:t>
+            </a:r>
+            <a:r>
+              <a:rPr lang="en-US" dirty="0" err="1"/>
+              <a:t>postoji</a:t>
+            </a:r>
+            <a:r>
+              <a:rPr lang="en-US" dirty="0"/>
+              <a:t> </a:t>
+            </a:r>
+            <a:r>
+              <a:rPr lang="en-US" dirty="0" err="1"/>
+              <a:t>mnogo</a:t>
+            </a:r>
+            <a:r>
+              <a:rPr lang="en-US" dirty="0"/>
+              <a:t> </a:t>
+            </a:r>
+            <a:r>
+              <a:rPr lang="en-US" dirty="0" err="1"/>
+              <a:t>objavljenih</a:t>
+            </a:r>
+            <a:r>
+              <a:rPr lang="en-US" dirty="0"/>
+              <a:t> </a:t>
+            </a:r>
+            <a:r>
+              <a:rPr lang="en-US" dirty="0" err="1"/>
+              <a:t>implementacija</a:t>
+            </a:r>
+            <a:r>
+              <a:rPr lang="en-US" dirty="0"/>
+              <a:t> CNN </a:t>
+            </a:r>
+            <a:r>
+              <a:rPr lang="en-US" dirty="0" err="1"/>
+              <a:t>mreža</a:t>
+            </a:r>
+            <a:r>
+              <a:rPr lang="en-US" dirty="0"/>
+              <a:t> </a:t>
+            </a:r>
+            <a:r>
+              <a:rPr lang="en-US" dirty="0" err="1"/>
+              <a:t>nad</a:t>
+            </a:r>
+            <a:r>
+              <a:rPr lang="en-US" dirty="0"/>
+              <a:t> </a:t>
+            </a:r>
+            <a:r>
+              <a:rPr lang="en-US" dirty="0" err="1"/>
+              <a:t>njim</a:t>
+            </a:r>
+            <a:r>
+              <a:rPr lang="en-US" dirty="0"/>
+              <a:t>, pa je </a:t>
+            </a:r>
+            <a:r>
+              <a:rPr lang="en-US" dirty="0" err="1"/>
+              <a:t>mogao</a:t>
+            </a:r>
+            <a:r>
+              <a:rPr lang="en-US" dirty="0"/>
+              <a:t> </a:t>
+            </a:r>
+            <a:r>
+              <a:rPr lang="en-US" dirty="0" err="1"/>
+              <a:t>poslužiti</a:t>
+            </a:r>
+            <a:r>
+              <a:rPr lang="en-US" dirty="0"/>
+              <a:t> </a:t>
+            </a:r>
+            <a:r>
+              <a:rPr lang="en-US" dirty="0" err="1"/>
+              <a:t>i</a:t>
+            </a:r>
+            <a:r>
+              <a:rPr lang="en-US" dirty="0"/>
+              <a:t> </a:t>
+            </a:r>
+            <a:r>
+              <a:rPr lang="en-US" dirty="0" err="1"/>
+              <a:t>kao</a:t>
+            </a:r>
+            <a:r>
+              <a:rPr lang="en-US" dirty="0"/>
+              <a:t> </a:t>
+            </a:r>
+            <a:r>
+              <a:rPr lang="en-US" dirty="0" err="1"/>
+              <a:t>provjera</a:t>
+            </a:r>
+            <a:r>
+              <a:rPr lang="en-US" dirty="0"/>
+              <a:t> da </a:t>
+            </a:r>
+            <a:r>
+              <a:rPr lang="en-US" dirty="0" err="1"/>
+              <a:t>su</a:t>
+            </a:r>
+            <a:r>
+              <a:rPr lang="en-US" dirty="0"/>
+              <a:t> </a:t>
+            </a:r>
+            <a:r>
+              <a:rPr lang="en-US" dirty="0" err="1"/>
+              <a:t>moji</a:t>
+            </a:r>
+            <a:r>
+              <a:rPr lang="en-US" dirty="0"/>
+              <a:t> </a:t>
+            </a:r>
+            <a:r>
+              <a:rPr lang="en-US" dirty="0" err="1"/>
+              <a:t>rezultati</a:t>
+            </a:r>
+            <a:r>
+              <a:rPr lang="en-US" dirty="0"/>
+              <a:t> u </a:t>
+            </a:r>
+            <a:r>
+              <a:rPr lang="en-US" dirty="0" err="1"/>
+              <a:t>očekivanom</a:t>
+            </a:r>
+            <a:r>
+              <a:rPr lang="en-US" dirty="0"/>
+              <a:t> </a:t>
+            </a:r>
+            <a:r>
+              <a:rPr lang="en-US" dirty="0" err="1"/>
+              <a:t>rasponu</a:t>
+            </a:r>
+            <a:r>
+              <a:rPr lang="en-US" dirty="0"/>
+              <a:t>.</a:t>
+            </a:r>
+          </a:p>
+          <a:p>
+            <a:pPr rtl="0"/>
+            <a:endParaRPr lang="en-US" dirty="0"/>
+          </a:p>
+          <a:p>
+            <a:pPr rtl="0"/>
+            <a:r>
+              <a:rPr lang="en-US" b="1" dirty="0"/>
+              <a:t>Koliko </a:t>
+            </a:r>
+            <a:r>
+              <a:rPr lang="en-US" b="1" dirty="0" err="1"/>
+              <a:t>ima</a:t>
+            </a:r>
+            <a:r>
+              <a:rPr lang="en-US" b="1" dirty="0"/>
+              <a:t> </a:t>
+            </a:r>
+            <a:r>
+              <a:rPr lang="en-US" b="1" dirty="0" err="1"/>
+              <a:t>slika</a:t>
+            </a:r>
+            <a:r>
+              <a:rPr lang="en-US" b="1" dirty="0"/>
+              <a:t> po </a:t>
+            </a:r>
+            <a:r>
+              <a:rPr lang="en-US" b="1" dirty="0" err="1"/>
+              <a:t>klasi</a:t>
+            </a:r>
+            <a:r>
+              <a:rPr lang="en-US" b="1" dirty="0"/>
+              <a:t>?</a:t>
+            </a:r>
+          </a:p>
+          <a:p>
+            <a:pPr rtl="0"/>
+            <a:r>
+              <a:rPr lang="en-US" dirty="0" err="1"/>
+              <a:t>Imamo</a:t>
+            </a:r>
+            <a:r>
+              <a:rPr lang="en-US" dirty="0"/>
+              <a:t>:</a:t>
+            </a:r>
+          </a:p>
+          <a:p>
+            <a:pPr rtl="0"/>
+            <a:r>
+              <a:rPr lang="en-US" dirty="0" err="1"/>
+              <a:t>Maligno</a:t>
+            </a:r>
+            <a:r>
+              <a:rPr lang="en-US" dirty="0"/>
+              <a:t>: 561 </a:t>
+            </a:r>
+            <a:r>
+              <a:rPr lang="en-US" dirty="0" err="1"/>
+              <a:t>slika</a:t>
+            </a:r>
+            <a:endParaRPr lang="en-US" dirty="0"/>
+          </a:p>
+          <a:p>
+            <a:pPr rtl="0"/>
+            <a:r>
+              <a:rPr lang="en-US" dirty="0" err="1"/>
+              <a:t>Benigno</a:t>
+            </a:r>
+            <a:r>
+              <a:rPr lang="en-US" dirty="0"/>
+              <a:t>: 120 </a:t>
+            </a:r>
+            <a:r>
+              <a:rPr lang="en-US" dirty="0" err="1"/>
+              <a:t>slika</a:t>
+            </a:r>
+            <a:endParaRPr lang="en-US" dirty="0"/>
+          </a:p>
+          <a:p>
+            <a:pPr rtl="0"/>
+            <a:r>
+              <a:rPr lang="en-US" dirty="0" err="1"/>
+              <a:t>Normalno</a:t>
+            </a:r>
+            <a:r>
+              <a:rPr lang="en-US" dirty="0"/>
+              <a:t>: 416 </a:t>
+            </a:r>
+            <a:r>
+              <a:rPr lang="en-US" dirty="0" err="1"/>
+              <a:t>slika</a:t>
+            </a:r>
+            <a:endParaRPr lang="en-US" dirty="0"/>
+          </a:p>
+          <a:p>
+            <a:pPr rtl="0"/>
+            <a:endParaRPr lang="en-US" dirty="0"/>
+          </a:p>
+        </p:txBody>
+      </p:sp>
+      <p:sp>
+        <p:nvSpPr>
+          <p:cNvPr id="4" name="Slide Number Placeholder 3"/>
+          <p:cNvSpPr>
+            <a:spLocks noGrp="1"/>
+          </p:cNvSpPr>
+          <p:nvPr>
+            <p:ph type="sldNum" sz="quarter" idx="5"/>
+          </p:nvPr>
+        </p:nvSpPr>
+        <p:spPr/>
+        <p:txBody>
+          <a:bodyPr/>
+          <a:lstStyle/>
+          <a:p>
+            <a:fld id="{9200A785-91A4-4858-91F9-18C65D64E1E0}" type="slidenum">
+              <a:rPr lang="en-US" smtClean="0"/>
+              <a:t>5</a:t>
+            </a:fld>
+            <a:endParaRPr lang="en-US"/>
+          </a:p>
+        </p:txBody>
+      </p:sp>
+    </p:spTree>
+    <p:extLst>
+      <p:ext uri="{BB962C8B-B14F-4D97-AF65-F5344CB8AC3E}">
+        <p14:creationId xmlns:p14="http://schemas.microsoft.com/office/powerpoint/2010/main" val="1222018551"/>
+      </p:ext>
+    </p:extLst>
+  </p:cSld>
+  <p:clrMapOvr>
+    <a:masterClrMapping/>
+  </p:clrMapOvr>
+</p:notes>
+</file>
+
 <file path=ppt/slideLayouts/slideLayout1.xml><?xml version="1.0" encoding="utf-8"?>
 <p:sldLayout xmlns:a="http://schemas.openxmlformats.org/drawingml/2006/main" xmlns:r="http://schemas.openxmlformats.org/officeDocument/2006/relationships" xmlns:p="http://schemas.openxmlformats.org/presentationml/2006/main" type="title" preserve="1">
   <p:cSld name="Title Slide">
@@ -2154,7 +3406,7 @@
           <a:p>
             <a:fld id="{B966B63C-CDDC-45F1-A941-1E23D4E81951}" type="datetimeFigureOut">
               <a:rPr lang="en-US" smtClean="0"/>
-              <a:t>8/17/2026</a:t>
+              <a:t>8/18/2026</a:t>
             </a:fld>
             <a:endParaRPr lang="en-US"/>
           </a:p>
@@ -2263,10 +3515,17 @@
         <p:spPr/>
         <p:txBody>
           <a:bodyPr/>
-          <a:lstStyle/>
-          <a:p>
-            <a:r>
-              <a:rPr lang="en-US"/>
+          <a:lstStyle>
+            <a:lvl1pPr>
+              <a:defRPr>
+                <a:latin typeface="Times New Roman" panose="02020603050405020304" pitchFamily="18" charset="0"/>
+                <a:cs typeface="Times New Roman" panose="02020603050405020304" pitchFamily="18" charset="0"/>
+              </a:defRPr>
+            </a:lvl1pPr>
+          </a:lstStyle>
+          <a:p>
+            <a:r>
+              <a:rPr lang="en-US" dirty="0"/>
               <a:t>Click to edit Master title style</a:t>
             </a:r>
           </a:p>
@@ -2295,35 +3554,35 @@
           <a:p>
             <a:pPr lvl="0"/>
             <a:r>
-              <a:rPr lang="en-US"/>
+              <a:rPr lang="en-US" dirty="0"/>
               <a:t>Click to edit Master text styles</a:t>
             </a:r>
           </a:p>
           <a:p>
             <a:pPr lvl="1"/>
             <a:r>
-              <a:rPr lang="en-US"/>
+              <a:rPr lang="en-US" dirty="0"/>
               <a:t>Second level</a:t>
             </a:r>
           </a:p>
           <a:p>
             <a:pPr lvl="2"/>
             <a:r>
-              <a:rPr lang="en-US"/>
+              <a:rPr lang="en-US" dirty="0"/>
               <a:t>Third level</a:t>
             </a:r>
           </a:p>
           <a:p>
             <a:pPr lvl="3"/>
             <a:r>
-              <a:rPr lang="en-US"/>
+              <a:rPr lang="en-US" dirty="0"/>
               <a:t>Fourth level</a:t>
             </a:r>
           </a:p>
           <a:p>
             <a:pPr lvl="4"/>
             <a:r>
-              <a:rPr lang="en-US"/>
+              <a:rPr lang="en-US" dirty="0"/>
               <a:t>Fifth level</a:t>
             </a:r>
           </a:p>
@@ -2352,7 +3611,7 @@
           <a:p>
             <a:fld id="{B966B63C-CDDC-45F1-A941-1E23D4E81951}" type="datetimeFigureOut">
               <a:rPr lang="en-US" smtClean="0"/>
-              <a:t>8/17/2026</a:t>
+              <a:t>8/18/2026</a:t>
             </a:fld>
             <a:endParaRPr lang="en-US"/>
           </a:p>
@@ -2560,7 +3819,7 @@
           <a:p>
             <a:fld id="{B966B63C-CDDC-45F1-A941-1E23D4E81951}" type="datetimeFigureOut">
               <a:rPr lang="en-US" smtClean="0"/>
-              <a:t>8/17/2026</a:t>
+              <a:t>8/18/2026</a:t>
             </a:fld>
             <a:endParaRPr lang="en-US"/>
           </a:p>
@@ -2669,10 +3928,17 @@
         <p:spPr/>
         <p:txBody>
           <a:bodyPr/>
-          <a:lstStyle/>
-          <a:p>
-            <a:r>
-              <a:rPr lang="en-US"/>
+          <a:lstStyle>
+            <a:lvl1pPr>
+              <a:defRPr>
+                <a:latin typeface="Times New Roman" panose="02020603050405020304" pitchFamily="18" charset="0"/>
+                <a:cs typeface="Times New Roman" panose="02020603050405020304" pitchFamily="18" charset="0"/>
+              </a:defRPr>
+            </a:lvl1pPr>
+          </a:lstStyle>
+          <a:p>
+            <a:r>
+              <a:rPr lang="en-US" dirty="0"/>
               <a:t>Click to edit Master title style</a:t>
             </a:r>
           </a:p>
@@ -2697,39 +3963,67 @@
         <p:spPr/>
         <p:txBody>
           <a:bodyPr/>
-          <a:lstStyle/>
+          <a:lstStyle>
+            <a:lvl1pPr>
+              <a:defRPr>
+                <a:latin typeface="Times New Roman" panose="02020603050405020304" pitchFamily="18" charset="0"/>
+                <a:cs typeface="Times New Roman" panose="02020603050405020304" pitchFamily="18" charset="0"/>
+              </a:defRPr>
+            </a:lvl1pPr>
+            <a:lvl2pPr>
+              <a:defRPr>
+                <a:latin typeface="Times New Roman" panose="02020603050405020304" pitchFamily="18" charset="0"/>
+                <a:cs typeface="Times New Roman" panose="02020603050405020304" pitchFamily="18" charset="0"/>
+              </a:defRPr>
+            </a:lvl2pPr>
+            <a:lvl3pPr>
+              <a:defRPr>
+                <a:latin typeface="Times New Roman" panose="02020603050405020304" pitchFamily="18" charset="0"/>
+                <a:cs typeface="Times New Roman" panose="02020603050405020304" pitchFamily="18" charset="0"/>
+              </a:defRPr>
+            </a:lvl3pPr>
+            <a:lvl4pPr>
+              <a:defRPr>
+                <a:latin typeface="Times New Roman" panose="02020603050405020304" pitchFamily="18" charset="0"/>
+                <a:cs typeface="Times New Roman" panose="02020603050405020304" pitchFamily="18" charset="0"/>
+              </a:defRPr>
+            </a:lvl4pPr>
+            <a:lvl5pPr>
+              <a:defRPr/>
+            </a:lvl5pPr>
+          </a:lstStyle>
           <a:p>
             <a:pPr lvl="0"/>
             <a:r>
-              <a:rPr lang="en-US"/>
+              <a:rPr lang="en-US" dirty="0"/>
               <a:t>Click to edit Master text styles</a:t>
             </a:r>
           </a:p>
           <a:p>
             <a:pPr lvl="1"/>
             <a:r>
-              <a:rPr lang="en-US"/>
+              <a:rPr lang="en-US" dirty="0"/>
               <a:t>Second level</a:t>
             </a:r>
           </a:p>
           <a:p>
             <a:pPr lvl="2"/>
             <a:r>
-              <a:rPr lang="en-US"/>
+              <a:rPr lang="en-US" dirty="0"/>
               <a:t>Third level</a:t>
             </a:r>
           </a:p>
           <a:p>
             <a:pPr lvl="3"/>
             <a:r>
-              <a:rPr lang="en-US"/>
+              <a:rPr lang="en-US" dirty="0"/>
               <a:t>Fourth level</a:t>
             </a:r>
           </a:p>
           <a:p>
             <a:pPr lvl="4"/>
             <a:r>
-              <a:rPr lang="en-US"/>
+              <a:rPr lang="en-US" dirty="0"/>
               <a:t>Fifth level</a:t>
             </a:r>
           </a:p>
@@ -2758,7 +4052,7 @@
           <a:p>
             <a:fld id="{B966B63C-CDDC-45F1-A941-1E23D4E81951}" type="datetimeFigureOut">
               <a:rPr lang="en-US" smtClean="0"/>
-              <a:t>8/17/2026</a:t>
+              <a:t>8/18/2026</a:t>
             </a:fld>
             <a:endParaRPr lang="en-US"/>
           </a:p>
@@ -3033,7 +4327,7 @@
           <a:p>
             <a:fld id="{B966B63C-CDDC-45F1-A941-1E23D4E81951}" type="datetimeFigureOut">
               <a:rPr lang="en-US" smtClean="0"/>
-              <a:t>8/17/2026</a:t>
+              <a:t>8/18/2026</a:t>
             </a:fld>
             <a:endParaRPr lang="en-US"/>
           </a:p>
@@ -3298,7 +4592,7 @@
           <a:p>
             <a:fld id="{B966B63C-CDDC-45F1-A941-1E23D4E81951}" type="datetimeFigureOut">
               <a:rPr lang="en-US" smtClean="0"/>
-              <a:t>8/17/2026</a:t>
+              <a:t>8/18/2026</a:t>
             </a:fld>
             <a:endParaRPr lang="en-US"/>
           </a:p>
@@ -3710,7 +5004,7 @@
           <a:p>
             <a:fld id="{B966B63C-CDDC-45F1-A941-1E23D4E81951}" type="datetimeFigureOut">
               <a:rPr lang="en-US" smtClean="0"/>
-              <a:t>8/17/2026</a:t>
+              <a:t>8/18/2026</a:t>
             </a:fld>
             <a:endParaRPr lang="en-US"/>
           </a:p>
@@ -3851,7 +5145,7 @@
           <a:p>
             <a:fld id="{B966B63C-CDDC-45F1-A941-1E23D4E81951}" type="datetimeFigureOut">
               <a:rPr lang="en-US" smtClean="0"/>
-              <a:t>8/17/2026</a:t>
+              <a:t>8/18/2026</a:t>
             </a:fld>
             <a:endParaRPr lang="en-US"/>
           </a:p>
@@ -3964,7 +5258,7 @@
           <a:p>
             <a:fld id="{B966B63C-CDDC-45F1-A941-1E23D4E81951}" type="datetimeFigureOut">
               <a:rPr lang="en-US" smtClean="0"/>
-              <a:t>8/17/2026</a:t>
+              <a:t>8/18/2026</a:t>
             </a:fld>
             <a:endParaRPr lang="en-US"/>
           </a:p>
@@ -4283,7 +5577,7 @@
           <a:p>
             <a:fld id="{B966B63C-CDDC-45F1-A941-1E23D4E81951}" type="datetimeFigureOut">
               <a:rPr lang="en-US" smtClean="0"/>
-              <a:t>8/17/2026</a:t>
+              <a:t>8/18/2026</a:t>
             </a:fld>
             <a:endParaRPr lang="en-US"/>
           </a:p>
@@ -4579,7 +5873,7 @@
           <a:p>
             <a:fld id="{B966B63C-CDDC-45F1-A941-1E23D4E81951}" type="datetimeFigureOut">
               <a:rPr lang="en-US" smtClean="0"/>
-              <a:t>8/17/2026</a:t>
+              <a:t>8/18/2026</a:t>
             </a:fld>
             <a:endParaRPr lang="en-US"/>
           </a:p>
@@ -4820,7 +6114,7 @@
           <a:p>
             <a:fld id="{B966B63C-CDDC-45F1-A941-1E23D4E81951}" type="datetimeFigureOut">
               <a:rPr lang="en-US" smtClean="0"/>
-              <a:t>8/17/2026</a:t>
+              <a:t>8/18/2026</a:t>
             </a:fld>
             <a:endParaRPr lang="en-US"/>
           </a:p>
@@ -6591,6 +7885,9 @@
           <a:bodyPr/>
           <a:lstStyle/>
           <a:p>
+            <a:pPr marL="0" indent="0">
+              <a:buNone/>
+            </a:pPr>
             <a:r>
               <a:rPr lang="en-US" dirty="0"/>
               <a:t>Za </a:t>
@@ -6645,14 +7942,6 @@
             </a:r>
             <a:r>
               <a:rPr lang="en-US" dirty="0" err="1"/>
-              <a:t>popularne</a:t>
-            </a:r>
-            <a:r>
-              <a:rPr lang="en-US" dirty="0"/>
-              <a:t> </a:t>
-            </a:r>
-            <a:r>
-              <a:rPr lang="en-US" dirty="0" err="1"/>
               <a:t>biblioteke</a:t>
             </a:r>
             <a:r>
@@ -6673,35 +7962,192 @@
             </a:r>
             <a:r>
               <a:rPr lang="en-US" dirty="0"/>
+              <a:t> </a:t>
+            </a:r>
+            <a:r>
+              <a:rPr lang="en-US" dirty="0" err="1"/>
+              <a:t>PyTorch</a:t>
+            </a:r>
+            <a:r>
+              <a:rPr lang="en-US" dirty="0"/>
+              <a:t> </a:t>
+            </a:r>
+            <a:r>
+              <a:rPr lang="en-US" dirty="0" err="1"/>
+              <a:t>i</a:t>
+            </a:r>
+            <a:r>
+              <a:rPr lang="en-US" dirty="0"/>
+              <a:t> </a:t>
+            </a:r>
+            <a:r>
+              <a:rPr lang="en-US" dirty="0" err="1"/>
+              <a:t>TorchSharp</a:t>
+            </a:r>
+            <a:r>
+              <a:rPr lang="en-US" dirty="0"/>
+              <a:t>, za Python, </a:t>
+            </a:r>
+            <a:r>
+              <a:rPr lang="en-US" dirty="0" err="1"/>
+              <a:t>odnosno</a:t>
+            </a:r>
+            <a:r>
+              <a:rPr lang="en-US" dirty="0"/>
+              <a:t> .NET </a:t>
+            </a:r>
+            <a:r>
+              <a:rPr lang="en-US" dirty="0" err="1"/>
+              <a:t>okruženje</a:t>
+            </a:r>
+            <a:r>
+              <a:rPr lang="en-US" dirty="0"/>
+              <a:t>.</a:t>
+            </a:r>
+          </a:p>
+          <a:p>
+            <a:pPr marL="0" indent="0">
+              <a:buNone/>
+            </a:pPr>
+            <a:r>
+              <a:rPr lang="en-US" dirty="0" err="1"/>
+              <a:t>Obje</a:t>
+            </a:r>
+            <a:r>
+              <a:rPr lang="en-US" dirty="0"/>
+              <a:t> </a:t>
+            </a:r>
+            <a:r>
+              <a:rPr lang="en-US" dirty="0" err="1"/>
+              <a:t>biblioteke</a:t>
+            </a:r>
+            <a:r>
+              <a:rPr lang="en-US" dirty="0"/>
+              <a:t> </a:t>
+            </a:r>
+            <a:r>
+              <a:rPr lang="en-US" dirty="0" err="1"/>
+              <a:t>su</a:t>
+            </a:r>
+            <a:r>
+              <a:rPr lang="en-US" dirty="0"/>
+              <a:t> </a:t>
+            </a:r>
+            <a:r>
+              <a:rPr lang="en-US" dirty="0" err="1"/>
+              <a:t>omotači</a:t>
+            </a:r>
+            <a:r>
+              <a:rPr lang="en-US" dirty="0"/>
+              <a:t> (</a:t>
+            </a:r>
+            <a:r>
+              <a:rPr lang="en-US" dirty="0" err="1"/>
+              <a:t>engl.</a:t>
+            </a:r>
+            <a:r>
+              <a:rPr lang="en-US" dirty="0"/>
+              <a:t> </a:t>
+            </a:r>
+            <a:r>
+              <a:rPr lang="en-US" i="1" dirty="0"/>
+              <a:t>wrappers</a:t>
+            </a:r>
+            <a:r>
+              <a:rPr lang="en-US" dirty="0"/>
+              <a:t>) </a:t>
+            </a:r>
+            <a:r>
+              <a:rPr lang="en-US" dirty="0" err="1"/>
+              <a:t>nad</a:t>
+            </a:r>
+            <a:r>
+              <a:rPr lang="en-US" dirty="0"/>
+              <a:t> </a:t>
+            </a:r>
+            <a:r>
+              <a:rPr lang="en-US" dirty="0" err="1"/>
+              <a:t>istim</a:t>
+            </a:r>
+            <a:r>
+              <a:rPr lang="en-US" dirty="0"/>
+              <a:t> C++ </a:t>
+            </a:r>
+            <a:r>
+              <a:rPr lang="en-US" dirty="0" err="1"/>
+              <a:t>jezgrom</a:t>
+            </a:r>
+            <a:r>
+              <a:rPr lang="en-US" dirty="0"/>
               <a:t>, </a:t>
             </a:r>
             <a:r>
               <a:rPr lang="en-US" dirty="0" err="1"/>
-              <a:t>PyTorch</a:t>
-            </a:r>
-            <a:r>
-              <a:rPr lang="en-US" dirty="0"/>
-              <a:t> I </a:t>
-            </a:r>
-            <a:r>
-              <a:rPr lang="en-US" dirty="0" err="1"/>
-              <a:t>TorchSharp</a:t>
-            </a:r>
-            <a:r>
-              <a:rPr lang="en-US" dirty="0"/>
-              <a:t> za Python I .NET </a:t>
-            </a:r>
-            <a:r>
-              <a:rPr lang="en-US" dirty="0" err="1"/>
-              <a:t>okruženje</a:t>
-            </a:r>
-            <a:r>
-              <a:rPr lang="en-US" dirty="0"/>
-              <a:t> </a:t>
-            </a:r>
-            <a:r>
-              <a:rPr lang="en-US" dirty="0" err="1"/>
-              <a:t>respektivno</a:t>
+              <a:t>koje</a:t>
+            </a:r>
+            <a:r>
+              <a:rPr lang="en-US" dirty="0"/>
+              <a:t> se </a:t>
+            </a:r>
+            <a:r>
+              <a:rPr lang="en-US" dirty="0" err="1"/>
+              <a:t>distribuira</a:t>
+            </a:r>
+            <a:r>
+              <a:rPr lang="en-US" dirty="0"/>
+              <a:t> </a:t>
+            </a:r>
+            <a:r>
+              <a:rPr lang="en-US" dirty="0" err="1"/>
+              <a:t>kao</a:t>
+            </a:r>
+            <a:r>
+              <a:rPr lang="en-US" dirty="0"/>
+              <a:t> </a:t>
+            </a:r>
+            <a:r>
+              <a:rPr lang="en-US" dirty="0" err="1"/>
+              <a:t>LibTorch</a:t>
+            </a:r>
+            <a:r>
+              <a:rPr lang="en-US" dirty="0"/>
+              <a:t> — u </a:t>
+            </a:r>
+            <a:r>
+              <a:rPr lang="en-US" dirty="0" err="1"/>
+              <a:t>njemu</a:t>
+            </a:r>
+            <a:r>
+              <a:rPr lang="en-US" dirty="0"/>
+              <a:t> se </a:t>
+            </a:r>
+            <a:r>
+              <a:rPr lang="en-US" dirty="0" err="1"/>
+              <a:t>izvršava</a:t>
+            </a:r>
+            <a:r>
+              <a:rPr lang="en-US" dirty="0"/>
+              <a:t> </a:t>
+            </a:r>
+            <a:r>
+              <a:rPr lang="en-US" dirty="0" err="1"/>
+              <a:t>sva</a:t>
+            </a:r>
+            <a:r>
+              <a:rPr lang="en-US" dirty="0"/>
+              <a:t> </a:t>
+            </a:r>
+            <a:r>
+              <a:rPr lang="en-US" dirty="0" err="1"/>
+              <a:t>logika</a:t>
+            </a:r>
+            <a:r>
+              <a:rPr lang="en-US" dirty="0"/>
+              <a:t> </a:t>
+            </a:r>
+            <a:r>
+              <a:rPr lang="en-US" dirty="0" err="1"/>
+              <a:t>treniranja</a:t>
             </a:r>
             <a:r>
               <a:rPr lang="en-US" dirty="0"/>
@@ -6709,97 +8155,12 @@
             </a:r>
           </a:p>
           <a:p>
-            <a:r>
-              <a:rPr lang="en-US" dirty="0" err="1"/>
-              <a:t>Obje</a:t>
-            </a:r>
-            <a:r>
-              <a:rPr lang="en-US" dirty="0"/>
-              <a:t> </a:t>
-            </a:r>
-            <a:r>
-              <a:rPr lang="en-US" dirty="0" err="1"/>
-              <a:t>navedene</a:t>
-            </a:r>
-            <a:r>
-              <a:rPr lang="en-US" dirty="0"/>
-              <a:t> </a:t>
-            </a:r>
-            <a:r>
-              <a:rPr lang="en-US" dirty="0" err="1"/>
-              <a:t>biblioteke</a:t>
-            </a:r>
-            <a:r>
-              <a:rPr lang="en-US" dirty="0"/>
-              <a:t> </a:t>
-            </a:r>
-            <a:r>
-              <a:rPr lang="en-US" dirty="0" err="1"/>
-              <a:t>su</a:t>
-            </a:r>
-            <a:r>
-              <a:rPr lang="en-US" dirty="0"/>
-              <a:t> </a:t>
-            </a:r>
-            <a:r>
-              <a:rPr lang="en-US" dirty="0" err="1"/>
-              <a:t>takozvani</a:t>
-            </a:r>
-            <a:r>
-              <a:rPr lang="en-US" dirty="0"/>
-              <a:t> </a:t>
-            </a:r>
-            <a:r>
-              <a:rPr lang="en-US" dirty="0" err="1"/>
-              <a:t>wrapperi</a:t>
-            </a:r>
-            <a:r>
-              <a:rPr lang="en-US" dirty="0"/>
-              <a:t> koji </a:t>
-            </a:r>
-            <a:r>
-              <a:rPr lang="en-US" dirty="0" err="1"/>
-              <a:t>pozivaju</a:t>
-            </a:r>
-            <a:r>
-              <a:rPr lang="en-US" dirty="0"/>
-              <a:t> </a:t>
-            </a:r>
-            <a:r>
-              <a:rPr lang="en-US" dirty="0" err="1"/>
-              <a:t>internu</a:t>
-            </a:r>
-            <a:r>
-              <a:rPr lang="en-US" dirty="0"/>
-              <a:t> </a:t>
-            </a:r>
-            <a:r>
-              <a:rPr lang="en-US" dirty="0" err="1"/>
-              <a:t>logiku</a:t>
-            </a:r>
-            <a:r>
-              <a:rPr lang="en-US" dirty="0"/>
-              <a:t> </a:t>
-            </a:r>
-            <a:r>
-              <a:rPr lang="en-US" dirty="0" err="1"/>
-              <a:t>biblioteke</a:t>
-            </a:r>
-            <a:r>
-              <a:rPr lang="en-US" dirty="0"/>
-              <a:t> </a:t>
-            </a:r>
-            <a:r>
-              <a:rPr lang="en-US" dirty="0" err="1"/>
-              <a:t>LibTorch</a:t>
-            </a:r>
-            <a:r>
-              <a:rPr lang="en-US" dirty="0"/>
-              <a:t>. </a:t>
-            </a:r>
-            <a:r>
-              <a:rPr lang="en-US" dirty="0" err="1"/>
-              <a:t>LibTorch</a:t>
+            <a:pPr marL="0" indent="0">
+              <a:buNone/>
+            </a:pPr>
+            <a:r>
+              <a:rPr lang="en-US" dirty="0" err="1"/>
+              <a:t>Kako</a:t>
             </a:r>
             <a:r>
               <a:rPr lang="en-US" dirty="0"/>
@@ -6807,23 +8168,7 @@
             </a:r>
             <a:r>
               <a:rPr lang="en-US" dirty="0" err="1"/>
-              <a:t>napisana</a:t>
-            </a:r>
-            <a:r>
-              <a:rPr lang="en-US" dirty="0"/>
-              <a:t> u C++ u </a:t>
-            </a:r>
-            <a:r>
-              <a:rPr lang="en-US" dirty="0" err="1"/>
-              <a:t>kojoj</a:t>
-            </a:r>
-            <a:r>
-              <a:rPr lang="en-US" dirty="0"/>
-              <a:t> se </a:t>
-            </a:r>
-            <a:r>
-              <a:rPr lang="en-US" dirty="0" err="1"/>
-              <a:t>izvršava</a:t>
+              <a:t>pozadinska</a:t>
             </a:r>
             <a:r>
               <a:rPr lang="en-US" dirty="0"/>
@@ -6839,169 +8184,84 @@
             </a:r>
             <a:r>
               <a:rPr lang="en-US" dirty="0" err="1"/>
-              <a:t>prilikom</a:t>
-            </a:r>
-            <a:r>
-              <a:rPr lang="en-US" dirty="0"/>
-              <a:t> </a:t>
-            </a:r>
-            <a:r>
-              <a:rPr lang="en-US" dirty="0" err="1"/>
-              <a:t>treniranja</a:t>
+              <a:t>ista</a:t>
+            </a:r>
+            <a:r>
+              <a:rPr lang="en-US" dirty="0"/>
+              <a:t>, </a:t>
+            </a:r>
+            <a:r>
+              <a:rPr lang="en-US" dirty="0" err="1"/>
+              <a:t>odabir</a:t>
+            </a:r>
+            <a:r>
+              <a:rPr lang="en-US" dirty="0"/>
+              <a:t> Python </a:t>
+            </a:r>
+            <a:r>
+              <a:rPr lang="en-US" dirty="0" err="1"/>
+              <a:t>ili</a:t>
+            </a:r>
+            <a:r>
+              <a:rPr lang="en-US" dirty="0"/>
+              <a:t> .NET </a:t>
+            </a:r>
+            <a:r>
+              <a:rPr lang="en-US" dirty="0" err="1"/>
+              <a:t>okruženja</a:t>
+            </a:r>
+            <a:r>
+              <a:rPr lang="en-US" dirty="0"/>
+              <a:t> </a:t>
+            </a:r>
+            <a:r>
+              <a:rPr lang="en-US" dirty="0" err="1"/>
+              <a:t>teorijski</a:t>
+            </a:r>
+            <a:r>
+              <a:rPr lang="en-US" dirty="0"/>
+              <a:t> ne bi </a:t>
+            </a:r>
+            <a:r>
+              <a:rPr lang="en-US" dirty="0" err="1"/>
+              <a:t>trebao</a:t>
+            </a:r>
+            <a:r>
+              <a:rPr lang="en-US" dirty="0"/>
+              <a:t> </a:t>
+            </a:r>
+            <a:r>
+              <a:rPr lang="en-US" dirty="0" err="1"/>
+              <a:t>značajno</a:t>
+            </a:r>
+            <a:r>
+              <a:rPr lang="en-US" dirty="0"/>
+              <a:t> </a:t>
+            </a:r>
+            <a:r>
+              <a:rPr lang="en-US" dirty="0" err="1"/>
+              <a:t>utjecati</a:t>
+            </a:r>
+            <a:r>
+              <a:rPr lang="en-US" dirty="0"/>
+              <a:t> </a:t>
+            </a:r>
+            <a:r>
+              <a:rPr lang="en-US" dirty="0" err="1"/>
+              <a:t>na</a:t>
+            </a:r>
+            <a:r>
+              <a:rPr lang="en-US" dirty="0"/>
+              <a:t> </a:t>
+            </a:r>
+            <a:r>
+              <a:rPr lang="en-US" dirty="0" err="1"/>
+              <a:t>rezultate</a:t>
             </a:r>
             <a:r>
               <a:rPr lang="en-US" dirty="0"/>
               <a:t>.</a:t>
             </a:r>
-          </a:p>
-          <a:p>
-            <a:r>
-              <a:rPr lang="en-US" dirty="0" err="1"/>
-              <a:t>Kako</a:t>
-            </a:r>
-            <a:r>
-              <a:rPr lang="en-US" dirty="0"/>
-              <a:t> </a:t>
-            </a:r>
-            <a:r>
-              <a:rPr lang="en-US" dirty="0" err="1"/>
-              <a:t>obje</a:t>
-            </a:r>
-            <a:r>
-              <a:rPr lang="en-US" dirty="0"/>
-              <a:t> date </a:t>
-            </a:r>
-            <a:r>
-              <a:rPr lang="en-US" dirty="0" err="1"/>
-              <a:t>biblioteke</a:t>
-            </a:r>
-            <a:r>
-              <a:rPr lang="en-US" dirty="0"/>
-              <a:t> </a:t>
-            </a:r>
-            <a:r>
-              <a:rPr lang="en-US" dirty="0" err="1"/>
-              <a:t>koriste</a:t>
-            </a:r>
-            <a:r>
-              <a:rPr lang="en-US" dirty="0"/>
-              <a:t> </a:t>
-            </a:r>
-            <a:r>
-              <a:rPr lang="en-US" dirty="0" err="1"/>
-              <a:t>istu</a:t>
-            </a:r>
-            <a:r>
-              <a:rPr lang="en-US" dirty="0"/>
-              <a:t> </a:t>
-            </a:r>
-            <a:r>
-              <a:rPr lang="en-US" dirty="0" err="1"/>
-              <a:t>pozadinsku</a:t>
-            </a:r>
-            <a:r>
-              <a:rPr lang="en-US" dirty="0"/>
-              <a:t> </a:t>
-            </a:r>
-            <a:r>
-              <a:rPr lang="en-US" dirty="0" err="1"/>
-              <a:t>logiku</a:t>
-            </a:r>
-            <a:r>
-              <a:rPr lang="en-US" dirty="0"/>
-              <a:t>, </a:t>
-            </a:r>
-            <a:r>
-              <a:rPr lang="en-US" dirty="0" err="1"/>
-              <a:t>odabir</a:t>
-            </a:r>
-            <a:r>
-              <a:rPr lang="en-US" dirty="0"/>
-              <a:t> Python </a:t>
-            </a:r>
-            <a:r>
-              <a:rPr lang="en-US" dirty="0" err="1"/>
-              <a:t>ili</a:t>
-            </a:r>
-            <a:r>
-              <a:rPr lang="en-US" dirty="0"/>
-              <a:t> .NET </a:t>
-            </a:r>
-            <a:r>
-              <a:rPr lang="en-US" dirty="0" err="1"/>
-              <a:t>ekosistema</a:t>
-            </a:r>
-            <a:r>
-              <a:rPr lang="en-US" dirty="0"/>
-              <a:t> za </a:t>
-            </a:r>
-            <a:r>
-              <a:rPr lang="en-US" dirty="0" err="1"/>
-              <a:t>rješavanja</a:t>
-            </a:r>
-            <a:r>
-              <a:rPr lang="en-US" dirty="0"/>
-              <a:t> </a:t>
-            </a:r>
-            <a:r>
-              <a:rPr lang="en-US" dirty="0" err="1"/>
-              <a:t>datog</a:t>
-            </a:r>
-            <a:r>
-              <a:rPr lang="en-US" dirty="0"/>
-              <a:t> </a:t>
-            </a:r>
-            <a:r>
-              <a:rPr lang="en-US" dirty="0" err="1"/>
-              <a:t>problema</a:t>
-            </a:r>
-            <a:r>
-              <a:rPr lang="en-US" dirty="0"/>
-              <a:t> bi </a:t>
-            </a:r>
-            <a:r>
-              <a:rPr lang="en-US" dirty="0" err="1"/>
-              <a:t>teoretski</a:t>
-            </a:r>
-            <a:r>
-              <a:rPr lang="en-US" dirty="0"/>
-              <a:t> </a:t>
-            </a:r>
-            <a:r>
-              <a:rPr lang="en-US" dirty="0" err="1"/>
-              <a:t>trebalo</a:t>
-            </a:r>
-            <a:r>
-              <a:rPr lang="en-US" dirty="0"/>
-              <a:t> </a:t>
-            </a:r>
-            <a:r>
-              <a:rPr lang="en-US" dirty="0" err="1"/>
-              <a:t>biti</a:t>
-            </a:r>
-            <a:r>
-              <a:rPr lang="en-US" dirty="0"/>
-              <a:t> </a:t>
-            </a:r>
-            <a:r>
-              <a:rPr lang="en-US" dirty="0" err="1"/>
-              <a:t>veoma</a:t>
-            </a:r>
-            <a:r>
-              <a:rPr lang="en-US" dirty="0"/>
-              <a:t> </a:t>
-            </a:r>
-            <a:r>
-              <a:rPr lang="en-US" dirty="0" err="1"/>
-              <a:t>slično</a:t>
-            </a:r>
-            <a:r>
-              <a:rPr lang="en-US" dirty="0"/>
-              <a:t>.</a:t>
-            </a:r>
-          </a:p>
-          <a:p>
-            <a:endParaRPr lang="en-US" dirty="0"/>
           </a:p>
         </p:txBody>
       </p:sp>
@@ -7058,15 +8318,7 @@
           <a:p>
             <a:r>
               <a:rPr lang="en-US" dirty="0" err="1"/>
-              <a:t>Trening</a:t>
-            </a:r>
-            <a:r>
-              <a:rPr lang="en-US" dirty="0"/>
-              <a:t> </a:t>
-            </a:r>
-            <a:r>
-              <a:rPr lang="en-US" dirty="0" err="1"/>
-              <a:t>podaci</a:t>
+              <a:t>Podaci</a:t>
             </a:r>
             <a:endParaRPr lang="en-US" dirty="0"/>
           </a:p>
@@ -7097,44 +8349,8 @@
               <a:buNone/>
             </a:pPr>
             <a:r>
-              <a:rPr lang="en-US" dirty="0"/>
-              <a:t>Za </a:t>
-            </a:r>
-            <a:r>
-              <a:rPr lang="en-US" dirty="0" err="1"/>
-              <a:t>treniranje</a:t>
-            </a:r>
-            <a:r>
-              <a:rPr lang="en-US" dirty="0"/>
-              <a:t> </a:t>
-            </a:r>
-            <a:r>
-              <a:rPr lang="en-US" dirty="0" err="1"/>
-              <a:t>konvolucione</a:t>
-            </a:r>
-            <a:r>
-              <a:rPr lang="en-US" dirty="0"/>
-              <a:t> </a:t>
-            </a:r>
-            <a:r>
-              <a:rPr lang="en-US" dirty="0" err="1"/>
-              <a:t>neuronske</a:t>
-            </a:r>
-            <a:r>
-              <a:rPr lang="en-US" dirty="0"/>
-              <a:t> </a:t>
-            </a:r>
-            <a:r>
-              <a:rPr lang="en-US" dirty="0" err="1"/>
-              <a:t>mreže</a:t>
-            </a:r>
-            <a:r>
-              <a:rPr lang="en-US" dirty="0"/>
-              <a:t> </a:t>
-            </a:r>
-            <a:r>
-              <a:rPr lang="en-US" dirty="0" err="1"/>
-              <a:t>korišten</a:t>
+              <a:rPr lang="en-US" dirty="0" err="1"/>
+              <a:t>Korišten</a:t>
             </a:r>
             <a:r>
               <a:rPr lang="en-US" dirty="0"/>
@@ -7142,6 +8358,22 @@
             </a:r>
             <a:r>
               <a:rPr lang="en-US" dirty="0" err="1"/>
+              <a:t>javno</a:t>
+            </a:r>
+            <a:r>
+              <a:rPr lang="en-US" dirty="0"/>
+              <a:t> </a:t>
+            </a:r>
+            <a:r>
+              <a:rPr lang="en-US" dirty="0" err="1"/>
+              <a:t>dostupan</a:t>
+            </a:r>
+            <a:r>
+              <a:rPr lang="en-US" dirty="0"/>
+              <a:t> </a:t>
+            </a:r>
+            <a:r>
+              <a:rPr lang="en-US" dirty="0" err="1"/>
               <a:t>skup</a:t>
             </a:r>
             <a:r>
@@ -7154,6 +8386,30 @@
             </a:r>
             <a:r>
               <a:rPr lang="en-US" dirty="0"/>
+              <a:t> IQ-OTH/NCCD (</a:t>
+            </a:r>
+            <a:r>
+              <a:rPr lang="en-US" dirty="0" err="1"/>
+              <a:t>engl.</a:t>
+            </a:r>
+            <a:r>
+              <a:rPr lang="en-US" dirty="0"/>
+              <a:t> </a:t>
+            </a:r>
+            <a:r>
+              <a:rPr lang="en-US" i="1" dirty="0"/>
+              <a:t>Iraq-Oncology Teaching Hospital / National Center for Cancer Diseases</a:t>
+            </a:r>
+            <a:r>
+              <a:rPr lang="en-US" dirty="0"/>
+              <a:t>), </a:t>
+            </a:r>
+            <a:r>
+              <a:rPr lang="en-US" dirty="0" err="1"/>
+              <a:t>preuzet</a:t>
+            </a:r>
+            <a:r>
+              <a:rPr lang="en-US" dirty="0"/>
               <a:t> </a:t>
             </a:r>
             <a:r>
@@ -7162,56 +8418,13 @@
             </a:r>
             <a:r>
               <a:rPr lang="en-US" dirty="0"/>
-              <a:t> </a:t>
-            </a:r>
-            <a:r>
-              <a:rPr lang="en-US" dirty="0" err="1"/>
-              <a:t>stranica</a:t>
-            </a:r>
-            <a:r>
-              <a:rPr lang="en-US" dirty="0"/>
-              <a:t> Kaggle IQ-OTH/NCCD(</a:t>
-            </a:r>
-            <a:r>
-              <a:rPr lang="en-US" dirty="0" err="1"/>
-              <a:t>eng.</a:t>
-            </a:r>
-            <a:r>
-              <a:rPr lang="en-US" dirty="0"/>
-              <a:t> </a:t>
-            </a:r>
-            <a:r>
-              <a:rPr lang="hr-HR" i="1" dirty="0">
-                <a:effectLst/>
-                <a:latin typeface="Times New Roman" panose="02020603050405020304" pitchFamily="18" charset="0"/>
-                <a:ea typeface="Calibri" panose="020F0502020204030204" pitchFamily="34" charset="0"/>
-              </a:rPr>
-              <a:t>Iraq-Oncology Teaching Hospital</a:t>
-            </a:r>
-            <a:r>
-              <a:rPr lang="en-GB" i="1" dirty="0">
-                <a:effectLst/>
-                <a:latin typeface="Times New Roman" panose="02020603050405020304" pitchFamily="18" charset="0"/>
-                <a:ea typeface="Calibri" panose="020F0502020204030204" pitchFamily="34" charset="0"/>
-              </a:rPr>
-              <a:t>/National </a:t>
-            </a:r>
-            <a:r>
-              <a:rPr lang="en-GB" i="1" dirty="0" err="1">
-                <a:effectLst/>
-                <a:latin typeface="Times New Roman" panose="02020603050405020304" pitchFamily="18" charset="0"/>
-                <a:ea typeface="Calibri" panose="020F0502020204030204" pitchFamily="34" charset="0"/>
-              </a:rPr>
-              <a:t>Center</a:t>
-            </a:r>
-            <a:r>
-              <a:rPr lang="en-GB" i="1" dirty="0">
-                <a:effectLst/>
-                <a:latin typeface="Times New Roman" panose="02020603050405020304" pitchFamily="18" charset="0"/>
-                <a:ea typeface="Calibri" panose="020F0502020204030204" pitchFamily="34" charset="0"/>
-              </a:rPr>
-              <a:t> for Cancer Diseases).</a:t>
-            </a:r>
+              <a:t> Kaggle </a:t>
+            </a:r>
+            <a:r>
+              <a:rPr lang="en-US" dirty="0" err="1"/>
+              <a:t>platforme</a:t>
+            </a:r>
+            <a:endParaRPr lang="en-US" dirty="0"/>
           </a:p>
           <a:p>
             <a:pPr marL="0" indent="0">
@@ -7227,14 +8440,6 @@
             </a:r>
             <a:r>
               <a:rPr lang="en-US" dirty="0" err="1"/>
-              <a:t>podataka</a:t>
-            </a:r>
-            <a:r>
-              <a:rPr lang="en-US" dirty="0"/>
-              <a:t> </a:t>
-            </a:r>
-            <a:r>
-              <a:rPr lang="en-US" dirty="0" err="1"/>
               <a:t>sadrži</a:t>
             </a:r>
             <a:r>
@@ -7271,7 +8476,7 @@
             </a:r>
             <a:r>
               <a:rPr lang="en-US" dirty="0"/>
-              <a:t> 1190 </a:t>
+              <a:t> 1097 </a:t>
             </a:r>
             <a:r>
               <a:rPr lang="en-US" dirty="0" err="1"/>
@@ -7283,27 +8488,11 @@
             </a:r>
             <a:r>
               <a:rPr lang="en-US" dirty="0" err="1"/>
-              <a:t>koje</a:t>
-            </a:r>
-            <a:r>
-              <a:rPr lang="en-US" dirty="0"/>
-              <a:t> </a:t>
-            </a:r>
-            <a:r>
-              <a:rPr lang="en-US" dirty="0" err="1"/>
-              <a:t>su</a:t>
-            </a:r>
-            <a:r>
-              <a:rPr lang="en-US" dirty="0"/>
-              <a:t> </a:t>
-            </a:r>
-            <a:r>
-              <a:rPr lang="en-US" dirty="0" err="1"/>
-              <a:t>grupisane</a:t>
-            </a:r>
-            <a:r>
-              <a:rPr lang="en-US" dirty="0"/>
-              <a:t> u 3 </a:t>
+              <a:t>grupisanih</a:t>
+            </a:r>
+            <a:r>
+              <a:rPr lang="en-US" dirty="0"/>
+              <a:t> u tri </a:t>
             </a:r>
             <a:r>
               <a:rPr lang="en-US" dirty="0" err="1"/>
@@ -7311,14 +8500,10 @@
             </a:r>
             <a:r>
               <a:rPr lang="en-US" dirty="0"/>
-              <a:t>:</a:t>
-            </a:r>
-          </a:p>
-          <a:p>
-            <a:pPr>
-              <a:buFontTx/>
-              <a:buChar char="-"/>
-            </a:pPr>
+              <a:t>: </a:t>
+            </a:r>
+          </a:p>
+          <a:p>
             <a:r>
               <a:rPr lang="en-US" dirty="0" err="1"/>
               <a:t>Maligno</a:t>
@@ -7334,10 +8519,6 @@
             <a:endParaRPr lang="en-US" dirty="0"/>
           </a:p>
           <a:p>
-            <a:pPr>
-              <a:buFontTx/>
-              <a:buChar char="-"/>
-            </a:pPr>
             <a:r>
               <a:rPr lang="en-US" dirty="0" err="1"/>
               <a:t>Benigno</a:t>
@@ -7353,10 +8534,6 @@
             <a:endParaRPr lang="en-US" dirty="0"/>
           </a:p>
           <a:p>
-            <a:pPr>
-              <a:buFontTx/>
-              <a:buChar char="-"/>
-            </a:pPr>
             <a:r>
               <a:rPr lang="en-US" dirty="0" err="1"/>
               <a:t>Normalno</a:t>
@@ -7387,6 +8564,93 @@
 </file>
 
 <file path=ppt/slides/slide6.xml><?xml version="1.0" encoding="utf-8"?>
+<p:sld xmlns:a="http://schemas.openxmlformats.org/drawingml/2006/main" xmlns:r="http://schemas.openxmlformats.org/officeDocument/2006/relationships" xmlns:p="http://schemas.openxmlformats.org/presentationml/2006/main">
+  <p:cSld>
+    <p:spTree>
+      <p:nvGrpSpPr>
+        <p:cNvPr id="1" name=""/>
+        <p:cNvGrpSpPr/>
+        <p:nvPr/>
+      </p:nvGrpSpPr>
+      <p:grpSpPr>
+        <a:xfrm>
+          <a:off x="0" y="0"/>
+          <a:ext cx="0" cy="0"/>
+          <a:chOff x="0" y="0"/>
+          <a:chExt cx="0" cy="0"/>
+        </a:xfrm>
+      </p:grpSpPr>
+      <p:sp>
+        <p:nvSpPr>
+          <p:cNvPr id="2" name="Title 1">
+            <a:extLst>
+              <a:ext uri="{FF2B5EF4-FFF2-40B4-BE49-F238E27FC236}">
+                <a16:creationId xmlns:a16="http://schemas.microsoft.com/office/drawing/2014/main" id="{093D66E3-E65B-4C1C-A898-C193B8AD7D2D}"/>
+              </a:ext>
+            </a:extLst>
+          </p:cNvPr>
+          <p:cNvSpPr>
+            <a:spLocks noGrp="1"/>
+          </p:cNvSpPr>
+          <p:nvPr>
+            <p:ph type="title"/>
+          </p:nvPr>
+        </p:nvSpPr>
+        <p:spPr/>
+        <p:txBody>
+          <a:bodyPr/>
+          <a:lstStyle/>
+          <a:p>
+            <a:r>
+              <a:rPr lang="en-US" dirty="0" err="1"/>
+              <a:t>Podjela</a:t>
+            </a:r>
+            <a:r>
+              <a:rPr lang="en-US" dirty="0"/>
+              <a:t> </a:t>
+            </a:r>
+          </a:p>
+        </p:txBody>
+      </p:sp>
+      <p:sp>
+        <p:nvSpPr>
+          <p:cNvPr id="3" name="Content Placeholder 2">
+            <a:extLst>
+              <a:ext uri="{FF2B5EF4-FFF2-40B4-BE49-F238E27FC236}">
+                <a16:creationId xmlns:a16="http://schemas.microsoft.com/office/drawing/2014/main" id="{DAE8AA96-E28E-4CAE-8775-04F1D24AA98A}"/>
+              </a:ext>
+            </a:extLst>
+          </p:cNvPr>
+          <p:cNvSpPr>
+            <a:spLocks noGrp="1"/>
+          </p:cNvSpPr>
+          <p:nvPr>
+            <p:ph idx="1"/>
+          </p:nvPr>
+        </p:nvSpPr>
+        <p:spPr/>
+        <p:txBody>
+          <a:bodyPr/>
+          <a:lstStyle/>
+          <a:p>
+            <a:endParaRPr lang="en-US"/>
+          </a:p>
+        </p:txBody>
+      </p:sp>
+    </p:spTree>
+    <p:extLst>
+      <p:ext uri="{BB962C8B-B14F-4D97-AF65-F5344CB8AC3E}">
+        <p14:creationId xmlns:p14="http://schemas.microsoft.com/office/powerpoint/2010/main" val="3503353261"/>
+      </p:ext>
+    </p:extLst>
+  </p:cSld>
+  <p:clrMapOvr>
+    <a:masterClrMapping/>
+  </p:clrMapOvr>
+</p:sld>
+</file>
+
+<file path=ppt/slides/slide7.xml><?xml version="1.0" encoding="utf-8"?>
 <p:sld xmlns:a="http://schemas.openxmlformats.org/drawingml/2006/main" xmlns:r="http://schemas.openxmlformats.org/officeDocument/2006/relationships" xmlns:p="http://schemas.openxmlformats.org/presentationml/2006/main">
   <p:cSld>
     <p:spTree>
